--- a/ThreatHunter-Presentation.pptx
+++ b/ThreatHunter-Presentation.pptx
@@ -19,9 +19,10 @@
     <p:sldId id="267" r:id="rId13"/>
     <p:sldId id="268" r:id="rId14"/>
     <p:sldId id="269" r:id="rId15"/>
+    <p:sldId id="270" r:id="rId16"/>
   </p:sldIdLst>
   <p:notesMasterIdLst>
-    <p:notesMasterId r:id="rId16"/>
+    <p:notesMasterId r:id="rId17"/>
   </p:notesMasterIdLst>
   <p:sldSz cx="12192000" cy="6858000"/>
   <p:notesSz cx="6858000" cy="12192000"/>
@@ -979,6 +980,94 @@
             <a:fld id="{F7021451-1387-4CA6-816F-3879F97B5CBC}" type="slidenum">
               <a:rPr lang="en-US"/>
               <a:t>14</a:t>
+            </a:fld>
+            <a:endParaRPr lang="en-US"/>
+          </a:p>
+        </p:txBody>
+      </p:sp>
+    </p:spTree>
+    <p:extLst>
+      <p:ext uri="{BB962C8B-B14F-4D97-AF65-F5344CB8AC3E}">
+        <p14:creationId xmlns:p14="http://schemas.microsoft.com/office/powerpoint/2010/main" val="1024086991"/>
+      </p:ext>
+    </p:extLst>
+  </p:cSld>
+  <p:clrMapOvr>
+    <a:masterClrMapping/>
+  </p:clrMapOvr>
+</p:notes>
+</file>
+
+<file path=ppt/notesSlides/notesSlide15.xml><?xml version="1.0" encoding="utf-8"?>
+<p:notes xmlns:a="http://schemas.openxmlformats.org/drawingml/2006/main" xmlns:r="http://schemas.openxmlformats.org/officeDocument/2006/relationships" xmlns:p="http://schemas.openxmlformats.org/presentationml/2006/main">
+  <p:cSld>
+    <p:spTree>
+      <p:nvGrpSpPr>
+        <p:cNvPr id="1" name=""/>
+        <p:cNvGrpSpPr/>
+        <p:nvPr/>
+      </p:nvGrpSpPr>
+      <p:grpSpPr>
+        <a:xfrm>
+          <a:off x="0" y="0"/>
+          <a:ext cx="0" cy="0"/>
+          <a:chOff x="0" y="0"/>
+          <a:chExt cx="0" cy="0"/>
+        </a:xfrm>
+      </p:grpSpPr>
+      <p:sp>
+        <p:nvSpPr>
+          <p:cNvPr id="2" name="Slide Image Placeholder 1"/>
+          <p:cNvSpPr>
+            <a:spLocks noGrp="1" noRot="1" noChangeAspect="1"/>
+          </p:cNvSpPr>
+          <p:nvPr>
+            <p:ph type="sldImg"/>
+          </p:nvPr>
+        </p:nvSpPr>
+        <p:spPr/>
+      </p:sp>
+      <p:sp>
+        <p:nvSpPr>
+          <p:cNvPr id="3" name="Notes Placeholder 2"/>
+          <p:cNvSpPr>
+            <a:spLocks noGrp="1"/>
+          </p:cNvSpPr>
+          <p:nvPr>
+            <p:ph type="body" idx="1"/>
+          </p:nvPr>
+        </p:nvSpPr>
+        <p:spPr/>
+        <p:txBody>
+          <a:bodyPr/>
+          <a:lstStyle/>
+          <a:p>
+            <a:r>
+              <a:rPr lang="en-US" dirty="0"/>
+              <a:t/>
+            </a:r>
+            <a:endParaRPr lang="en-US" dirty="0"/>
+          </a:p>
+        </p:txBody>
+      </p:sp>
+      <p:sp>
+        <p:nvSpPr>
+          <p:cNvPr id="4" name="Slide Number Placeholder 3"/>
+          <p:cNvSpPr>
+            <a:spLocks noGrp="1"/>
+          </p:cNvSpPr>
+          <p:nvPr>
+            <p:ph type="sldNum" sz="quarter" idx="10"/>
+          </p:nvPr>
+        </p:nvSpPr>
+        <p:spPr/>
+        <p:txBody>
+          <a:bodyPr/>
+          <a:lstStyle/>
+          <a:p>
+            <a:fld id="{F7021451-1387-4CA6-816F-3879F97B5CBC}" type="slidenum">
+              <a:rPr lang="en-US"/>
+              <a:t>15</a:t>
             </a:fld>
             <a:endParaRPr lang="en-US"/>
           </a:p>
@@ -3191,7 +3280,7 @@
                 <a:ea typeface="Cascadia Mono" pitchFamily="34" charset="-122"/>
                 <a:cs typeface="Cascadia Mono" pitchFamily="34" charset="-120"/>
               </a:rPr>
-              <a:t>10 / 14</a:t>
+              <a:t>10 / 15</a:t>
             </a:r>
             <a:endParaRPr lang="en-US" sz="900" dirty="0"/>
           </a:p>
@@ -3918,7 +4007,7 @@
                 <a:ea typeface="Cascadia Mono" pitchFamily="34" charset="-122"/>
                 <a:cs typeface="Cascadia Mono" pitchFamily="34" charset="-120"/>
               </a:rPr>
-              <a:t>11 / 14</a:t>
+              <a:t>11 / 15</a:t>
             </a:r>
             <a:endParaRPr lang="en-US" sz="900" dirty="0"/>
           </a:p>
@@ -4028,7 +4117,7 @@
                 <a:ea typeface="Calibri" pitchFamily="34" charset="-122"/>
                 <a:cs typeface="Calibri" pitchFamily="34" charset="-120"/>
               </a:rPr>
-              <a:t>HUNTING WORKFLOWS</a:t>
+              <a:t>DEFENDER LIVE RESPONSE</a:t>
             </a:r>
             <a:endParaRPr lang="en-US" sz="1100" dirty="0"/>
           </a:p>
@@ -4067,26 +4156,596 @@
                 <a:ea typeface="Calibri" pitchFamily="34" charset="-122"/>
                 <a:cs typeface="Calibri" pitchFamily="34" charset="-120"/>
               </a:rPr>
-              <a:t>Three short playbooks</a:t>
+              <a:t>Every action also runs by parameter</a:t>
             </a:r>
             <a:endParaRPr lang="en-US" sz="3200" dirty="0"/>
           </a:p>
         </p:txBody>
       </p:sp>
-      <p:sp>
-        <p:nvSpPr>
-          <p:cNvPr id="4" name="Shape 2"/>
-          <p:cNvSpPr/>
-          <p:nvPr/>
-        </p:nvSpPr>
-        <p:spPr>
-          <a:xfrm>
-            <a:off x="502920" y="1645920"/>
-            <a:ext cx="3484778" cy="4206240"/>
+      <p:pic>
+        <p:nvPicPr>
+          <p:cNvPr id="4" name="Image 0" descr="/sessions/festive-kind-fermat/mnt/outputs/shots/08_live_response.png">    </p:cNvPr>
+          <p:cNvPicPr>
+            <a:picLocks noChangeAspect="1"/>
+          </p:cNvPicPr>
+          <p:nvPr/>
+        </p:nvPicPr>
+        <p:blipFill>
+          <a:blip r:embed="rId1"/>
+          <a:stretch>
+            <a:fillRect/>
+          </a:stretch>
+        </p:blipFill>
+        <p:spPr>
+          <a:xfrm>
+            <a:off x="502920" y="1554480"/>
+            <a:ext cx="6217920" cy="4023360"/>
+          </a:xfrm>
+          <a:prstGeom prst="rect">
+            <a:avLst/>
+          </a:prstGeom>
+        </p:spPr>
+      </p:pic>
+      <p:sp>
+        <p:nvSpPr>
+          <p:cNvPr id="5" name="Text 2"/>
+          <p:cNvSpPr/>
+          <p:nvPr/>
+        </p:nvSpPr>
+        <p:spPr>
+          <a:xfrm>
+            <a:off x="502920" y="5623560"/>
+            <a:ext cx="6217920" cy="274320"/>
+          </a:xfrm>
+          <a:prstGeom prst="rect">
+            <a:avLst/>
+          </a:prstGeom>
+          <a:noFill/>
+          <a:ln/>
+        </p:spPr>
+        <p:txBody>
+          <a:bodyPr wrap="square" rtlCol="0" anchor="ctr"/>
+          <a:lstStyle/>
+          <a:p>
+            <a:pPr algn="ctr" indent="0" marL="0">
+              <a:buNone/>
+            </a:pPr>
+            <a:r>
+              <a:rPr lang="en-US" sz="1100" i="1" dirty="0">
+                <a:solidFill>
+                  <a:srgbClr val="5A5A62"/>
+                </a:solidFill>
+                <a:latin typeface="Calibri" pitchFamily="34" charset="0"/>
+                <a:ea typeface="Calibri" pitchFamily="34" charset="-122"/>
+                <a:cs typeface="Calibri" pitchFamily="34" charset="-120"/>
+              </a:rPr>
+              <a:t>a Defender Live Response session driving the script with -parameters</a:t>
+            </a:r>
+            <a:endParaRPr lang="en-US" sz="1100" dirty="0"/>
+          </a:p>
+        </p:txBody>
+      </p:sp>
+      <p:sp>
+        <p:nvSpPr>
+          <p:cNvPr id="6" name="Text 3"/>
+          <p:cNvSpPr/>
+          <p:nvPr/>
+        </p:nvSpPr>
+        <p:spPr>
+          <a:xfrm>
+            <a:off x="7086600" y="1554480"/>
+            <a:ext cx="4602175" cy="365760"/>
+          </a:xfrm>
+          <a:prstGeom prst="rect">
+            <a:avLst/>
+          </a:prstGeom>
+          <a:noFill/>
+          <a:ln/>
+        </p:spPr>
+        <p:txBody>
+          <a:bodyPr wrap="square" rtlCol="0" anchor="ctr"/>
+          <a:lstStyle/>
+          <a:p>
+            <a:pPr indent="0" marL="0">
+              <a:buNone/>
+            </a:pPr>
+            <a:r>
+              <a:rPr lang="en-US" sz="1800" b="1" dirty="0">
+                <a:solidFill>
+                  <a:srgbClr val="EB987C"/>
+                </a:solidFill>
+                <a:latin typeface="Calibri" pitchFamily="34" charset="0"/>
+                <a:ea typeface="Calibri" pitchFamily="34" charset="-122"/>
+                <a:cs typeface="Calibri" pitchFamily="34" charset="-120"/>
+              </a:rPr>
+              <a:t>How it behaves</a:t>
+            </a:r>
+            <a:endParaRPr lang="en-US" sz="1800" dirty="0"/>
+          </a:p>
+        </p:txBody>
+      </p:sp>
+      <p:sp>
+        <p:nvSpPr>
+          <p:cNvPr id="7" name="Text 4"/>
+          <p:cNvSpPr/>
+          <p:nvPr/>
+        </p:nvSpPr>
+        <p:spPr>
+          <a:xfrm>
+            <a:off x="7086600" y="2011680"/>
+            <a:ext cx="228600" cy="274320"/>
+          </a:xfrm>
+          <a:prstGeom prst="rect">
+            <a:avLst/>
+          </a:prstGeom>
+          <a:noFill/>
+          <a:ln/>
+        </p:spPr>
+        <p:txBody>
+          <a:bodyPr wrap="square" rtlCol="0" anchor="ctr"/>
+          <a:lstStyle/>
+          <a:p>
+            <a:pPr indent="0" marL="0">
+              <a:buNone/>
+            </a:pPr>
+            <a:r>
+              <a:rPr lang="en-US" sz="1400" dirty="0">
+                <a:solidFill>
+                  <a:srgbClr val="D97757"/>
+                </a:solidFill>
+                <a:latin typeface="Calibri" pitchFamily="34" charset="0"/>
+                <a:ea typeface="Calibri" pitchFamily="34" charset="-122"/>
+                <a:cs typeface="Calibri" pitchFamily="34" charset="-120"/>
+              </a:rPr>
+              <a:t>▸</a:t>
+            </a:r>
+            <a:endParaRPr lang="en-US" sz="1400" dirty="0"/>
+          </a:p>
+        </p:txBody>
+      </p:sp>
+      <p:sp>
+        <p:nvSpPr>
+          <p:cNvPr id="8" name="Text 5"/>
+          <p:cNvSpPr/>
+          <p:nvPr/>
+        </p:nvSpPr>
+        <p:spPr>
+          <a:xfrm>
+            <a:off x="7360920" y="2011680"/>
+            <a:ext cx="4327855" cy="274320"/>
+          </a:xfrm>
+          <a:prstGeom prst="rect">
+            <a:avLst/>
+          </a:prstGeom>
+          <a:noFill/>
+          <a:ln/>
+        </p:spPr>
+        <p:txBody>
+          <a:bodyPr wrap="square" rtlCol="0" anchor="ctr"/>
+          <a:lstStyle/>
+          <a:p>
+            <a:pPr indent="0" marL="0">
+              <a:buNone/>
+            </a:pPr>
+            <a:r>
+              <a:rPr lang="en-US" sz="1400" b="1" dirty="0">
+                <a:solidFill>
+                  <a:srgbClr val="EBEBEB"/>
+                </a:solidFill>
+                <a:latin typeface="Calibri" pitchFamily="34" charset="0"/>
+                <a:ea typeface="Calibri" pitchFamily="34" charset="-122"/>
+                <a:cs typeface="Calibri" pitchFamily="34" charset="-120"/>
+              </a:rPr>
+              <a:t>Auto-detects redirected output</a:t>
+            </a:r>
+            <a:endParaRPr lang="en-US" sz="1400" dirty="0"/>
+          </a:p>
+        </p:txBody>
+      </p:sp>
+      <p:sp>
+        <p:nvSpPr>
+          <p:cNvPr id="9" name="Text 6"/>
+          <p:cNvSpPr/>
+          <p:nvPr/>
+        </p:nvSpPr>
+        <p:spPr>
+          <a:xfrm>
+            <a:off x="7360920" y="2286000"/>
+            <a:ext cx="4327855" cy="640080"/>
+          </a:xfrm>
+          <a:prstGeom prst="rect">
+            <a:avLst/>
+          </a:prstGeom>
+          <a:noFill/>
+          <a:ln/>
+        </p:spPr>
+        <p:txBody>
+          <a:bodyPr wrap="square" rtlCol="0" anchor="t"/>
+          <a:lstStyle/>
+          <a:p>
+            <a:pPr indent="0" marL="0">
+              <a:buNone/>
+            </a:pPr>
+            <a:r>
+              <a:rPr lang="en-US" sz="1200" dirty="0">
+                <a:solidFill>
+                  <a:srgbClr val="D8D8D8"/>
+                </a:solidFill>
+                <a:latin typeface="Calibri" pitchFamily="34" charset="0"/>
+                <a:ea typeface="Calibri" pitchFamily="34" charset="-122"/>
+                <a:cs typeface="Calibri" pitchFamily="34" charset="-120"/>
+              </a:rPr>
+              <a:t>When stdout is captured (Live Response, pipe, redirect), the script emits clean JSON. Interactive consoles still get the formatted table.</a:t>
+            </a:r>
+            <a:endParaRPr lang="en-US" sz="1200" dirty="0"/>
+          </a:p>
+        </p:txBody>
+      </p:sp>
+      <p:sp>
+        <p:nvSpPr>
+          <p:cNvPr id="10" name="Text 7"/>
+          <p:cNvSpPr/>
+          <p:nvPr/>
+        </p:nvSpPr>
+        <p:spPr>
+          <a:xfrm>
+            <a:off x="7086600" y="2926080"/>
+            <a:ext cx="228600" cy="274320"/>
+          </a:xfrm>
+          <a:prstGeom prst="rect">
+            <a:avLst/>
+          </a:prstGeom>
+          <a:noFill/>
+          <a:ln/>
+        </p:spPr>
+        <p:txBody>
+          <a:bodyPr wrap="square" rtlCol="0" anchor="ctr"/>
+          <a:lstStyle/>
+          <a:p>
+            <a:pPr indent="0" marL="0">
+              <a:buNone/>
+            </a:pPr>
+            <a:r>
+              <a:rPr lang="en-US" sz="1400" dirty="0">
+                <a:solidFill>
+                  <a:srgbClr val="D97757"/>
+                </a:solidFill>
+                <a:latin typeface="Calibri" pitchFamily="34" charset="0"/>
+                <a:ea typeface="Calibri" pitchFamily="34" charset="-122"/>
+                <a:cs typeface="Calibri" pitchFamily="34" charset="-120"/>
+              </a:rPr>
+              <a:t>▸</a:t>
+            </a:r>
+            <a:endParaRPr lang="en-US" sz="1400" dirty="0"/>
+          </a:p>
+        </p:txBody>
+      </p:sp>
+      <p:sp>
+        <p:nvSpPr>
+          <p:cNvPr id="11" name="Text 8"/>
+          <p:cNvSpPr/>
+          <p:nvPr/>
+        </p:nvSpPr>
+        <p:spPr>
+          <a:xfrm>
+            <a:off x="7360920" y="2926080"/>
+            <a:ext cx="4327855" cy="274320"/>
+          </a:xfrm>
+          <a:prstGeom prst="rect">
+            <a:avLst/>
+          </a:prstGeom>
+          <a:noFill/>
+          <a:ln/>
+        </p:spPr>
+        <p:txBody>
+          <a:bodyPr wrap="square" rtlCol="0" anchor="ctr"/>
+          <a:lstStyle/>
+          <a:p>
+            <a:pPr indent="0" marL="0">
+              <a:buNone/>
+            </a:pPr>
+            <a:r>
+              <a:rPr lang="en-US" sz="1400" b="1" dirty="0">
+                <a:solidFill>
+                  <a:srgbClr val="EBEBEB"/>
+                </a:solidFill>
+                <a:latin typeface="Calibri" pitchFamily="34" charset="0"/>
+                <a:ea typeface="Calibri" pitchFamily="34" charset="-122"/>
+                <a:cs typeface="Calibri" pitchFamily="34" charset="-120"/>
+              </a:rPr>
+              <a:t>No banner, no menu</a:t>
+            </a:r>
+            <a:endParaRPr lang="en-US" sz="1400" dirty="0"/>
+          </a:p>
+        </p:txBody>
+      </p:sp>
+      <p:sp>
+        <p:nvSpPr>
+          <p:cNvPr id="12" name="Text 9"/>
+          <p:cNvSpPr/>
+          <p:nvPr/>
+        </p:nvSpPr>
+        <p:spPr>
+          <a:xfrm>
+            <a:off x="7360920" y="3200400"/>
+            <a:ext cx="4327855" cy="640080"/>
+          </a:xfrm>
+          <a:prstGeom prst="rect">
+            <a:avLst/>
+          </a:prstGeom>
+          <a:noFill/>
+          <a:ln/>
+        </p:spPr>
+        <p:txBody>
+          <a:bodyPr wrap="square" rtlCol="0" anchor="t"/>
+          <a:lstStyle/>
+          <a:p>
+            <a:pPr indent="0" marL="0">
+              <a:buNone/>
+            </a:pPr>
+            <a:r>
+              <a:rPr lang="en-US" sz="1200" dirty="0">
+                <a:solidFill>
+                  <a:srgbClr val="D8D8D8"/>
+                </a:solidFill>
+                <a:latin typeface="Calibri" pitchFamily="34" charset="0"/>
+                <a:ea typeface="Calibri" pitchFamily="34" charset="-122"/>
+                <a:cs typeface="Calibri" pitchFamily="34" charset="-120"/>
+              </a:rPr>
+              <a:t>Adding any action switch suppresses the TUI chrome automatically. Live Response captures only the action result.</a:t>
+            </a:r>
+            <a:endParaRPr lang="en-US" sz="1200" dirty="0"/>
+          </a:p>
+        </p:txBody>
+      </p:sp>
+      <p:sp>
+        <p:nvSpPr>
+          <p:cNvPr id="13" name="Text 10"/>
+          <p:cNvSpPr/>
+          <p:nvPr/>
+        </p:nvSpPr>
+        <p:spPr>
+          <a:xfrm>
+            <a:off x="7086600" y="3840480"/>
+            <a:ext cx="228600" cy="274320"/>
+          </a:xfrm>
+          <a:prstGeom prst="rect">
+            <a:avLst/>
+          </a:prstGeom>
+          <a:noFill/>
+          <a:ln/>
+        </p:spPr>
+        <p:txBody>
+          <a:bodyPr wrap="square" rtlCol="0" anchor="ctr"/>
+          <a:lstStyle/>
+          <a:p>
+            <a:pPr indent="0" marL="0">
+              <a:buNone/>
+            </a:pPr>
+            <a:r>
+              <a:rPr lang="en-US" sz="1400" dirty="0">
+                <a:solidFill>
+                  <a:srgbClr val="D97757"/>
+                </a:solidFill>
+                <a:latin typeface="Calibri" pitchFamily="34" charset="0"/>
+                <a:ea typeface="Calibri" pitchFamily="34" charset="-122"/>
+                <a:cs typeface="Calibri" pitchFamily="34" charset="-120"/>
+              </a:rPr>
+              <a:t>▸</a:t>
+            </a:r>
+            <a:endParaRPr lang="en-US" sz="1400" dirty="0"/>
+          </a:p>
+        </p:txBody>
+      </p:sp>
+      <p:sp>
+        <p:nvSpPr>
+          <p:cNvPr id="14" name="Text 11"/>
+          <p:cNvSpPr/>
+          <p:nvPr/>
+        </p:nvSpPr>
+        <p:spPr>
+          <a:xfrm>
+            <a:off x="7360920" y="3840480"/>
+            <a:ext cx="4327855" cy="274320"/>
+          </a:xfrm>
+          <a:prstGeom prst="rect">
+            <a:avLst/>
+          </a:prstGeom>
+          <a:noFill/>
+          <a:ln/>
+        </p:spPr>
+        <p:txBody>
+          <a:bodyPr wrap="square" rtlCol="0" anchor="ctr"/>
+          <a:lstStyle/>
+          <a:p>
+            <a:pPr indent="0" marL="0">
+              <a:buNone/>
+            </a:pPr>
+            <a:r>
+              <a:rPr lang="en-US" sz="1400" b="1" dirty="0">
+                <a:solidFill>
+                  <a:srgbClr val="EBEBEB"/>
+                </a:solidFill>
+                <a:latin typeface="Calibri" pitchFamily="34" charset="0"/>
+                <a:ea typeface="Calibri" pitchFamily="34" charset="-122"/>
+                <a:cs typeface="Calibri" pitchFamily="34" charset="-120"/>
+              </a:rPr>
+              <a:t>Chain-of-custody preserved</a:t>
+            </a:r>
+            <a:endParaRPr lang="en-US" sz="1400" dirty="0"/>
+          </a:p>
+        </p:txBody>
+      </p:sp>
+      <p:sp>
+        <p:nvSpPr>
+          <p:cNvPr id="15" name="Text 12"/>
+          <p:cNvSpPr/>
+          <p:nvPr/>
+        </p:nvSpPr>
+        <p:spPr>
+          <a:xfrm>
+            <a:off x="7360920" y="4114800"/>
+            <a:ext cx="4327855" cy="640080"/>
+          </a:xfrm>
+          <a:prstGeom prst="rect">
+            <a:avLst/>
+          </a:prstGeom>
+          <a:noFill/>
+          <a:ln/>
+        </p:spPr>
+        <p:txBody>
+          <a:bodyPr wrap="square" rtlCol="0" anchor="t"/>
+          <a:lstStyle/>
+          <a:p>
+            <a:pPr indent="0" marL="0">
+              <a:buNone/>
+            </a:pPr>
+            <a:r>
+              <a:rPr lang="en-US" sz="1200" dirty="0">
+                <a:solidFill>
+                  <a:srgbClr val="D8D8D8"/>
+                </a:solidFill>
+                <a:latin typeface="Calibri" pitchFamily="34" charset="0"/>
+                <a:ea typeface="Calibri" pitchFamily="34" charset="-122"/>
+                <a:cs typeface="Calibri" pitchFamily="34" charset="-120"/>
+              </a:rPr>
+              <a:t>Every command and its output is appended to session.log even in non-interactive mode. Pull the folder back as evidence.</a:t>
+            </a:r>
+            <a:endParaRPr lang="en-US" sz="1200" dirty="0"/>
+          </a:p>
+        </p:txBody>
+      </p:sp>
+      <p:sp>
+        <p:nvSpPr>
+          <p:cNvPr id="16" name="Text 13"/>
+          <p:cNvSpPr/>
+          <p:nvPr/>
+        </p:nvSpPr>
+        <p:spPr>
+          <a:xfrm>
+            <a:off x="7086600" y="4754880"/>
+            <a:ext cx="228600" cy="274320"/>
+          </a:xfrm>
+          <a:prstGeom prst="rect">
+            <a:avLst/>
+          </a:prstGeom>
+          <a:noFill/>
+          <a:ln/>
+        </p:spPr>
+        <p:txBody>
+          <a:bodyPr wrap="square" rtlCol="0" anchor="ctr"/>
+          <a:lstStyle/>
+          <a:p>
+            <a:pPr indent="0" marL="0">
+              <a:buNone/>
+            </a:pPr>
+            <a:r>
+              <a:rPr lang="en-US" sz="1400" dirty="0">
+                <a:solidFill>
+                  <a:srgbClr val="D97757"/>
+                </a:solidFill>
+                <a:latin typeface="Calibri" pitchFamily="34" charset="0"/>
+                <a:ea typeface="Calibri" pitchFamily="34" charset="-122"/>
+                <a:cs typeface="Calibri" pitchFamily="34" charset="-120"/>
+              </a:rPr>
+              <a:t>▸</a:t>
+            </a:r>
+            <a:endParaRPr lang="en-US" sz="1400" dirty="0"/>
+          </a:p>
+        </p:txBody>
+      </p:sp>
+      <p:sp>
+        <p:nvSpPr>
+          <p:cNvPr id="17" name="Text 14"/>
+          <p:cNvSpPr/>
+          <p:nvPr/>
+        </p:nvSpPr>
+        <p:spPr>
+          <a:xfrm>
+            <a:off x="7360920" y="4754880"/>
+            <a:ext cx="4327855" cy="274320"/>
+          </a:xfrm>
+          <a:prstGeom prst="rect">
+            <a:avLst/>
+          </a:prstGeom>
+          <a:noFill/>
+          <a:ln/>
+        </p:spPr>
+        <p:txBody>
+          <a:bodyPr wrap="square" rtlCol="0" anchor="ctr"/>
+          <a:lstStyle/>
+          <a:p>
+            <a:pPr indent="0" marL="0">
+              <a:buNone/>
+            </a:pPr>
+            <a:r>
+              <a:rPr lang="en-US" sz="1400" b="1" dirty="0">
+                <a:solidFill>
+                  <a:srgbClr val="EBEBEB"/>
+                </a:solidFill>
+                <a:latin typeface="Calibri" pitchFamily="34" charset="0"/>
+                <a:ea typeface="Calibri" pitchFamily="34" charset="-122"/>
+                <a:cs typeface="Calibri" pitchFamily="34" charset="-120"/>
+              </a:rPr>
+              <a:t>Safety net still applies</a:t>
+            </a:r>
+            <a:endParaRPr lang="en-US" sz="1400" dirty="0"/>
+          </a:p>
+        </p:txBody>
+      </p:sp>
+      <p:sp>
+        <p:nvSpPr>
+          <p:cNvPr id="18" name="Text 15"/>
+          <p:cNvSpPr/>
+          <p:nvPr/>
+        </p:nvSpPr>
+        <p:spPr>
+          <a:xfrm>
+            <a:off x="7360920" y="5029200"/>
+            <a:ext cx="4327855" cy="640080"/>
+          </a:xfrm>
+          <a:prstGeom prst="rect">
+            <a:avLst/>
+          </a:prstGeom>
+          <a:noFill/>
+          <a:ln/>
+        </p:spPr>
+        <p:txBody>
+          <a:bodyPr wrap="square" rtlCol="0" anchor="t"/>
+          <a:lstStyle/>
+          <a:p>
+            <a:pPr indent="0" marL="0">
+              <a:buNone/>
+            </a:pPr>
+            <a:r>
+              <a:rPr lang="en-US" sz="1200" dirty="0">
+                <a:solidFill>
+                  <a:srgbClr val="D8D8D8"/>
+                </a:solidFill>
+                <a:latin typeface="Calibri" pitchFamily="34" charset="0"/>
+                <a:ea typeface="Calibri" pitchFamily="34" charset="-122"/>
+                <a:cs typeface="Calibri" pitchFamily="34" charset="-120"/>
+              </a:rPr>
+              <a:t>Destructive patterns (Remove-Item, wevtutil cl, Set-MpPreference, …) reject with exit code 2. Use -Force to bypass.</a:t>
+            </a:r>
+            <a:endParaRPr lang="en-US" sz="1200" dirty="0"/>
+          </a:p>
+        </p:txBody>
+      </p:sp>
+      <p:sp>
+        <p:nvSpPr>
+          <p:cNvPr id="19" name="Shape 16"/>
+          <p:cNvSpPr/>
+          <p:nvPr/>
+        </p:nvSpPr>
+        <p:spPr>
+          <a:xfrm>
+            <a:off x="502920" y="5989320"/>
+            <a:ext cx="11185855" cy="566928"/>
           </a:xfrm>
           <a:prstGeom prst="roundRect">
             <a:avLst>
-              <a:gd name="adj" fmla="val 2624"/>
+              <a:gd name="adj" fmla="val 16129"/>
             </a:avLst>
           </a:prstGeom>
           <a:solidFill>
@@ -4102,30 +4761,30 @@
       </p:sp>
       <p:sp>
         <p:nvSpPr>
-          <p:cNvPr id="5" name="Text 3"/>
-          <p:cNvSpPr/>
-          <p:nvPr/>
-        </p:nvSpPr>
-        <p:spPr>
-          <a:xfrm>
-            <a:off x="777240" y="1874520"/>
-            <a:ext cx="2936138" cy="411480"/>
-          </a:xfrm>
-          <a:prstGeom prst="rect">
-            <a:avLst/>
-          </a:prstGeom>
-          <a:noFill/>
-          <a:ln/>
-        </p:spPr>
-        <p:txBody>
-          <a:bodyPr wrap="square" rtlCol="0" anchor="ctr"/>
-          <a:lstStyle/>
-          <a:p>
-            <a:pPr indent="0" marL="0">
-              <a:buNone/>
-            </a:pPr>
-            <a:r>
-              <a:rPr lang="en-US" sz="1800" b="1" dirty="0">
+          <p:cNvPr id="20" name="Text 17"/>
+          <p:cNvSpPr/>
+          <p:nvPr/>
+        </p:nvSpPr>
+        <p:spPr>
+          <a:xfrm>
+            <a:off x="731520" y="6053328"/>
+            <a:ext cx="914400" cy="411480"/>
+          </a:xfrm>
+          <a:prstGeom prst="rect">
+            <a:avLst/>
+          </a:prstGeom>
+          <a:noFill/>
+          <a:ln/>
+        </p:spPr>
+        <p:txBody>
+          <a:bodyPr wrap="square" rtlCol="0" anchor="ctr"/>
+          <a:lstStyle/>
+          <a:p>
+            <a:pPr indent="0" marL="0">
+              <a:buNone/>
+            </a:pPr>
+            <a:r>
+              <a:rPr lang="en-US" sz="1000" b="1" spc="300" kern="0" dirty="0">
                 <a:solidFill>
                   <a:srgbClr val="EB987C"/>
                 </a:solidFill>
@@ -4133,1534 +4792,85 @@
                 <a:ea typeface="Calibri" pitchFamily="34" charset="-122"/>
                 <a:cs typeface="Calibri" pitchFamily="34" charset="-120"/>
               </a:rPr>
-              <a:t>"Something feels off"</a:t>
-            </a:r>
-            <a:endParaRPr lang="en-US" sz="1800" dirty="0"/>
-          </a:p>
-        </p:txBody>
-      </p:sp>
-      <p:sp>
-        <p:nvSpPr>
-          <p:cNvPr id="6" name="Text 4"/>
-          <p:cNvSpPr/>
-          <p:nvPr/>
-        </p:nvSpPr>
-        <p:spPr>
-          <a:xfrm>
-            <a:off x="777240" y="2286000"/>
-            <a:ext cx="2936138" cy="320040"/>
-          </a:xfrm>
-          <a:prstGeom prst="rect">
-            <a:avLst/>
-          </a:prstGeom>
-          <a:noFill/>
-          <a:ln/>
-        </p:spPr>
-        <p:txBody>
-          <a:bodyPr wrap="square" rtlCol="0" anchor="ctr"/>
-          <a:lstStyle/>
-          <a:p>
-            <a:pPr indent="0" marL="0">
-              <a:buNone/>
-            </a:pPr>
-            <a:r>
-              <a:rPr lang="en-US" sz="1200" i="1" dirty="0">
-                <a:solidFill>
-                  <a:srgbClr val="8E8E94"/>
-                </a:solidFill>
-                <a:latin typeface="Calibri" pitchFamily="34" charset="0"/>
-                <a:ea typeface="Calibri" pitchFamily="34" charset="-122"/>
-                <a:cs typeface="Calibri" pitchFamily="34" charset="-120"/>
-              </a:rPr>
-              <a:t>rapid triage in ~10 minutes</a:t>
-            </a:r>
-            <a:endParaRPr lang="en-US" sz="1200" dirty="0"/>
-          </a:p>
-        </p:txBody>
-      </p:sp>
-      <p:sp>
-        <p:nvSpPr>
-          <p:cNvPr id="7" name="Shape 5"/>
-          <p:cNvSpPr/>
-          <p:nvPr/>
-        </p:nvSpPr>
-        <p:spPr>
-          <a:xfrm>
-            <a:off x="777240" y="2651760"/>
-            <a:ext cx="2936138" cy="0"/>
-          </a:xfrm>
-          <a:prstGeom prst="line">
-            <a:avLst/>
-          </a:prstGeom>
-          <a:noFill/>
-          <a:ln w="9525">
-            <a:solidFill>
-              <a:srgbClr val="2E2E34"/>
-            </a:solidFill>
-            <a:prstDash val="solid"/>
-          </a:ln>
-        </p:spPr>
-      </p:sp>
-      <p:sp>
-        <p:nvSpPr>
-          <p:cNvPr id="8" name="Text 6"/>
-          <p:cNvSpPr/>
-          <p:nvPr/>
-        </p:nvSpPr>
-        <p:spPr>
-          <a:xfrm>
-            <a:off x="777240" y="2834640"/>
-            <a:ext cx="594360" cy="320040"/>
-          </a:xfrm>
-          <a:prstGeom prst="rect">
-            <a:avLst/>
-          </a:prstGeom>
-          <a:noFill/>
-          <a:ln/>
-        </p:spPr>
-        <p:txBody>
-          <a:bodyPr wrap="square" rtlCol="0" anchor="t"/>
-          <a:lstStyle/>
-          <a:p>
-            <a:pPr indent="0" marL="0">
-              <a:buNone/>
-            </a:pPr>
-            <a:r>
-              <a:rPr lang="en-US" sz="1200" b="1" dirty="0">
-                <a:solidFill>
-                  <a:srgbClr val="D97757"/>
+              <a:t>RECIPE</a:t>
+            </a:r>
+            <a:endParaRPr lang="en-US" sz="1000" dirty="0"/>
+          </a:p>
+        </p:txBody>
+      </p:sp>
+      <p:sp>
+        <p:nvSpPr>
+          <p:cNvPr id="21" name="Text 18"/>
+          <p:cNvSpPr/>
+          <p:nvPr/>
+        </p:nvSpPr>
+        <p:spPr>
+          <a:xfrm>
+            <a:off x="1691640" y="6053328"/>
+            <a:ext cx="9814255" cy="411480"/>
+          </a:xfrm>
+          <a:prstGeom prst="rect">
+            <a:avLst/>
+          </a:prstGeom>
+          <a:noFill/>
+          <a:ln/>
+        </p:spPr>
+        <p:txBody>
+          <a:bodyPr wrap="square" rtlCol="0" anchor="ctr"/>
+          <a:lstStyle/>
+          <a:p>
+            <a:pPr indent="0" marL="0">
+              <a:buNone/>
+            </a:pPr>
+            <a:r>
+              <a:rPr lang="en-US" sz="1000" dirty="0">
+                <a:solidFill>
+                  <a:srgbClr val="D8D8D8"/>
                 </a:solidFill>
                 <a:latin typeface="Cascadia Mono" pitchFamily="34" charset="0"/>
                 <a:ea typeface="Cascadia Mono" pitchFamily="34" charset="-122"/>
                 <a:cs typeface="Cascadia Mono" pitchFamily="34" charset="-120"/>
               </a:rPr>
-              <a:t>01</a:t>
-            </a:r>
-            <a:endParaRPr lang="en-US" sz="1200" dirty="0"/>
-          </a:p>
-        </p:txBody>
-      </p:sp>
-      <p:sp>
-        <p:nvSpPr>
-          <p:cNvPr id="9" name="Text 7"/>
-          <p:cNvSpPr/>
-          <p:nvPr/>
-        </p:nvSpPr>
-        <p:spPr>
-          <a:xfrm>
-            <a:off x="1371600" y="2834640"/>
-            <a:ext cx="2341778" cy="502920"/>
-          </a:xfrm>
-          <a:prstGeom prst="rect">
-            <a:avLst/>
-          </a:prstGeom>
-          <a:noFill/>
-          <a:ln/>
-        </p:spPr>
-        <p:txBody>
-          <a:bodyPr wrap="square" rtlCol="0" anchor="t"/>
-          <a:lstStyle/>
-          <a:p>
-            <a:pPr indent="0" marL="0">
-              <a:buNone/>
-            </a:pPr>
-            <a:r>
-              <a:rPr lang="en-US" sz="1100" dirty="0">
-                <a:solidFill>
-                  <a:srgbClr val="D8D8D8"/>
+              <a:t>PutFile ThreatHunter.ps1   ·   run ThreatHunter.ps1 -parameters "-Cmd 'whoami'"   ·   GetFile session.log</a:t>
+            </a:r>
+            <a:endParaRPr lang="en-US" sz="1000" dirty="0"/>
+          </a:p>
+        </p:txBody>
+      </p:sp>
+      <p:sp>
+        <p:nvSpPr>
+          <p:cNvPr id="22" name="Text 19"/>
+          <p:cNvSpPr/>
+          <p:nvPr/>
+        </p:nvSpPr>
+        <p:spPr>
+          <a:xfrm>
+            <a:off x="11002975" y="6492240"/>
+            <a:ext cx="914400" cy="228600"/>
+          </a:xfrm>
+          <a:prstGeom prst="rect">
+            <a:avLst/>
+          </a:prstGeom>
+          <a:noFill/>
+          <a:ln/>
+        </p:spPr>
+        <p:txBody>
+          <a:bodyPr wrap="square" rtlCol="0" anchor="ctr"/>
+          <a:lstStyle/>
+          <a:p>
+            <a:pPr algn="r" indent="0" marL="0">
+              <a:buNone/>
+            </a:pPr>
+            <a:r>
+              <a:rPr lang="en-US" sz="900" dirty="0">
+                <a:solidFill>
+                  <a:srgbClr val="5A5A62"/>
                 </a:solidFill>
                 <a:latin typeface="Cascadia Mono" pitchFamily="34" charset="0"/>
                 <a:ea typeface="Cascadia Mono" pitchFamily="34" charset="-122"/>
                 <a:cs typeface="Cascadia Mono" pitchFamily="34" charset="-120"/>
               </a:rPr>
-              <a:t>/hunt → unsigned binaries running</a:t>
-            </a:r>
-            <a:endParaRPr lang="en-US" sz="1100" dirty="0"/>
-          </a:p>
-        </p:txBody>
-      </p:sp>
-      <p:sp>
-        <p:nvSpPr>
-          <p:cNvPr id="10" name="Text 8"/>
-          <p:cNvSpPr/>
-          <p:nvPr/>
-        </p:nvSpPr>
-        <p:spPr>
-          <a:xfrm>
-            <a:off x="777240" y="3383280"/>
-            <a:ext cx="594360" cy="320040"/>
-          </a:xfrm>
-          <a:prstGeom prst="rect">
-            <a:avLst/>
-          </a:prstGeom>
-          <a:noFill/>
-          <a:ln/>
-        </p:spPr>
-        <p:txBody>
-          <a:bodyPr wrap="square" rtlCol="0" anchor="t"/>
-          <a:lstStyle/>
-          <a:p>
-            <a:pPr indent="0" marL="0">
-              <a:buNone/>
-            </a:pPr>
-            <a:r>
-              <a:rPr lang="en-US" sz="1200" b="1" dirty="0">
-                <a:solidFill>
-                  <a:srgbClr val="D97757"/>
-                </a:solidFill>
-                <a:latin typeface="Cascadia Mono" pitchFamily="34" charset="0"/>
-                <a:ea typeface="Cascadia Mono" pitchFamily="34" charset="-122"/>
-                <a:cs typeface="Cascadia Mono" pitchFamily="34" charset="-120"/>
-              </a:rPr>
-              <a:t>02</a:t>
-            </a:r>
-            <a:endParaRPr lang="en-US" sz="1200" dirty="0"/>
-          </a:p>
-        </p:txBody>
-      </p:sp>
-      <p:sp>
-        <p:nvSpPr>
-          <p:cNvPr id="11" name="Text 9"/>
-          <p:cNvSpPr/>
-          <p:nvPr/>
-        </p:nvSpPr>
-        <p:spPr>
-          <a:xfrm>
-            <a:off x="1371600" y="3383280"/>
-            <a:ext cx="2341778" cy="502920"/>
-          </a:xfrm>
-          <a:prstGeom prst="rect">
-            <a:avLst/>
-          </a:prstGeom>
-          <a:noFill/>
-          <a:ln/>
-        </p:spPr>
-        <p:txBody>
-          <a:bodyPr wrap="square" rtlCol="0" anchor="t"/>
-          <a:lstStyle/>
-          <a:p>
-            <a:pPr indent="0" marL="0">
-              <a:buNone/>
-            </a:pPr>
-            <a:r>
-              <a:rPr lang="en-US" sz="1100" dirty="0">
-                <a:solidFill>
-                  <a:srgbClr val="D8D8D8"/>
-                </a:solidFill>
-                <a:latin typeface="Cascadia Mono" pitchFamily="34" charset="0"/>
-                <a:ea typeface="Cascadia Mono" pitchFamily="34" charset="-122"/>
-                <a:cs typeface="Cascadia Mono" pitchFamily="34" charset="-120"/>
-              </a:rPr>
-              <a:t>/hunt → procs from Temp / AppData</a:t>
-            </a:r>
-            <a:endParaRPr lang="en-US" sz="1100" dirty="0"/>
-          </a:p>
-        </p:txBody>
-      </p:sp>
-      <p:sp>
-        <p:nvSpPr>
-          <p:cNvPr id="12" name="Text 10"/>
-          <p:cNvSpPr/>
-          <p:nvPr/>
-        </p:nvSpPr>
-        <p:spPr>
-          <a:xfrm>
-            <a:off x="777240" y="3931920"/>
-            <a:ext cx="594360" cy="320040"/>
-          </a:xfrm>
-          <a:prstGeom prst="rect">
-            <a:avLst/>
-          </a:prstGeom>
-          <a:noFill/>
-          <a:ln/>
-        </p:spPr>
-        <p:txBody>
-          <a:bodyPr wrap="square" rtlCol="0" anchor="t"/>
-          <a:lstStyle/>
-          <a:p>
-            <a:pPr indent="0" marL="0">
-              <a:buNone/>
-            </a:pPr>
-            <a:r>
-              <a:rPr lang="en-US" sz="1200" b="1" dirty="0">
-                <a:solidFill>
-                  <a:srgbClr val="D97757"/>
-                </a:solidFill>
-                <a:latin typeface="Cascadia Mono" pitchFamily="34" charset="0"/>
-                <a:ea typeface="Cascadia Mono" pitchFamily="34" charset="-122"/>
-                <a:cs typeface="Cascadia Mono" pitchFamily="34" charset="-120"/>
-              </a:rPr>
-              <a:t>03</a:t>
-            </a:r>
-            <a:endParaRPr lang="en-US" sz="1200" dirty="0"/>
-          </a:p>
-        </p:txBody>
-      </p:sp>
-      <p:sp>
-        <p:nvSpPr>
-          <p:cNvPr id="13" name="Text 11"/>
-          <p:cNvSpPr/>
-          <p:nvPr/>
-        </p:nvSpPr>
-        <p:spPr>
-          <a:xfrm>
-            <a:off x="1371600" y="3931920"/>
-            <a:ext cx="2341778" cy="502920"/>
-          </a:xfrm>
-          <a:prstGeom prst="rect">
-            <a:avLst/>
-          </a:prstGeom>
-          <a:noFill/>
-          <a:ln/>
-        </p:spPr>
-        <p:txBody>
-          <a:bodyPr wrap="square" rtlCol="0" anchor="t"/>
-          <a:lstStyle/>
-          <a:p>
-            <a:pPr indent="0" marL="0">
-              <a:buNone/>
-            </a:pPr>
-            <a:r>
-              <a:rPr lang="en-US" sz="1100" dirty="0">
-                <a:solidFill>
-                  <a:srgbClr val="D8D8D8"/>
-                </a:solidFill>
-                <a:latin typeface="Cascadia Mono" pitchFamily="34" charset="0"/>
-                <a:ea typeface="Cascadia Mono" pitchFamily="34" charset="-122"/>
-                <a:cs typeface="Cascadia Mono" pitchFamily="34" charset="-120"/>
-              </a:rPr>
-              <a:t>/net  → established TCP + PIDs</a:t>
-            </a:r>
-            <a:endParaRPr lang="en-US" sz="1100" dirty="0"/>
-          </a:p>
-        </p:txBody>
-      </p:sp>
-      <p:sp>
-        <p:nvSpPr>
-          <p:cNvPr id="14" name="Text 12"/>
-          <p:cNvSpPr/>
-          <p:nvPr/>
-        </p:nvSpPr>
-        <p:spPr>
-          <a:xfrm>
-            <a:off x="777240" y="4480560"/>
-            <a:ext cx="594360" cy="320040"/>
-          </a:xfrm>
-          <a:prstGeom prst="rect">
-            <a:avLst/>
-          </a:prstGeom>
-          <a:noFill/>
-          <a:ln/>
-        </p:spPr>
-        <p:txBody>
-          <a:bodyPr wrap="square" rtlCol="0" anchor="t"/>
-          <a:lstStyle/>
-          <a:p>
-            <a:pPr indent="0" marL="0">
-              <a:buNone/>
-            </a:pPr>
-            <a:r>
-              <a:rPr lang="en-US" sz="1200" b="1" dirty="0">
-                <a:solidFill>
-                  <a:srgbClr val="D97757"/>
-                </a:solidFill>
-                <a:latin typeface="Cascadia Mono" pitchFamily="34" charset="0"/>
-                <a:ea typeface="Cascadia Mono" pitchFamily="34" charset="-122"/>
-                <a:cs typeface="Cascadia Mono" pitchFamily="34" charset="-120"/>
-              </a:rPr>
-              <a:t>04</a:t>
-            </a:r>
-            <a:endParaRPr lang="en-US" sz="1200" dirty="0"/>
-          </a:p>
-        </p:txBody>
-      </p:sp>
-      <p:sp>
-        <p:nvSpPr>
-          <p:cNvPr id="15" name="Text 13"/>
-          <p:cNvSpPr/>
-          <p:nvPr/>
-        </p:nvSpPr>
-        <p:spPr>
-          <a:xfrm>
-            <a:off x="1371600" y="4480560"/>
-            <a:ext cx="2341778" cy="502920"/>
-          </a:xfrm>
-          <a:prstGeom prst="rect">
-            <a:avLst/>
-          </a:prstGeom>
-          <a:noFill/>
-          <a:ln/>
-        </p:spPr>
-        <p:txBody>
-          <a:bodyPr wrap="square" rtlCol="0" anchor="t"/>
-          <a:lstStyle/>
-          <a:p>
-            <a:pPr indent="0" marL="0">
-              <a:buNone/>
-            </a:pPr>
-            <a:r>
-              <a:rPr lang="en-US" sz="1100" dirty="0">
-                <a:solidFill>
-                  <a:srgbClr val="D8D8D8"/>
-                </a:solidFill>
-                <a:latin typeface="Cascadia Mono" pitchFamily="34" charset="0"/>
-                <a:ea typeface="Cascadia Mono" pitchFamily="34" charset="-122"/>
-                <a:cs typeface="Cascadia Mono" pitchFamily="34" charset="-120"/>
-              </a:rPr>
-              <a:t>/persist → tasks (non-Microsoft) + run keys</a:t>
-            </a:r>
-            <a:endParaRPr lang="en-US" sz="1100" dirty="0"/>
-          </a:p>
-        </p:txBody>
-      </p:sp>
-      <p:sp>
-        <p:nvSpPr>
-          <p:cNvPr id="16" name="Text 14"/>
-          <p:cNvSpPr/>
-          <p:nvPr/>
-        </p:nvSpPr>
-        <p:spPr>
-          <a:xfrm>
-            <a:off x="777240" y="5029200"/>
-            <a:ext cx="594360" cy="320040"/>
-          </a:xfrm>
-          <a:prstGeom prst="rect">
-            <a:avLst/>
-          </a:prstGeom>
-          <a:noFill/>
-          <a:ln/>
-        </p:spPr>
-        <p:txBody>
-          <a:bodyPr wrap="square" rtlCol="0" anchor="t"/>
-          <a:lstStyle/>
-          <a:p>
-            <a:pPr indent="0" marL="0">
-              <a:buNone/>
-            </a:pPr>
-            <a:r>
-              <a:rPr lang="en-US" sz="1200" b="1" dirty="0">
-                <a:solidFill>
-                  <a:srgbClr val="D97757"/>
-                </a:solidFill>
-                <a:latin typeface="Cascadia Mono" pitchFamily="34" charset="0"/>
-                <a:ea typeface="Cascadia Mono" pitchFamily="34" charset="-122"/>
-                <a:cs typeface="Cascadia Mono" pitchFamily="34" charset="-120"/>
-              </a:rPr>
-              <a:t>05</a:t>
-            </a:r>
-            <a:endParaRPr lang="en-US" sz="1200" dirty="0"/>
-          </a:p>
-        </p:txBody>
-      </p:sp>
-      <p:sp>
-        <p:nvSpPr>
-          <p:cNvPr id="17" name="Text 15"/>
-          <p:cNvSpPr/>
-          <p:nvPr/>
-        </p:nvSpPr>
-        <p:spPr>
-          <a:xfrm>
-            <a:off x="1371600" y="5029200"/>
-            <a:ext cx="2341778" cy="502920"/>
-          </a:xfrm>
-          <a:prstGeom prst="rect">
-            <a:avLst/>
-          </a:prstGeom>
-          <a:noFill/>
-          <a:ln/>
-        </p:spPr>
-        <p:txBody>
-          <a:bodyPr wrap="square" rtlCol="0" anchor="t"/>
-          <a:lstStyle/>
-          <a:p>
-            <a:pPr indent="0" marL="0">
-              <a:buNone/>
-            </a:pPr>
-            <a:r>
-              <a:rPr lang="en-US" sz="1100" dirty="0">
-                <a:solidFill>
-                  <a:srgbClr val="D8D8D8"/>
-                </a:solidFill>
-                <a:latin typeface="Cascadia Mono" pitchFamily="34" charset="0"/>
-                <a:ea typeface="Cascadia Mono" pitchFamily="34" charset="-122"/>
-                <a:cs typeface="Cascadia Mono" pitchFamily="34" charset="-120"/>
-              </a:rPr>
-              <a:t>/q   → save the report</a:t>
-            </a:r>
-            <a:endParaRPr lang="en-US" sz="1100" dirty="0"/>
-          </a:p>
-        </p:txBody>
-      </p:sp>
-      <p:sp>
-        <p:nvSpPr>
-          <p:cNvPr id="18" name="Shape 16"/>
-          <p:cNvSpPr/>
-          <p:nvPr/>
-        </p:nvSpPr>
-        <p:spPr>
-          <a:xfrm>
-            <a:off x="4353458" y="1645920"/>
-            <a:ext cx="3484778" cy="4206240"/>
-          </a:xfrm>
-          <a:prstGeom prst="roundRect">
-            <a:avLst>
-              <a:gd name="adj" fmla="val 2624"/>
-            </a:avLst>
-          </a:prstGeom>
-          <a:solidFill>
-            <a:srgbClr val="1D1D22"/>
-          </a:solidFill>
-          <a:ln w="12700">
-            <a:solidFill>
-              <a:srgbClr val="2E2E34"/>
-            </a:solidFill>
-            <a:prstDash val="solid"/>
-          </a:ln>
-        </p:spPr>
-      </p:sp>
-      <p:sp>
-        <p:nvSpPr>
-          <p:cNvPr id="19" name="Text 17"/>
-          <p:cNvSpPr/>
-          <p:nvPr/>
-        </p:nvSpPr>
-        <p:spPr>
-          <a:xfrm>
-            <a:off x="4627778" y="1874520"/>
-            <a:ext cx="2936138" cy="411480"/>
-          </a:xfrm>
-          <a:prstGeom prst="rect">
-            <a:avLst/>
-          </a:prstGeom>
-          <a:noFill/>
-          <a:ln/>
-        </p:spPr>
-        <p:txBody>
-          <a:bodyPr wrap="square" rtlCol="0" anchor="ctr"/>
-          <a:lstStyle/>
-          <a:p>
-            <a:pPr indent="0" marL="0">
-              <a:buNone/>
-            </a:pPr>
-            <a:r>
-              <a:rPr lang="en-US" sz="1800" b="1" dirty="0">
-                <a:solidFill>
-                  <a:srgbClr val="EB987C"/>
-                </a:solidFill>
-                <a:latin typeface="Calibri" pitchFamily="34" charset="0"/>
-                <a:ea typeface="Calibri" pitchFamily="34" charset="-122"/>
-                <a:cs typeface="Calibri" pitchFamily="34" charset="-120"/>
-              </a:rPr>
-              <a:t>IOC sweep</a:t>
-            </a:r>
-            <a:endParaRPr lang="en-US" sz="1800" dirty="0"/>
-          </a:p>
-        </p:txBody>
-      </p:sp>
-      <p:sp>
-        <p:nvSpPr>
-          <p:cNvPr id="20" name="Text 18"/>
-          <p:cNvSpPr/>
-          <p:nvPr/>
-        </p:nvSpPr>
-        <p:spPr>
-          <a:xfrm>
-            <a:off x="4627778" y="2286000"/>
-            <a:ext cx="2936138" cy="320040"/>
-          </a:xfrm>
-          <a:prstGeom prst="rect">
-            <a:avLst/>
-          </a:prstGeom>
-          <a:noFill/>
-          <a:ln/>
-        </p:spPr>
-        <p:txBody>
-          <a:bodyPr wrap="square" rtlCol="0" anchor="ctr"/>
-          <a:lstStyle/>
-          <a:p>
-            <a:pPr indent="0" marL="0">
-              <a:buNone/>
-            </a:pPr>
-            <a:r>
-              <a:rPr lang="en-US" sz="1200" i="1" dirty="0">
-                <a:solidFill>
-                  <a:srgbClr val="8E8E94"/>
-                </a:solidFill>
-                <a:latin typeface="Calibri" pitchFamily="34" charset="0"/>
-                <a:ea typeface="Calibri" pitchFamily="34" charset="-122"/>
-                <a:cs typeface="Calibri" pitchFamily="34" charset="-120"/>
-              </a:rPr>
-              <a:t>you have indicators, check this host</a:t>
-            </a:r>
-            <a:endParaRPr lang="en-US" sz="1200" dirty="0"/>
-          </a:p>
-        </p:txBody>
-      </p:sp>
-      <p:sp>
-        <p:nvSpPr>
-          <p:cNvPr id="21" name="Shape 19"/>
-          <p:cNvSpPr/>
-          <p:nvPr/>
-        </p:nvSpPr>
-        <p:spPr>
-          <a:xfrm>
-            <a:off x="4627778" y="2651760"/>
-            <a:ext cx="2936138" cy="0"/>
-          </a:xfrm>
-          <a:prstGeom prst="line">
-            <a:avLst/>
-          </a:prstGeom>
-          <a:noFill/>
-          <a:ln w="9525">
-            <a:solidFill>
-              <a:srgbClr val="2E2E34"/>
-            </a:solidFill>
-            <a:prstDash val="solid"/>
-          </a:ln>
-        </p:spPr>
-      </p:sp>
-      <p:sp>
-        <p:nvSpPr>
-          <p:cNvPr id="22" name="Text 20"/>
-          <p:cNvSpPr/>
-          <p:nvPr/>
-        </p:nvSpPr>
-        <p:spPr>
-          <a:xfrm>
-            <a:off x="4627778" y="2834640"/>
-            <a:ext cx="594360" cy="320040"/>
-          </a:xfrm>
-          <a:prstGeom prst="rect">
-            <a:avLst/>
-          </a:prstGeom>
-          <a:noFill/>
-          <a:ln/>
-        </p:spPr>
-        <p:txBody>
-          <a:bodyPr wrap="square" rtlCol="0" anchor="t"/>
-          <a:lstStyle/>
-          <a:p>
-            <a:pPr indent="0" marL="0">
-              <a:buNone/>
-            </a:pPr>
-            <a:r>
-              <a:rPr lang="en-US" sz="1200" b="1" dirty="0">
-                <a:solidFill>
-                  <a:srgbClr val="D97757"/>
-                </a:solidFill>
-                <a:latin typeface="Cascadia Mono" pitchFamily="34" charset="0"/>
-                <a:ea typeface="Cascadia Mono" pitchFamily="34" charset="-122"/>
-                <a:cs typeface="Cascadia Mono" pitchFamily="34" charset="-120"/>
-              </a:rPr>
-              <a:t>01</a:t>
-            </a:r>
-            <a:endParaRPr lang="en-US" sz="1200" dirty="0"/>
-          </a:p>
-        </p:txBody>
-      </p:sp>
-      <p:sp>
-        <p:nvSpPr>
-          <p:cNvPr id="23" name="Text 21"/>
-          <p:cNvSpPr/>
-          <p:nvPr/>
-        </p:nvSpPr>
-        <p:spPr>
-          <a:xfrm>
-            <a:off x="5222138" y="2834640"/>
-            <a:ext cx="2341778" cy="502920"/>
-          </a:xfrm>
-          <a:prstGeom prst="rect">
-            <a:avLst/>
-          </a:prstGeom>
-          <a:noFill/>
-          <a:ln/>
-        </p:spPr>
-        <p:txBody>
-          <a:bodyPr wrap="square" rtlCol="0" anchor="t"/>
-          <a:lstStyle/>
-          <a:p>
-            <a:pPr indent="0" marL="0">
-              <a:buNone/>
-            </a:pPr>
-            <a:r>
-              <a:rPr lang="en-US" sz="1100" dirty="0">
-                <a:solidFill>
-                  <a:srgbClr val="D8D8D8"/>
-                </a:solidFill>
-                <a:latin typeface="Cascadia Mono" pitchFamily="34" charset="0"/>
-                <a:ea typeface="Cascadia Mono" pitchFamily="34" charset="-122"/>
-                <a:cs typeface="Cascadia Mono" pitchFamily="34" charset="-120"/>
-              </a:rPr>
-              <a:t>launch with -IocFile incident.csv</a:t>
-            </a:r>
-            <a:endParaRPr lang="en-US" sz="1100" dirty="0"/>
-          </a:p>
-        </p:txBody>
-      </p:sp>
-      <p:sp>
-        <p:nvSpPr>
-          <p:cNvPr id="24" name="Text 22"/>
-          <p:cNvSpPr/>
-          <p:nvPr/>
-        </p:nvSpPr>
-        <p:spPr>
-          <a:xfrm>
-            <a:off x="4627778" y="3383280"/>
-            <a:ext cx="594360" cy="320040"/>
-          </a:xfrm>
-          <a:prstGeom prst="rect">
-            <a:avLst/>
-          </a:prstGeom>
-          <a:noFill/>
-          <a:ln/>
-        </p:spPr>
-        <p:txBody>
-          <a:bodyPr wrap="square" rtlCol="0" anchor="t"/>
-          <a:lstStyle/>
-          <a:p>
-            <a:pPr indent="0" marL="0">
-              <a:buNone/>
-            </a:pPr>
-            <a:r>
-              <a:rPr lang="en-US" sz="1200" b="1" dirty="0">
-                <a:solidFill>
-                  <a:srgbClr val="D97757"/>
-                </a:solidFill>
-                <a:latin typeface="Cascadia Mono" pitchFamily="34" charset="0"/>
-                <a:ea typeface="Cascadia Mono" pitchFamily="34" charset="-122"/>
-                <a:cs typeface="Cascadia Mono" pitchFamily="34" charset="-120"/>
-              </a:rPr>
-              <a:t>02</a:t>
-            </a:r>
-            <a:endParaRPr lang="en-US" sz="1200" dirty="0"/>
-          </a:p>
-        </p:txBody>
-      </p:sp>
-      <p:sp>
-        <p:nvSpPr>
-          <p:cNvPr id="25" name="Text 23"/>
-          <p:cNvSpPr/>
-          <p:nvPr/>
-        </p:nvSpPr>
-        <p:spPr>
-          <a:xfrm>
-            <a:off x="5222138" y="3383280"/>
-            <a:ext cx="2341778" cy="502920"/>
-          </a:xfrm>
-          <a:prstGeom prst="rect">
-            <a:avLst/>
-          </a:prstGeom>
-          <a:noFill/>
-          <a:ln/>
-        </p:spPr>
-        <p:txBody>
-          <a:bodyPr wrap="square" rtlCol="0" anchor="t"/>
-          <a:lstStyle/>
-          <a:p>
-            <a:pPr indent="0" marL="0">
-              <a:buNone/>
-            </a:pPr>
-            <a:r>
-              <a:rPr lang="en-US" sz="1100" dirty="0">
-                <a:solidFill>
-                  <a:srgbClr val="D8D8D8"/>
-                </a:solidFill>
-                <a:latin typeface="Cascadia Mono" pitchFamily="34" charset="0"/>
-                <a:ea typeface="Cascadia Mono" pitchFamily="34" charset="-122"/>
-                <a:cs typeface="Cascadia Mono" pitchFamily="34" charset="-120"/>
-              </a:rPr>
-              <a:t>/files → match procs / TCP / DNS</a:t>
-            </a:r>
-            <a:endParaRPr lang="en-US" sz="1100" dirty="0"/>
-          </a:p>
-        </p:txBody>
-      </p:sp>
-      <p:sp>
-        <p:nvSpPr>
-          <p:cNvPr id="26" name="Text 24"/>
-          <p:cNvSpPr/>
-          <p:nvPr/>
-        </p:nvSpPr>
-        <p:spPr>
-          <a:xfrm>
-            <a:off x="4627778" y="3931920"/>
-            <a:ext cx="594360" cy="320040"/>
-          </a:xfrm>
-          <a:prstGeom prst="rect">
-            <a:avLst/>
-          </a:prstGeom>
-          <a:noFill/>
-          <a:ln/>
-        </p:spPr>
-        <p:txBody>
-          <a:bodyPr wrap="square" rtlCol="0" anchor="t"/>
-          <a:lstStyle/>
-          <a:p>
-            <a:pPr indent="0" marL="0">
-              <a:buNone/>
-            </a:pPr>
-            <a:r>
-              <a:rPr lang="en-US" sz="1200" b="1" dirty="0">
-                <a:solidFill>
-                  <a:srgbClr val="D97757"/>
-                </a:solidFill>
-                <a:latin typeface="Cascadia Mono" pitchFamily="34" charset="0"/>
-                <a:ea typeface="Cascadia Mono" pitchFamily="34" charset="-122"/>
-                <a:cs typeface="Cascadia Mono" pitchFamily="34" charset="-120"/>
-              </a:rPr>
-              <a:t>03</a:t>
-            </a:r>
-            <a:endParaRPr lang="en-US" sz="1200" dirty="0"/>
-          </a:p>
-        </p:txBody>
-      </p:sp>
-      <p:sp>
-        <p:nvSpPr>
-          <p:cNvPr id="27" name="Text 25"/>
-          <p:cNvSpPr/>
-          <p:nvPr/>
-        </p:nvSpPr>
-        <p:spPr>
-          <a:xfrm>
-            <a:off x="5222138" y="3931920"/>
-            <a:ext cx="2341778" cy="502920"/>
-          </a:xfrm>
-          <a:prstGeom prst="rect">
-            <a:avLst/>
-          </a:prstGeom>
-          <a:noFill/>
-          <a:ln/>
-        </p:spPr>
-        <p:txBody>
-          <a:bodyPr wrap="square" rtlCol="0" anchor="t"/>
-          <a:lstStyle/>
-          <a:p>
-            <a:pPr indent="0" marL="0">
-              <a:buNone/>
-            </a:pPr>
-            <a:r>
-              <a:rPr lang="en-US" sz="1100" dirty="0">
-                <a:solidFill>
-                  <a:srgbClr val="D8D8D8"/>
-                </a:solidFill>
-                <a:latin typeface="Cascadia Mono" pitchFamily="34" charset="0"/>
-                <a:ea typeface="Cascadia Mono" pitchFamily="34" charset="-122"/>
-                <a:cs typeface="Cascadia Mono" pitchFamily="34" charset="-120"/>
-              </a:rPr>
-              <a:t>/files → hash %TEMP% &amp; %APPDATA%</a:t>
-            </a:r>
-            <a:endParaRPr lang="en-US" sz="1100" dirty="0"/>
-          </a:p>
-        </p:txBody>
-      </p:sp>
-      <p:sp>
-        <p:nvSpPr>
-          <p:cNvPr id="28" name="Text 26"/>
-          <p:cNvSpPr/>
-          <p:nvPr/>
-        </p:nvSpPr>
-        <p:spPr>
-          <a:xfrm>
-            <a:off x="4627778" y="4480560"/>
-            <a:ext cx="594360" cy="320040"/>
-          </a:xfrm>
-          <a:prstGeom prst="rect">
-            <a:avLst/>
-          </a:prstGeom>
-          <a:noFill/>
-          <a:ln/>
-        </p:spPr>
-        <p:txBody>
-          <a:bodyPr wrap="square" rtlCol="0" anchor="t"/>
-          <a:lstStyle/>
-          <a:p>
-            <a:pPr indent="0" marL="0">
-              <a:buNone/>
-            </a:pPr>
-            <a:r>
-              <a:rPr lang="en-US" sz="1200" b="1" dirty="0">
-                <a:solidFill>
-                  <a:srgbClr val="D97757"/>
-                </a:solidFill>
-                <a:latin typeface="Cascadia Mono" pitchFamily="34" charset="0"/>
-                <a:ea typeface="Cascadia Mono" pitchFamily="34" charset="-122"/>
-                <a:cs typeface="Cascadia Mono" pitchFamily="34" charset="-120"/>
-              </a:rPr>
-              <a:t>04</a:t>
-            </a:r>
-            <a:endParaRPr lang="en-US" sz="1200" dirty="0"/>
-          </a:p>
-        </p:txBody>
-      </p:sp>
-      <p:sp>
-        <p:nvSpPr>
-          <p:cNvPr id="29" name="Text 27"/>
-          <p:cNvSpPr/>
-          <p:nvPr/>
-        </p:nvSpPr>
-        <p:spPr>
-          <a:xfrm>
-            <a:off x="5222138" y="4480560"/>
-            <a:ext cx="2341778" cy="502920"/>
-          </a:xfrm>
-          <a:prstGeom prst="rect">
-            <a:avLst/>
-          </a:prstGeom>
-          <a:noFill/>
-          <a:ln/>
-        </p:spPr>
-        <p:txBody>
-          <a:bodyPr wrap="square" rtlCol="0" anchor="t"/>
-          <a:lstStyle/>
-          <a:p>
-            <a:pPr indent="0" marL="0">
-              <a:buNone/>
-            </a:pPr>
-            <a:r>
-              <a:rPr lang="en-US" sz="1100" dirty="0">
-                <a:solidFill>
-                  <a:srgbClr val="D8D8D8"/>
-                </a:solidFill>
-                <a:latin typeface="Cascadia Mono" pitchFamily="34" charset="0"/>
-                <a:ea typeface="Cascadia Mono" pitchFamily="34" charset="-122"/>
-                <a:cs typeface="Cascadia Mono" pitchFamily="34" charset="-120"/>
-              </a:rPr>
-              <a:t>hash matches auto-flag CRITICAL</a:t>
-            </a:r>
-            <a:endParaRPr lang="en-US" sz="1100" dirty="0"/>
-          </a:p>
-        </p:txBody>
-      </p:sp>
-      <p:sp>
-        <p:nvSpPr>
-          <p:cNvPr id="30" name="Text 28"/>
-          <p:cNvSpPr/>
-          <p:nvPr/>
-        </p:nvSpPr>
-        <p:spPr>
-          <a:xfrm>
-            <a:off x="4627778" y="5029200"/>
-            <a:ext cx="594360" cy="320040"/>
-          </a:xfrm>
-          <a:prstGeom prst="rect">
-            <a:avLst/>
-          </a:prstGeom>
-          <a:noFill/>
-          <a:ln/>
-        </p:spPr>
-        <p:txBody>
-          <a:bodyPr wrap="square" rtlCol="0" anchor="t"/>
-          <a:lstStyle/>
-          <a:p>
-            <a:pPr indent="0" marL="0">
-              <a:buNone/>
-            </a:pPr>
-            <a:r>
-              <a:rPr lang="en-US" sz="1200" b="1" dirty="0">
-                <a:solidFill>
-                  <a:srgbClr val="D97757"/>
-                </a:solidFill>
-                <a:latin typeface="Cascadia Mono" pitchFamily="34" charset="0"/>
-                <a:ea typeface="Cascadia Mono" pitchFamily="34" charset="-122"/>
-                <a:cs typeface="Cascadia Mono" pitchFamily="34" charset="-120"/>
-              </a:rPr>
-              <a:t>05</a:t>
-            </a:r>
-            <a:endParaRPr lang="en-US" sz="1200" dirty="0"/>
-          </a:p>
-        </p:txBody>
-      </p:sp>
-      <p:sp>
-        <p:nvSpPr>
-          <p:cNvPr id="31" name="Text 29"/>
-          <p:cNvSpPr/>
-          <p:nvPr/>
-        </p:nvSpPr>
-        <p:spPr>
-          <a:xfrm>
-            <a:off x="5222138" y="5029200"/>
-            <a:ext cx="2341778" cy="502920"/>
-          </a:xfrm>
-          <a:prstGeom prst="rect">
-            <a:avLst/>
-          </a:prstGeom>
-          <a:noFill/>
-          <a:ln/>
-        </p:spPr>
-        <p:txBody>
-          <a:bodyPr wrap="square" rtlCol="0" anchor="t"/>
-          <a:lstStyle/>
-          <a:p>
-            <a:pPr indent="0" marL="0">
-              <a:buNone/>
-            </a:pPr>
-            <a:r>
-              <a:rPr lang="en-US" sz="1100" dirty="0">
-                <a:solidFill>
-                  <a:srgbClr val="D8D8D8"/>
-                </a:solidFill>
-                <a:latin typeface="Cascadia Mono" pitchFamily="34" charset="0"/>
-                <a:ea typeface="Cascadia Mono" pitchFamily="34" charset="-122"/>
-                <a:cs typeface="Cascadia Mono" pitchFamily="34" charset="-120"/>
-              </a:rPr>
-              <a:t>/findings · /report</a:t>
-            </a:r>
-            <a:endParaRPr lang="en-US" sz="1100" dirty="0"/>
-          </a:p>
-        </p:txBody>
-      </p:sp>
-      <p:sp>
-        <p:nvSpPr>
-          <p:cNvPr id="32" name="Shape 30"/>
-          <p:cNvSpPr/>
-          <p:nvPr/>
-        </p:nvSpPr>
-        <p:spPr>
-          <a:xfrm>
-            <a:off x="8203997" y="1645920"/>
-            <a:ext cx="3484778" cy="4206240"/>
-          </a:xfrm>
-          <a:prstGeom prst="roundRect">
-            <a:avLst>
-              <a:gd name="adj" fmla="val 2624"/>
-            </a:avLst>
-          </a:prstGeom>
-          <a:solidFill>
-            <a:srgbClr val="1D1D22"/>
-          </a:solidFill>
-          <a:ln w="12700">
-            <a:solidFill>
-              <a:srgbClr val="2E2E34"/>
-            </a:solidFill>
-            <a:prstDash val="solid"/>
-          </a:ln>
-        </p:spPr>
-      </p:sp>
-      <p:sp>
-        <p:nvSpPr>
-          <p:cNvPr id="33" name="Text 31"/>
-          <p:cNvSpPr/>
-          <p:nvPr/>
-        </p:nvSpPr>
-        <p:spPr>
-          <a:xfrm>
-            <a:off x="8478317" y="1874520"/>
-            <a:ext cx="2936138" cy="411480"/>
-          </a:xfrm>
-          <a:prstGeom prst="rect">
-            <a:avLst/>
-          </a:prstGeom>
-          <a:noFill/>
-          <a:ln/>
-        </p:spPr>
-        <p:txBody>
-          <a:bodyPr wrap="square" rtlCol="0" anchor="ctr"/>
-          <a:lstStyle/>
-          <a:p>
-            <a:pPr indent="0" marL="0">
-              <a:buNone/>
-            </a:pPr>
-            <a:r>
-              <a:rPr lang="en-US" sz="1800" b="1" dirty="0">
-                <a:solidFill>
-                  <a:srgbClr val="EB987C"/>
-                </a:solidFill>
-                <a:latin typeface="Calibri" pitchFamily="34" charset="0"/>
-                <a:ea typeface="Calibri" pitchFamily="34" charset="-122"/>
-                <a:cs typeface="Calibri" pitchFamily="34" charset="-120"/>
-              </a:rPr>
-              <a:t>Auth anomaly</a:t>
-            </a:r>
-            <a:endParaRPr lang="en-US" sz="1800" dirty="0"/>
-          </a:p>
-        </p:txBody>
-      </p:sp>
-      <p:sp>
-        <p:nvSpPr>
-          <p:cNvPr id="34" name="Text 32"/>
-          <p:cNvSpPr/>
-          <p:nvPr/>
-        </p:nvSpPr>
-        <p:spPr>
-          <a:xfrm>
-            <a:off x="8478317" y="2286000"/>
-            <a:ext cx="2936138" cy="320040"/>
-          </a:xfrm>
-          <a:prstGeom prst="rect">
-            <a:avLst/>
-          </a:prstGeom>
-          <a:noFill/>
-          <a:ln/>
-        </p:spPr>
-        <p:txBody>
-          <a:bodyPr wrap="square" rtlCol="0" anchor="ctr"/>
-          <a:lstStyle/>
-          <a:p>
-            <a:pPr indent="0" marL="0">
-              <a:buNone/>
-            </a:pPr>
-            <a:r>
-              <a:rPr lang="en-US" sz="1200" i="1" dirty="0">
-                <a:solidFill>
-                  <a:srgbClr val="8E8E94"/>
-                </a:solidFill>
-                <a:latin typeface="Calibri" pitchFamily="34" charset="0"/>
-                <a:ea typeface="Calibri" pitchFamily="34" charset="-122"/>
-                <a:cs typeface="Calibri" pitchFamily="34" charset="-120"/>
-              </a:rPr>
-              <a:t>login behaviour investigation</a:t>
-            </a:r>
-            <a:endParaRPr lang="en-US" sz="1200" dirty="0"/>
-          </a:p>
-        </p:txBody>
-      </p:sp>
-      <p:sp>
-        <p:nvSpPr>
-          <p:cNvPr id="35" name="Shape 33"/>
-          <p:cNvSpPr/>
-          <p:nvPr/>
-        </p:nvSpPr>
-        <p:spPr>
-          <a:xfrm>
-            <a:off x="8478317" y="2651760"/>
-            <a:ext cx="2936138" cy="0"/>
-          </a:xfrm>
-          <a:prstGeom prst="line">
-            <a:avLst/>
-          </a:prstGeom>
-          <a:noFill/>
-          <a:ln w="9525">
-            <a:solidFill>
-              <a:srgbClr val="2E2E34"/>
-            </a:solidFill>
-            <a:prstDash val="solid"/>
-          </a:ln>
-        </p:spPr>
-      </p:sp>
-      <p:sp>
-        <p:nvSpPr>
-          <p:cNvPr id="36" name="Text 34"/>
-          <p:cNvSpPr/>
-          <p:nvPr/>
-        </p:nvSpPr>
-        <p:spPr>
-          <a:xfrm>
-            <a:off x="8478317" y="2834640"/>
-            <a:ext cx="594360" cy="320040"/>
-          </a:xfrm>
-          <a:prstGeom prst="rect">
-            <a:avLst/>
-          </a:prstGeom>
-          <a:noFill/>
-          <a:ln/>
-        </p:spPr>
-        <p:txBody>
-          <a:bodyPr wrap="square" rtlCol="0" anchor="t"/>
-          <a:lstStyle/>
-          <a:p>
-            <a:pPr indent="0" marL="0">
-              <a:buNone/>
-            </a:pPr>
-            <a:r>
-              <a:rPr lang="en-US" sz="1200" b="1" dirty="0">
-                <a:solidFill>
-                  <a:srgbClr val="D97757"/>
-                </a:solidFill>
-                <a:latin typeface="Cascadia Mono" pitchFamily="34" charset="0"/>
-                <a:ea typeface="Cascadia Mono" pitchFamily="34" charset="-122"/>
-                <a:cs typeface="Cascadia Mono" pitchFamily="34" charset="-120"/>
-              </a:rPr>
-              <a:t>01</a:t>
-            </a:r>
-            <a:endParaRPr lang="en-US" sz="1200" dirty="0"/>
-          </a:p>
-        </p:txBody>
-      </p:sp>
-      <p:sp>
-        <p:nvSpPr>
-          <p:cNvPr id="37" name="Text 35"/>
-          <p:cNvSpPr/>
-          <p:nvPr/>
-        </p:nvSpPr>
-        <p:spPr>
-          <a:xfrm>
-            <a:off x="9072677" y="2834640"/>
-            <a:ext cx="2341778" cy="502920"/>
-          </a:xfrm>
-          <a:prstGeom prst="rect">
-            <a:avLst/>
-          </a:prstGeom>
-          <a:noFill/>
-          <a:ln/>
-        </p:spPr>
-        <p:txBody>
-          <a:bodyPr wrap="square" rtlCol="0" anchor="t"/>
-          <a:lstStyle/>
-          <a:p>
-            <a:pPr indent="0" marL="0">
-              <a:buNone/>
-            </a:pPr>
-            <a:r>
-              <a:rPr lang="en-US" sz="1100" dirty="0">
-                <a:solidFill>
-                  <a:srgbClr val="D8D8D8"/>
-                </a:solidFill>
-                <a:latin typeface="Cascadia Mono" pitchFamily="34" charset="0"/>
-                <a:ea typeface="Cascadia Mono" pitchFamily="34" charset="-122"/>
-                <a:cs typeface="Cascadia Mono" pitchFamily="34" charset="-120"/>
-              </a:rPr>
-              <a:t>/auth → 4625 failed logons</a:t>
-            </a:r>
-            <a:endParaRPr lang="en-US" sz="1100" dirty="0"/>
-          </a:p>
-        </p:txBody>
-      </p:sp>
-      <p:sp>
-        <p:nvSpPr>
-          <p:cNvPr id="38" name="Text 36"/>
-          <p:cNvSpPr/>
-          <p:nvPr/>
-        </p:nvSpPr>
-        <p:spPr>
-          <a:xfrm>
-            <a:off x="8478317" y="3383280"/>
-            <a:ext cx="594360" cy="320040"/>
-          </a:xfrm>
-          <a:prstGeom prst="rect">
-            <a:avLst/>
-          </a:prstGeom>
-          <a:noFill/>
-          <a:ln/>
-        </p:spPr>
-        <p:txBody>
-          <a:bodyPr wrap="square" rtlCol="0" anchor="t"/>
-          <a:lstStyle/>
-          <a:p>
-            <a:pPr indent="0" marL="0">
-              <a:buNone/>
-            </a:pPr>
-            <a:r>
-              <a:rPr lang="en-US" sz="1200" b="1" dirty="0">
-                <a:solidFill>
-                  <a:srgbClr val="D97757"/>
-                </a:solidFill>
-                <a:latin typeface="Cascadia Mono" pitchFamily="34" charset="0"/>
-                <a:ea typeface="Cascadia Mono" pitchFamily="34" charset="-122"/>
-                <a:cs typeface="Cascadia Mono" pitchFamily="34" charset="-120"/>
-              </a:rPr>
-              <a:t>02</a:t>
-            </a:r>
-            <a:endParaRPr lang="en-US" sz="1200" dirty="0"/>
-          </a:p>
-        </p:txBody>
-      </p:sp>
-      <p:sp>
-        <p:nvSpPr>
-          <p:cNvPr id="39" name="Text 37"/>
-          <p:cNvSpPr/>
-          <p:nvPr/>
-        </p:nvSpPr>
-        <p:spPr>
-          <a:xfrm>
-            <a:off x="9072677" y="3383280"/>
-            <a:ext cx="2341778" cy="502920"/>
-          </a:xfrm>
-          <a:prstGeom prst="rect">
-            <a:avLst/>
-          </a:prstGeom>
-          <a:noFill/>
-          <a:ln/>
-        </p:spPr>
-        <p:txBody>
-          <a:bodyPr wrap="square" rtlCol="0" anchor="t"/>
-          <a:lstStyle/>
-          <a:p>
-            <a:pPr indent="0" marL="0">
-              <a:buNone/>
-            </a:pPr>
-            <a:r>
-              <a:rPr lang="en-US" sz="1100" dirty="0">
-                <a:solidFill>
-                  <a:srgbClr val="D8D8D8"/>
-                </a:solidFill>
-                <a:latin typeface="Cascadia Mono" pitchFamily="34" charset="0"/>
-                <a:ea typeface="Cascadia Mono" pitchFamily="34" charset="-122"/>
-                <a:cs typeface="Cascadia Mono" pitchFamily="34" charset="-120"/>
-              </a:rPr>
-              <a:t>/auth → 4624 by LogonType</a:t>
-            </a:r>
-            <a:endParaRPr lang="en-US" sz="1100" dirty="0"/>
-          </a:p>
-        </p:txBody>
-      </p:sp>
-      <p:sp>
-        <p:nvSpPr>
-          <p:cNvPr id="40" name="Text 38"/>
-          <p:cNvSpPr/>
-          <p:nvPr/>
-        </p:nvSpPr>
-        <p:spPr>
-          <a:xfrm>
-            <a:off x="8478317" y="3931920"/>
-            <a:ext cx="594360" cy="320040"/>
-          </a:xfrm>
-          <a:prstGeom prst="rect">
-            <a:avLst/>
-          </a:prstGeom>
-          <a:noFill/>
-          <a:ln/>
-        </p:spPr>
-        <p:txBody>
-          <a:bodyPr wrap="square" rtlCol="0" anchor="t"/>
-          <a:lstStyle/>
-          <a:p>
-            <a:pPr indent="0" marL="0">
-              <a:buNone/>
-            </a:pPr>
-            <a:r>
-              <a:rPr lang="en-US" sz="1200" b="1" dirty="0">
-                <a:solidFill>
-                  <a:srgbClr val="D97757"/>
-                </a:solidFill>
-                <a:latin typeface="Cascadia Mono" pitchFamily="34" charset="0"/>
-                <a:ea typeface="Cascadia Mono" pitchFamily="34" charset="-122"/>
-                <a:cs typeface="Cascadia Mono" pitchFamily="34" charset="-120"/>
-              </a:rPr>
-              <a:t>03</a:t>
-            </a:r>
-            <a:endParaRPr lang="en-US" sz="1200" dirty="0"/>
-          </a:p>
-        </p:txBody>
-      </p:sp>
-      <p:sp>
-        <p:nvSpPr>
-          <p:cNvPr id="41" name="Text 39"/>
-          <p:cNvSpPr/>
-          <p:nvPr/>
-        </p:nvSpPr>
-        <p:spPr>
-          <a:xfrm>
-            <a:off x="9072677" y="3931920"/>
-            <a:ext cx="2341778" cy="502920"/>
-          </a:xfrm>
-          <a:prstGeom prst="rect">
-            <a:avLst/>
-          </a:prstGeom>
-          <a:noFill/>
-          <a:ln/>
-        </p:spPr>
-        <p:txBody>
-          <a:bodyPr wrap="square" rtlCol="0" anchor="t"/>
-          <a:lstStyle/>
-          <a:p>
-            <a:pPr indent="0" marL="0">
-              <a:buNone/>
-            </a:pPr>
-            <a:r>
-              <a:rPr lang="en-US" sz="1100" dirty="0">
-                <a:solidFill>
-                  <a:srgbClr val="D8D8D8"/>
-                </a:solidFill>
-                <a:latin typeface="Cascadia Mono" pitchFamily="34" charset="0"/>
-                <a:ea typeface="Cascadia Mono" pitchFamily="34" charset="-122"/>
-                <a:cs typeface="Cascadia Mono" pitchFamily="34" charset="-120"/>
-              </a:rPr>
-              <a:t>/auth → 4672 privileged · 4648 explicit</a:t>
-            </a:r>
-            <a:endParaRPr lang="en-US" sz="1100" dirty="0"/>
-          </a:p>
-        </p:txBody>
-      </p:sp>
-      <p:sp>
-        <p:nvSpPr>
-          <p:cNvPr id="42" name="Text 40"/>
-          <p:cNvSpPr/>
-          <p:nvPr/>
-        </p:nvSpPr>
-        <p:spPr>
-          <a:xfrm>
-            <a:off x="8478317" y="4480560"/>
-            <a:ext cx="594360" cy="320040"/>
-          </a:xfrm>
-          <a:prstGeom prst="rect">
-            <a:avLst/>
-          </a:prstGeom>
-          <a:noFill/>
-          <a:ln/>
-        </p:spPr>
-        <p:txBody>
-          <a:bodyPr wrap="square" rtlCol="0" anchor="t"/>
-          <a:lstStyle/>
-          <a:p>
-            <a:pPr indent="0" marL="0">
-              <a:buNone/>
-            </a:pPr>
-            <a:r>
-              <a:rPr lang="en-US" sz="1200" b="1" dirty="0">
-                <a:solidFill>
-                  <a:srgbClr val="D97757"/>
-                </a:solidFill>
-                <a:latin typeface="Cascadia Mono" pitchFamily="34" charset="0"/>
-                <a:ea typeface="Cascadia Mono" pitchFamily="34" charset="-122"/>
-                <a:cs typeface="Cascadia Mono" pitchFamily="34" charset="-120"/>
-              </a:rPr>
-              <a:t>04</a:t>
-            </a:r>
-            <a:endParaRPr lang="en-US" sz="1200" dirty="0"/>
-          </a:p>
-        </p:txBody>
-      </p:sp>
-      <p:sp>
-        <p:nvSpPr>
-          <p:cNvPr id="43" name="Text 41"/>
-          <p:cNvSpPr/>
-          <p:nvPr/>
-        </p:nvSpPr>
-        <p:spPr>
-          <a:xfrm>
-            <a:off x="9072677" y="4480560"/>
-            <a:ext cx="2341778" cy="502920"/>
-          </a:xfrm>
-          <a:prstGeom prst="rect">
-            <a:avLst/>
-          </a:prstGeom>
-          <a:noFill/>
-          <a:ln/>
-        </p:spPr>
-        <p:txBody>
-          <a:bodyPr wrap="square" rtlCol="0" anchor="t"/>
-          <a:lstStyle/>
-          <a:p>
-            <a:pPr indent="0" marL="0">
-              <a:buNone/>
-            </a:pPr>
-            <a:r>
-              <a:rPr lang="en-US" sz="1100" dirty="0">
-                <a:solidFill>
-                  <a:srgbClr val="D8D8D8"/>
-                </a:solidFill>
-                <a:latin typeface="Cascadia Mono" pitchFamily="34" charset="0"/>
-                <a:ea typeface="Cascadia Mono" pitchFamily="34" charset="-122"/>
-                <a:cs typeface="Cascadia Mono" pitchFamily="34" charset="-120"/>
-              </a:rPr>
-              <a:t>/auth → account changes (4720…4738)</a:t>
-            </a:r>
-            <a:endParaRPr lang="en-US" sz="1100" dirty="0"/>
-          </a:p>
-        </p:txBody>
-      </p:sp>
-      <p:sp>
-        <p:nvSpPr>
-          <p:cNvPr id="44" name="Text 42"/>
-          <p:cNvSpPr/>
-          <p:nvPr/>
-        </p:nvSpPr>
-        <p:spPr>
-          <a:xfrm>
-            <a:off x="8478317" y="5029200"/>
-            <a:ext cx="594360" cy="320040"/>
-          </a:xfrm>
-          <a:prstGeom prst="rect">
-            <a:avLst/>
-          </a:prstGeom>
-          <a:noFill/>
-          <a:ln/>
-        </p:spPr>
-        <p:txBody>
-          <a:bodyPr wrap="square" rtlCol="0" anchor="t"/>
-          <a:lstStyle/>
-          <a:p>
-            <a:pPr indent="0" marL="0">
-              <a:buNone/>
-            </a:pPr>
-            <a:r>
-              <a:rPr lang="en-US" sz="1200" b="1" dirty="0">
-                <a:solidFill>
-                  <a:srgbClr val="D97757"/>
-                </a:solidFill>
-                <a:latin typeface="Cascadia Mono" pitchFamily="34" charset="0"/>
-                <a:ea typeface="Cascadia Mono" pitchFamily="34" charset="-122"/>
-                <a:cs typeface="Cascadia Mono" pitchFamily="34" charset="-120"/>
-              </a:rPr>
-              <a:t>05</a:t>
-            </a:r>
-            <a:endParaRPr lang="en-US" sz="1200" dirty="0"/>
-          </a:p>
-        </p:txBody>
-      </p:sp>
-      <p:sp>
-        <p:nvSpPr>
-          <p:cNvPr id="45" name="Text 43"/>
-          <p:cNvSpPr/>
-          <p:nvPr/>
-        </p:nvSpPr>
-        <p:spPr>
-          <a:xfrm>
-            <a:off x="9072677" y="5029200"/>
-            <a:ext cx="2341778" cy="502920"/>
-          </a:xfrm>
-          <a:prstGeom prst="rect">
-            <a:avLst/>
-          </a:prstGeom>
-          <a:noFill/>
-          <a:ln/>
-        </p:spPr>
-        <p:txBody>
-          <a:bodyPr wrap="square" rtlCol="0" anchor="t"/>
-          <a:lstStyle/>
-          <a:p>
-            <a:pPr indent="0" marL="0">
-              <a:buNone/>
-            </a:pPr>
-            <a:r>
-              <a:rPr lang="en-US" sz="1100" dirty="0">
-                <a:solidFill>
-                  <a:srgbClr val="D8D8D8"/>
-                </a:solidFill>
-                <a:latin typeface="Cascadia Mono" pitchFamily="34" charset="0"/>
-                <a:ea typeface="Cascadia Mono" pitchFamily="34" charset="-122"/>
-                <a:cs typeface="Cascadia Mono" pitchFamily="34" charset="-120"/>
-              </a:rPr>
-              <a:t>/auth → RDP session history</a:t>
-            </a:r>
-            <a:endParaRPr lang="en-US" sz="1100" dirty="0"/>
-          </a:p>
-        </p:txBody>
-      </p:sp>
-      <p:sp>
-        <p:nvSpPr>
-          <p:cNvPr id="46" name="Text 44"/>
-          <p:cNvSpPr/>
-          <p:nvPr/>
-        </p:nvSpPr>
-        <p:spPr>
-          <a:xfrm>
-            <a:off x="11002975" y="6492240"/>
-            <a:ext cx="914400" cy="228600"/>
-          </a:xfrm>
-          <a:prstGeom prst="rect">
-            <a:avLst/>
-          </a:prstGeom>
-          <a:noFill/>
-          <a:ln/>
-        </p:spPr>
-        <p:txBody>
-          <a:bodyPr wrap="square" rtlCol="0" anchor="ctr"/>
-          <a:lstStyle/>
-          <a:p>
-            <a:pPr algn="r" indent="0" marL="0">
-              <a:buNone/>
-            </a:pPr>
-            <a:r>
-              <a:rPr lang="en-US" sz="900" dirty="0">
-                <a:solidFill>
-                  <a:srgbClr val="5A5A62"/>
-                </a:solidFill>
-                <a:latin typeface="Cascadia Mono" pitchFamily="34" charset="0"/>
-                <a:ea typeface="Cascadia Mono" pitchFamily="34" charset="-122"/>
-                <a:cs typeface="Cascadia Mono" pitchFamily="34" charset="-120"/>
-              </a:rPr>
-              <a:t>12 / 14</a:t>
+              <a:t>12 / 15</a:t>
             </a:r>
             <a:endParaRPr lang="en-US" sz="900" dirty="0"/>
           </a:p>
@@ -5668,7 +4878,7 @@
       </p:sp>
       <p:sp>
         <p:nvSpPr>
-          <p:cNvPr id="47" name="Text 45"/>
+          <p:cNvPr id="23" name="Text 20"/>
           <p:cNvSpPr/>
           <p:nvPr/>
         </p:nvSpPr>
@@ -5770,7 +4980,7 @@
                 <a:ea typeface="Calibri" pitchFamily="34" charset="-122"/>
                 <a:cs typeface="Calibri" pitchFamily="34" charset="-120"/>
               </a:rPr>
-              <a:t>INSTALLATION</a:t>
+              <a:t>HUNTING WORKFLOWS</a:t>
             </a:r>
             <a:endParaRPr lang="en-US" sz="1100" dirty="0"/>
           </a:p>
@@ -5809,7 +5019,7 @@
                 <a:ea typeface="Calibri" pitchFamily="34" charset="-122"/>
                 <a:cs typeface="Calibri" pitchFamily="34" charset="-120"/>
               </a:rPr>
-              <a:t>Drop the file. Run it.</a:t>
+              <a:t>Three short playbooks</a:t>
             </a:r>
             <a:endParaRPr lang="en-US" sz="3200" dirty="0"/>
           </a:p>
@@ -5823,16 +5033,16 @@
         </p:nvSpPr>
         <p:spPr>
           <a:xfrm>
-            <a:off x="502920" y="1691640"/>
-            <a:ext cx="6858000" cy="4297680"/>
+            <a:off x="502920" y="1645920"/>
+            <a:ext cx="3484778" cy="4206240"/>
           </a:xfrm>
           <a:prstGeom prst="roundRect">
             <a:avLst>
-              <a:gd name="adj" fmla="val 2128"/>
+              <a:gd name="adj" fmla="val 2624"/>
             </a:avLst>
           </a:prstGeom>
           <a:solidFill>
-            <a:srgbClr val="14141A"/>
+            <a:srgbClr val="1D1D22"/>
           </a:solidFill>
           <a:ln w="12700">
             <a:solidFill>
@@ -5850,88 +5060,211 @@
         </p:nvSpPr>
         <p:spPr>
           <a:xfrm>
-            <a:off x="777240" y="1828800"/>
-            <a:ext cx="6309360" cy="274320"/>
-          </a:xfrm>
-          <a:prstGeom prst="rect">
-            <a:avLst/>
-          </a:prstGeom>
-          <a:noFill/>
-          <a:ln/>
-        </p:spPr>
-        <p:txBody>
-          <a:bodyPr wrap="square" rtlCol="0" anchor="ctr"/>
-          <a:lstStyle/>
-          <a:p>
-            <a:pPr indent="0" marL="0">
-              <a:buNone/>
-            </a:pPr>
-            <a:r>
-              <a:rPr lang="en-US" sz="1000" dirty="0">
-                <a:solidFill>
-                  <a:srgbClr val="5A5A62"/>
+            <a:off x="777240" y="1874520"/>
+            <a:ext cx="2936138" cy="411480"/>
+          </a:xfrm>
+          <a:prstGeom prst="rect">
+            <a:avLst/>
+          </a:prstGeom>
+          <a:noFill/>
+          <a:ln/>
+        </p:spPr>
+        <p:txBody>
+          <a:bodyPr wrap="square" rtlCol="0" anchor="ctr"/>
+          <a:lstStyle/>
+          <a:p>
+            <a:pPr indent="0" marL="0">
+              <a:buNone/>
+            </a:pPr>
+            <a:r>
+              <a:rPr lang="en-US" sz="1800" b="1" dirty="0">
+                <a:solidFill>
+                  <a:srgbClr val="EB987C"/>
+                </a:solidFill>
+                <a:latin typeface="Calibri" pitchFamily="34" charset="0"/>
+                <a:ea typeface="Calibri" pitchFamily="34" charset="-122"/>
+                <a:cs typeface="Calibri" pitchFamily="34" charset="-120"/>
+              </a:rPr>
+              <a:t>"Something feels off"</a:t>
+            </a:r>
+            <a:endParaRPr lang="en-US" sz="1800" dirty="0"/>
+          </a:p>
+        </p:txBody>
+      </p:sp>
+      <p:sp>
+        <p:nvSpPr>
+          <p:cNvPr id="6" name="Text 4"/>
+          <p:cNvSpPr/>
+          <p:nvPr/>
+        </p:nvSpPr>
+        <p:spPr>
+          <a:xfrm>
+            <a:off x="777240" y="2286000"/>
+            <a:ext cx="2936138" cy="320040"/>
+          </a:xfrm>
+          <a:prstGeom prst="rect">
+            <a:avLst/>
+          </a:prstGeom>
+          <a:noFill/>
+          <a:ln/>
+        </p:spPr>
+        <p:txBody>
+          <a:bodyPr wrap="square" rtlCol="0" anchor="ctr"/>
+          <a:lstStyle/>
+          <a:p>
+            <a:pPr indent="0" marL="0">
+              <a:buNone/>
+            </a:pPr>
+            <a:r>
+              <a:rPr lang="en-US" sz="1200" i="1" dirty="0">
+                <a:solidFill>
+                  <a:srgbClr val="8E8E94"/>
+                </a:solidFill>
+                <a:latin typeface="Calibri" pitchFamily="34" charset="0"/>
+                <a:ea typeface="Calibri" pitchFamily="34" charset="-122"/>
+                <a:cs typeface="Calibri" pitchFamily="34" charset="-120"/>
+              </a:rPr>
+              <a:t>rapid triage in ~10 minutes</a:t>
+            </a:r>
+            <a:endParaRPr lang="en-US" sz="1200" dirty="0"/>
+          </a:p>
+        </p:txBody>
+      </p:sp>
+      <p:sp>
+        <p:nvSpPr>
+          <p:cNvPr id="7" name="Shape 5"/>
+          <p:cNvSpPr/>
+          <p:nvPr/>
+        </p:nvSpPr>
+        <p:spPr>
+          <a:xfrm>
+            <a:off x="777240" y="2651760"/>
+            <a:ext cx="2936138" cy="0"/>
+          </a:xfrm>
+          <a:prstGeom prst="line">
+            <a:avLst/>
+          </a:prstGeom>
+          <a:noFill/>
+          <a:ln w="9525">
+            <a:solidFill>
+              <a:srgbClr val="2E2E34"/>
+            </a:solidFill>
+            <a:prstDash val="solid"/>
+          </a:ln>
+        </p:spPr>
+      </p:sp>
+      <p:sp>
+        <p:nvSpPr>
+          <p:cNvPr id="8" name="Text 6"/>
+          <p:cNvSpPr/>
+          <p:nvPr/>
+        </p:nvSpPr>
+        <p:spPr>
+          <a:xfrm>
+            <a:off x="777240" y="2834640"/>
+            <a:ext cx="594360" cy="320040"/>
+          </a:xfrm>
+          <a:prstGeom prst="rect">
+            <a:avLst/>
+          </a:prstGeom>
+          <a:noFill/>
+          <a:ln/>
+        </p:spPr>
+        <p:txBody>
+          <a:bodyPr wrap="square" rtlCol="0" anchor="t"/>
+          <a:lstStyle/>
+          <a:p>
+            <a:pPr indent="0" marL="0">
+              <a:buNone/>
+            </a:pPr>
+            <a:r>
+              <a:rPr lang="en-US" sz="1200" b="1" dirty="0">
+                <a:solidFill>
+                  <a:srgbClr val="D97757"/>
                 </a:solidFill>
                 <a:latin typeface="Cascadia Mono" pitchFamily="34" charset="0"/>
                 <a:ea typeface="Cascadia Mono" pitchFamily="34" charset="-122"/>
                 <a:cs typeface="Cascadia Mono" pitchFamily="34" charset="-120"/>
               </a:rPr>
-              <a:t># from your usual prompt</a:t>
-            </a:r>
-            <a:endParaRPr lang="en-US" sz="1000" dirty="0"/>
-          </a:p>
-        </p:txBody>
-      </p:sp>
-      <p:sp>
-        <p:nvSpPr>
-          <p:cNvPr id="6" name="Text 4"/>
-          <p:cNvSpPr/>
-          <p:nvPr/>
-        </p:nvSpPr>
-        <p:spPr>
-          <a:xfrm>
-            <a:off x="777240" y="2103120"/>
-            <a:ext cx="6309360" cy="502920"/>
-          </a:xfrm>
-          <a:prstGeom prst="rect">
-            <a:avLst/>
-          </a:prstGeom>
-          <a:noFill/>
-          <a:ln/>
-        </p:spPr>
-        <p:txBody>
-          <a:bodyPr wrap="square" rtlCol="0" anchor="ctr"/>
-          <a:lstStyle/>
-          <a:p>
-            <a:pPr indent="0" marL="0">
-              <a:buNone/>
-            </a:pPr>
-            <a:r>
-              <a:rPr lang="en-US" sz="1200" dirty="0">
-                <a:solidFill>
-                  <a:srgbClr val="EB987C"/>
+              <a:t>01</a:t>
+            </a:r>
+            <a:endParaRPr lang="en-US" sz="1200" dirty="0"/>
+          </a:p>
+        </p:txBody>
+      </p:sp>
+      <p:sp>
+        <p:nvSpPr>
+          <p:cNvPr id="9" name="Text 7"/>
+          <p:cNvSpPr/>
+          <p:nvPr/>
+        </p:nvSpPr>
+        <p:spPr>
+          <a:xfrm>
+            <a:off x="1371600" y="2834640"/>
+            <a:ext cx="2341778" cy="502920"/>
+          </a:xfrm>
+          <a:prstGeom prst="rect">
+            <a:avLst/>
+          </a:prstGeom>
+          <a:noFill/>
+          <a:ln/>
+        </p:spPr>
+        <p:txBody>
+          <a:bodyPr wrap="square" rtlCol="0" anchor="t"/>
+          <a:lstStyle/>
+          <a:p>
+            <a:pPr indent="0" marL="0">
+              <a:buNone/>
+            </a:pPr>
+            <a:r>
+              <a:rPr lang="en-US" sz="1100" dirty="0">
+                <a:solidFill>
+                  <a:srgbClr val="D8D8D8"/>
                 </a:solidFill>
                 <a:latin typeface="Cascadia Mono" pitchFamily="34" charset="0"/>
                 <a:ea typeface="Cascadia Mono" pitchFamily="34" charset="-122"/>
                 <a:cs typeface="Cascadia Mono" pitchFamily="34" charset="-120"/>
               </a:rPr>
-              <a:t>cd C:\Tools\ThreatHunter</a:t>
-            </a:r>
-            <a:endParaRPr lang="en-US" sz="1200" dirty="0"/>
-          </a:p>
-          <a:p>
-            <a:pPr indent="0" marL="0">
-              <a:buNone/>
-            </a:pPr>
-            <a:r>
-              <a:rPr lang="en-US" sz="1200" dirty="0">
-                <a:solidFill>
-                  <a:srgbClr val="EB987C"/>
+              <a:t>/hunt → unsigned binaries running</a:t>
+            </a:r>
+            <a:endParaRPr lang="en-US" sz="1100" dirty="0"/>
+          </a:p>
+        </p:txBody>
+      </p:sp>
+      <p:sp>
+        <p:nvSpPr>
+          <p:cNvPr id="10" name="Text 8"/>
+          <p:cNvSpPr/>
+          <p:nvPr/>
+        </p:nvSpPr>
+        <p:spPr>
+          <a:xfrm>
+            <a:off x="777240" y="3383280"/>
+            <a:ext cx="594360" cy="320040"/>
+          </a:xfrm>
+          <a:prstGeom prst="rect">
+            <a:avLst/>
+          </a:prstGeom>
+          <a:noFill/>
+          <a:ln/>
+        </p:spPr>
+        <p:txBody>
+          <a:bodyPr wrap="square" rtlCol="0" anchor="t"/>
+          <a:lstStyle/>
+          <a:p>
+            <a:pPr indent="0" marL="0">
+              <a:buNone/>
+            </a:pPr>
+            <a:r>
+              <a:rPr lang="en-US" sz="1200" b="1" dirty="0">
+                <a:solidFill>
+                  <a:srgbClr val="D97757"/>
                 </a:solidFill>
                 <a:latin typeface="Cascadia Mono" pitchFamily="34" charset="0"/>
                 <a:ea typeface="Cascadia Mono" pitchFamily="34" charset="-122"/>
                 <a:cs typeface="Cascadia Mono" pitchFamily="34" charset="-120"/>
               </a:rPr>
-              <a:t>.\ThreatHunter.ps1</a:t>
+              <a:t>02</a:t>
             </a:r>
             <a:endParaRPr lang="en-US" sz="1200" dirty="0"/>
           </a:p>
@@ -5939,77 +5272,77 @@
       </p:sp>
       <p:sp>
         <p:nvSpPr>
-          <p:cNvPr id="7" name="Text 5"/>
-          <p:cNvSpPr/>
-          <p:nvPr/>
-        </p:nvSpPr>
-        <p:spPr>
-          <a:xfrm>
-            <a:off x="777240" y="2743200"/>
-            <a:ext cx="6309360" cy="274320"/>
-          </a:xfrm>
-          <a:prstGeom prst="rect">
-            <a:avLst/>
-          </a:prstGeom>
-          <a:noFill/>
-          <a:ln/>
-        </p:spPr>
-        <p:txBody>
-          <a:bodyPr wrap="square" rtlCol="0" anchor="ctr"/>
-          <a:lstStyle/>
-          <a:p>
-            <a:pPr indent="0" marL="0">
-              <a:buNone/>
-            </a:pPr>
-            <a:r>
-              <a:rPr lang="en-US" sz="1000" dirty="0">
-                <a:solidFill>
-                  <a:srgbClr val="5A5A62"/>
+          <p:cNvPr id="11" name="Text 9"/>
+          <p:cNvSpPr/>
+          <p:nvPr/>
+        </p:nvSpPr>
+        <p:spPr>
+          <a:xfrm>
+            <a:off x="1371600" y="3383280"/>
+            <a:ext cx="2341778" cy="502920"/>
+          </a:xfrm>
+          <a:prstGeom prst="rect">
+            <a:avLst/>
+          </a:prstGeom>
+          <a:noFill/>
+          <a:ln/>
+        </p:spPr>
+        <p:txBody>
+          <a:bodyPr wrap="square" rtlCol="0" anchor="t"/>
+          <a:lstStyle/>
+          <a:p>
+            <a:pPr indent="0" marL="0">
+              <a:buNone/>
+            </a:pPr>
+            <a:r>
+              <a:rPr lang="en-US" sz="1100" dirty="0">
+                <a:solidFill>
+                  <a:srgbClr val="D8D8D8"/>
                 </a:solidFill>
                 <a:latin typeface="Cascadia Mono" pitchFamily="34" charset="0"/>
                 <a:ea typeface="Cascadia Mono" pitchFamily="34" charset="-122"/>
                 <a:cs typeface="Cascadia Mono" pitchFamily="34" charset="-120"/>
               </a:rPr>
-              <a:t># bypass execution policy (session only)</a:t>
-            </a:r>
-            <a:endParaRPr lang="en-US" sz="1000" dirty="0"/>
-          </a:p>
-        </p:txBody>
-      </p:sp>
-      <p:sp>
-        <p:nvSpPr>
-          <p:cNvPr id="8" name="Text 6"/>
-          <p:cNvSpPr/>
-          <p:nvPr/>
-        </p:nvSpPr>
-        <p:spPr>
-          <a:xfrm>
-            <a:off x="777240" y="3017520"/>
-            <a:ext cx="6309360" cy="274320"/>
-          </a:xfrm>
-          <a:prstGeom prst="rect">
-            <a:avLst/>
-          </a:prstGeom>
-          <a:noFill/>
-          <a:ln/>
-        </p:spPr>
-        <p:txBody>
-          <a:bodyPr wrap="square" rtlCol="0" anchor="ctr"/>
-          <a:lstStyle/>
-          <a:p>
-            <a:pPr indent="0" marL="0">
-              <a:buNone/>
-            </a:pPr>
-            <a:r>
-              <a:rPr lang="en-US" sz="1200" dirty="0">
-                <a:solidFill>
-                  <a:srgbClr val="EB987C"/>
+              <a:t>/hunt → procs from Temp / AppData</a:t>
+            </a:r>
+            <a:endParaRPr lang="en-US" sz="1100" dirty="0"/>
+          </a:p>
+        </p:txBody>
+      </p:sp>
+      <p:sp>
+        <p:nvSpPr>
+          <p:cNvPr id="12" name="Text 10"/>
+          <p:cNvSpPr/>
+          <p:nvPr/>
+        </p:nvSpPr>
+        <p:spPr>
+          <a:xfrm>
+            <a:off x="777240" y="3931920"/>
+            <a:ext cx="594360" cy="320040"/>
+          </a:xfrm>
+          <a:prstGeom prst="rect">
+            <a:avLst/>
+          </a:prstGeom>
+          <a:noFill/>
+          <a:ln/>
+        </p:spPr>
+        <p:txBody>
+          <a:bodyPr wrap="square" rtlCol="0" anchor="t"/>
+          <a:lstStyle/>
+          <a:p>
+            <a:pPr indent="0" marL="0">
+              <a:buNone/>
+            </a:pPr>
+            <a:r>
+              <a:rPr lang="en-US" sz="1200" b="1" dirty="0">
+                <a:solidFill>
+                  <a:srgbClr val="D97757"/>
                 </a:solidFill>
                 <a:latin typeface="Cascadia Mono" pitchFamily="34" charset="0"/>
                 <a:ea typeface="Cascadia Mono" pitchFamily="34" charset="-122"/>
                 <a:cs typeface="Cascadia Mono" pitchFamily="34" charset="-120"/>
               </a:rPr>
-              <a:t>powershell.exe -ExecutionPolicy Bypass -File .\ThreatHunter.ps1</a:t>
+              <a:t>03</a:t>
             </a:r>
             <a:endParaRPr lang="en-US" sz="1200" dirty="0"/>
           </a:p>
@@ -6017,77 +5350,77 @@
       </p:sp>
       <p:sp>
         <p:nvSpPr>
-          <p:cNvPr id="9" name="Text 7"/>
-          <p:cNvSpPr/>
-          <p:nvPr/>
-        </p:nvSpPr>
-        <p:spPr>
-          <a:xfrm>
-            <a:off x="777240" y="3429000"/>
-            <a:ext cx="6309360" cy="274320"/>
-          </a:xfrm>
-          <a:prstGeom prst="rect">
-            <a:avLst/>
-          </a:prstGeom>
-          <a:noFill/>
-          <a:ln/>
-        </p:spPr>
-        <p:txBody>
-          <a:bodyPr wrap="square" rtlCol="0" anchor="ctr"/>
-          <a:lstStyle/>
-          <a:p>
-            <a:pPr indent="0" marL="0">
-              <a:buNone/>
-            </a:pPr>
-            <a:r>
-              <a:rPr lang="en-US" sz="1000" dirty="0">
-                <a:solidFill>
-                  <a:srgbClr val="5A5A62"/>
+          <p:cNvPr id="13" name="Text 11"/>
+          <p:cNvSpPr/>
+          <p:nvPr/>
+        </p:nvSpPr>
+        <p:spPr>
+          <a:xfrm>
+            <a:off x="1371600" y="3931920"/>
+            <a:ext cx="2341778" cy="502920"/>
+          </a:xfrm>
+          <a:prstGeom prst="rect">
+            <a:avLst/>
+          </a:prstGeom>
+          <a:noFill/>
+          <a:ln/>
+        </p:spPr>
+        <p:txBody>
+          <a:bodyPr wrap="square" rtlCol="0" anchor="t"/>
+          <a:lstStyle/>
+          <a:p>
+            <a:pPr indent="0" marL="0">
+              <a:buNone/>
+            </a:pPr>
+            <a:r>
+              <a:rPr lang="en-US" sz="1100" dirty="0">
+                <a:solidFill>
+                  <a:srgbClr val="D8D8D8"/>
                 </a:solidFill>
                 <a:latin typeface="Cascadia Mono" pitchFamily="34" charset="0"/>
                 <a:ea typeface="Cascadia Mono" pitchFamily="34" charset="-122"/>
                 <a:cs typeface="Cascadia Mono" pitchFamily="34" charset="-120"/>
               </a:rPr>
-              <a:t># recommended on a target endpoint</a:t>
-            </a:r>
-            <a:endParaRPr lang="en-US" sz="1000" dirty="0"/>
-          </a:p>
-        </p:txBody>
-      </p:sp>
-      <p:sp>
-        <p:nvSpPr>
-          <p:cNvPr id="10" name="Text 8"/>
-          <p:cNvSpPr/>
-          <p:nvPr/>
-        </p:nvSpPr>
-        <p:spPr>
-          <a:xfrm>
-            <a:off x="777240" y="3703320"/>
-            <a:ext cx="6309360" cy="274320"/>
-          </a:xfrm>
-          <a:prstGeom prst="rect">
-            <a:avLst/>
-          </a:prstGeom>
-          <a:noFill/>
-          <a:ln/>
-        </p:spPr>
-        <p:txBody>
-          <a:bodyPr wrap="square" rtlCol="0" anchor="ctr"/>
-          <a:lstStyle/>
-          <a:p>
-            <a:pPr indent="0" marL="0">
-              <a:buNone/>
-            </a:pPr>
-            <a:r>
-              <a:rPr lang="en-US" sz="1200" dirty="0">
-                <a:solidFill>
-                  <a:srgbClr val="EB987C"/>
+              <a:t>/net  → established TCP + PIDs</a:t>
+            </a:r>
+            <a:endParaRPr lang="en-US" sz="1100" dirty="0"/>
+          </a:p>
+        </p:txBody>
+      </p:sp>
+      <p:sp>
+        <p:nvSpPr>
+          <p:cNvPr id="14" name="Text 12"/>
+          <p:cNvSpPr/>
+          <p:nvPr/>
+        </p:nvSpPr>
+        <p:spPr>
+          <a:xfrm>
+            <a:off x="777240" y="4480560"/>
+            <a:ext cx="594360" cy="320040"/>
+          </a:xfrm>
+          <a:prstGeom prst="rect">
+            <a:avLst/>
+          </a:prstGeom>
+          <a:noFill/>
+          <a:ln/>
+        </p:spPr>
+        <p:txBody>
+          <a:bodyPr wrap="square" rtlCol="0" anchor="t"/>
+          <a:lstStyle/>
+          <a:p>
+            <a:pPr indent="0" marL="0">
+              <a:buNone/>
+            </a:pPr>
+            <a:r>
+              <a:rPr lang="en-US" sz="1200" b="1" dirty="0">
+                <a:solidFill>
+                  <a:srgbClr val="D97757"/>
                 </a:solidFill>
                 <a:latin typeface="Cascadia Mono" pitchFamily="34" charset="0"/>
                 <a:ea typeface="Cascadia Mono" pitchFamily="34" charset="-122"/>
                 <a:cs typeface="Cascadia Mono" pitchFamily="34" charset="-120"/>
               </a:rPr>
-              <a:t>pwsh -NoProfile -File .\ThreatHunter.ps1</a:t>
+              <a:t>04</a:t>
             </a:r>
             <a:endParaRPr lang="en-US" sz="1200" dirty="0"/>
           </a:p>
@@ -6095,77 +5428,77 @@
       </p:sp>
       <p:sp>
         <p:nvSpPr>
-          <p:cNvPr id="11" name="Text 9"/>
-          <p:cNvSpPr/>
-          <p:nvPr/>
-        </p:nvSpPr>
-        <p:spPr>
-          <a:xfrm>
-            <a:off x="777240" y="4114800"/>
-            <a:ext cx="6309360" cy="274320"/>
-          </a:xfrm>
-          <a:prstGeom prst="rect">
-            <a:avLst/>
-          </a:prstGeom>
-          <a:noFill/>
-          <a:ln/>
-        </p:spPr>
-        <p:txBody>
-          <a:bodyPr wrap="square" rtlCol="0" anchor="ctr"/>
-          <a:lstStyle/>
-          <a:p>
-            <a:pPr indent="0" marL="0">
-              <a:buNone/>
-            </a:pPr>
-            <a:r>
-              <a:rPr lang="en-US" sz="1000" dirty="0">
-                <a:solidFill>
-                  <a:srgbClr val="5A5A62"/>
+          <p:cNvPr id="15" name="Text 13"/>
+          <p:cNvSpPr/>
+          <p:nvPr/>
+        </p:nvSpPr>
+        <p:spPr>
+          <a:xfrm>
+            <a:off x="1371600" y="4480560"/>
+            <a:ext cx="2341778" cy="502920"/>
+          </a:xfrm>
+          <a:prstGeom prst="rect">
+            <a:avLst/>
+          </a:prstGeom>
+          <a:noFill/>
+          <a:ln/>
+        </p:spPr>
+        <p:txBody>
+          <a:bodyPr wrap="square" rtlCol="0" anchor="t"/>
+          <a:lstStyle/>
+          <a:p>
+            <a:pPr indent="0" marL="0">
+              <a:buNone/>
+            </a:pPr>
+            <a:r>
+              <a:rPr lang="en-US" sz="1100" dirty="0">
+                <a:solidFill>
+                  <a:srgbClr val="D8D8D8"/>
                 </a:solidFill>
                 <a:latin typeface="Cascadia Mono" pitchFamily="34" charset="0"/>
                 <a:ea typeface="Cascadia Mono" pitchFamily="34" charset="-122"/>
                 <a:cs typeface="Cascadia Mono" pitchFamily="34" charset="-120"/>
               </a:rPr>
-              <a:t># load IOCs at startup</a:t>
-            </a:r>
-            <a:endParaRPr lang="en-US" sz="1000" dirty="0"/>
-          </a:p>
-        </p:txBody>
-      </p:sp>
-      <p:sp>
-        <p:nvSpPr>
-          <p:cNvPr id="12" name="Text 10"/>
-          <p:cNvSpPr/>
-          <p:nvPr/>
-        </p:nvSpPr>
-        <p:spPr>
-          <a:xfrm>
-            <a:off x="777240" y="4389120"/>
-            <a:ext cx="6309360" cy="274320"/>
-          </a:xfrm>
-          <a:prstGeom prst="rect">
-            <a:avLst/>
-          </a:prstGeom>
-          <a:noFill/>
-          <a:ln/>
-        </p:spPr>
-        <p:txBody>
-          <a:bodyPr wrap="square" rtlCol="0" anchor="ctr"/>
-          <a:lstStyle/>
-          <a:p>
-            <a:pPr indent="0" marL="0">
-              <a:buNone/>
-            </a:pPr>
-            <a:r>
-              <a:rPr lang="en-US" sz="1200" dirty="0">
-                <a:solidFill>
-                  <a:srgbClr val="EB987C"/>
+              <a:t>/persist → tasks (non-Microsoft) + run keys</a:t>
+            </a:r>
+            <a:endParaRPr lang="en-US" sz="1100" dirty="0"/>
+          </a:p>
+        </p:txBody>
+      </p:sp>
+      <p:sp>
+        <p:nvSpPr>
+          <p:cNvPr id="16" name="Text 14"/>
+          <p:cNvSpPr/>
+          <p:nvPr/>
+        </p:nvSpPr>
+        <p:spPr>
+          <a:xfrm>
+            <a:off x="777240" y="5029200"/>
+            <a:ext cx="594360" cy="320040"/>
+          </a:xfrm>
+          <a:prstGeom prst="rect">
+            <a:avLst/>
+          </a:prstGeom>
+          <a:noFill/>
+          <a:ln/>
+        </p:spPr>
+        <p:txBody>
+          <a:bodyPr wrap="square" rtlCol="0" anchor="t"/>
+          <a:lstStyle/>
+          <a:p>
+            <a:pPr indent="0" marL="0">
+              <a:buNone/>
+            </a:pPr>
+            <a:r>
+              <a:rPr lang="en-US" sz="1200" b="1" dirty="0">
+                <a:solidFill>
+                  <a:srgbClr val="D97757"/>
                 </a:solidFill>
                 <a:latin typeface="Cascadia Mono" pitchFamily="34" charset="0"/>
                 <a:ea typeface="Cascadia Mono" pitchFamily="34" charset="-122"/>
                 <a:cs typeface="Cascadia Mono" pitchFamily="34" charset="-120"/>
               </a:rPr>
-              <a:t>.\ThreatHunter.ps1 -IocFile .\iocs.csv</a:t>
+              <a:t>05</a:t>
             </a:r>
             <a:endParaRPr lang="en-US" sz="1200" dirty="0"/>
           </a:p>
@@ -6173,77 +5506,205 @@
       </p:sp>
       <p:sp>
         <p:nvSpPr>
-          <p:cNvPr id="13" name="Text 11"/>
-          <p:cNvSpPr/>
-          <p:nvPr/>
-        </p:nvSpPr>
-        <p:spPr>
-          <a:xfrm>
-            <a:off x="777240" y="4800600"/>
-            <a:ext cx="6309360" cy="274320"/>
-          </a:xfrm>
-          <a:prstGeom prst="rect">
-            <a:avLst/>
-          </a:prstGeom>
-          <a:noFill/>
-          <a:ln/>
-        </p:spPr>
-        <p:txBody>
-          <a:bodyPr wrap="square" rtlCol="0" anchor="ctr"/>
-          <a:lstStyle/>
-          <a:p>
-            <a:pPr indent="0" marL="0">
-              <a:buNone/>
-            </a:pPr>
-            <a:r>
-              <a:rPr lang="en-US" sz="1000" dirty="0">
-                <a:solidFill>
-                  <a:srgbClr val="5A5A62"/>
+          <p:cNvPr id="17" name="Text 15"/>
+          <p:cNvSpPr/>
+          <p:nvPr/>
+        </p:nvSpPr>
+        <p:spPr>
+          <a:xfrm>
+            <a:off x="1371600" y="5029200"/>
+            <a:ext cx="2341778" cy="502920"/>
+          </a:xfrm>
+          <a:prstGeom prst="rect">
+            <a:avLst/>
+          </a:prstGeom>
+          <a:noFill/>
+          <a:ln/>
+        </p:spPr>
+        <p:txBody>
+          <a:bodyPr wrap="square" rtlCol="0" anchor="t"/>
+          <a:lstStyle/>
+          <a:p>
+            <a:pPr indent="0" marL="0">
+              <a:buNone/>
+            </a:pPr>
+            <a:r>
+              <a:rPr lang="en-US" sz="1100" dirty="0">
+                <a:solidFill>
+                  <a:srgbClr val="D8D8D8"/>
                 </a:solidFill>
                 <a:latin typeface="Cascadia Mono" pitchFamily="34" charset="0"/>
                 <a:ea typeface="Cascadia Mono" pitchFamily="34" charset="-122"/>
                 <a:cs typeface="Cascadia Mono" pitchFamily="34" charset="-120"/>
               </a:rPr>
-              <a:t># custom output, monochrome</a:t>
-            </a:r>
-            <a:endParaRPr lang="en-US" sz="1000" dirty="0"/>
-          </a:p>
-        </p:txBody>
-      </p:sp>
-      <p:sp>
-        <p:nvSpPr>
-          <p:cNvPr id="14" name="Text 12"/>
-          <p:cNvSpPr/>
-          <p:nvPr/>
-        </p:nvSpPr>
-        <p:spPr>
-          <a:xfrm>
-            <a:off x="777240" y="5074920"/>
-            <a:ext cx="6309360" cy="274320"/>
-          </a:xfrm>
-          <a:prstGeom prst="rect">
-            <a:avLst/>
-          </a:prstGeom>
-          <a:noFill/>
-          <a:ln/>
-        </p:spPr>
-        <p:txBody>
-          <a:bodyPr wrap="square" rtlCol="0" anchor="ctr"/>
-          <a:lstStyle/>
-          <a:p>
-            <a:pPr indent="0" marL="0">
-              <a:buNone/>
-            </a:pPr>
-            <a:r>
-              <a:rPr lang="en-US" sz="1200" dirty="0">
+              <a:t>/q   → save the report</a:t>
+            </a:r>
+            <a:endParaRPr lang="en-US" sz="1100" dirty="0"/>
+          </a:p>
+        </p:txBody>
+      </p:sp>
+      <p:sp>
+        <p:nvSpPr>
+          <p:cNvPr id="18" name="Shape 16"/>
+          <p:cNvSpPr/>
+          <p:nvPr/>
+        </p:nvSpPr>
+        <p:spPr>
+          <a:xfrm>
+            <a:off x="4353458" y="1645920"/>
+            <a:ext cx="3484778" cy="4206240"/>
+          </a:xfrm>
+          <a:prstGeom prst="roundRect">
+            <a:avLst>
+              <a:gd name="adj" fmla="val 2624"/>
+            </a:avLst>
+          </a:prstGeom>
+          <a:solidFill>
+            <a:srgbClr val="1D1D22"/>
+          </a:solidFill>
+          <a:ln w="12700">
+            <a:solidFill>
+              <a:srgbClr val="2E2E34"/>
+            </a:solidFill>
+            <a:prstDash val="solid"/>
+          </a:ln>
+        </p:spPr>
+      </p:sp>
+      <p:sp>
+        <p:nvSpPr>
+          <p:cNvPr id="19" name="Text 17"/>
+          <p:cNvSpPr/>
+          <p:nvPr/>
+        </p:nvSpPr>
+        <p:spPr>
+          <a:xfrm>
+            <a:off x="4627778" y="1874520"/>
+            <a:ext cx="2936138" cy="411480"/>
+          </a:xfrm>
+          <a:prstGeom prst="rect">
+            <a:avLst/>
+          </a:prstGeom>
+          <a:noFill/>
+          <a:ln/>
+        </p:spPr>
+        <p:txBody>
+          <a:bodyPr wrap="square" rtlCol="0" anchor="ctr"/>
+          <a:lstStyle/>
+          <a:p>
+            <a:pPr indent="0" marL="0">
+              <a:buNone/>
+            </a:pPr>
+            <a:r>
+              <a:rPr lang="en-US" sz="1800" b="1" dirty="0">
                 <a:solidFill>
                   <a:srgbClr val="EB987C"/>
+                </a:solidFill>
+                <a:latin typeface="Calibri" pitchFamily="34" charset="0"/>
+                <a:ea typeface="Calibri" pitchFamily="34" charset="-122"/>
+                <a:cs typeface="Calibri" pitchFamily="34" charset="-120"/>
+              </a:rPr>
+              <a:t>IOC sweep</a:t>
+            </a:r>
+            <a:endParaRPr lang="en-US" sz="1800" dirty="0"/>
+          </a:p>
+        </p:txBody>
+      </p:sp>
+      <p:sp>
+        <p:nvSpPr>
+          <p:cNvPr id="20" name="Text 18"/>
+          <p:cNvSpPr/>
+          <p:nvPr/>
+        </p:nvSpPr>
+        <p:spPr>
+          <a:xfrm>
+            <a:off x="4627778" y="2286000"/>
+            <a:ext cx="2936138" cy="320040"/>
+          </a:xfrm>
+          <a:prstGeom prst="rect">
+            <a:avLst/>
+          </a:prstGeom>
+          <a:noFill/>
+          <a:ln/>
+        </p:spPr>
+        <p:txBody>
+          <a:bodyPr wrap="square" rtlCol="0" anchor="ctr"/>
+          <a:lstStyle/>
+          <a:p>
+            <a:pPr indent="0" marL="0">
+              <a:buNone/>
+            </a:pPr>
+            <a:r>
+              <a:rPr lang="en-US" sz="1200" i="1" dirty="0">
+                <a:solidFill>
+                  <a:srgbClr val="8E8E94"/>
+                </a:solidFill>
+                <a:latin typeface="Calibri" pitchFamily="34" charset="0"/>
+                <a:ea typeface="Calibri" pitchFamily="34" charset="-122"/>
+                <a:cs typeface="Calibri" pitchFamily="34" charset="-120"/>
+              </a:rPr>
+              <a:t>you have indicators, check this host</a:t>
+            </a:r>
+            <a:endParaRPr lang="en-US" sz="1200" dirty="0"/>
+          </a:p>
+        </p:txBody>
+      </p:sp>
+      <p:sp>
+        <p:nvSpPr>
+          <p:cNvPr id="21" name="Shape 19"/>
+          <p:cNvSpPr/>
+          <p:nvPr/>
+        </p:nvSpPr>
+        <p:spPr>
+          <a:xfrm>
+            <a:off x="4627778" y="2651760"/>
+            <a:ext cx="2936138" cy="0"/>
+          </a:xfrm>
+          <a:prstGeom prst="line">
+            <a:avLst/>
+          </a:prstGeom>
+          <a:noFill/>
+          <a:ln w="9525">
+            <a:solidFill>
+              <a:srgbClr val="2E2E34"/>
+            </a:solidFill>
+            <a:prstDash val="solid"/>
+          </a:ln>
+        </p:spPr>
+      </p:sp>
+      <p:sp>
+        <p:nvSpPr>
+          <p:cNvPr id="22" name="Text 20"/>
+          <p:cNvSpPr/>
+          <p:nvPr/>
+        </p:nvSpPr>
+        <p:spPr>
+          <a:xfrm>
+            <a:off x="4627778" y="2834640"/>
+            <a:ext cx="594360" cy="320040"/>
+          </a:xfrm>
+          <a:prstGeom prst="rect">
+            <a:avLst/>
+          </a:prstGeom>
+          <a:noFill/>
+          <a:ln/>
+        </p:spPr>
+        <p:txBody>
+          <a:bodyPr wrap="square" rtlCol="0" anchor="t"/>
+          <a:lstStyle/>
+          <a:p>
+            <a:pPr indent="0" marL="0">
+              <a:buNone/>
+            </a:pPr>
+            <a:r>
+              <a:rPr lang="en-US" sz="1200" b="1" dirty="0">
+                <a:solidFill>
+                  <a:srgbClr val="D97757"/>
                 </a:solidFill>
                 <a:latin typeface="Cascadia Mono" pitchFamily="34" charset="0"/>
                 <a:ea typeface="Cascadia Mono" pitchFamily="34" charset="-122"/>
                 <a:cs typeface="Cascadia Mono" pitchFamily="34" charset="-120"/>
               </a:rPr>
-              <a:t>.\ThreatHunter.ps1 -OutputRoot D:\IR\Cases\Q2 -NoColor</a:t>
+              <a:t>01</a:t>
             </a:r>
             <a:endParaRPr lang="en-US" sz="1200" dirty="0"/>
           </a:p>
@@ -6251,701 +5712,907 @@
       </p:sp>
       <p:sp>
         <p:nvSpPr>
-          <p:cNvPr id="15" name="Text 13"/>
-          <p:cNvSpPr/>
-          <p:nvPr/>
-        </p:nvSpPr>
-        <p:spPr>
-          <a:xfrm>
-            <a:off x="7635240" y="1691640"/>
-            <a:ext cx="4053535" cy="365760"/>
-          </a:xfrm>
-          <a:prstGeom prst="rect">
-            <a:avLst/>
-          </a:prstGeom>
-          <a:noFill/>
-          <a:ln/>
-        </p:spPr>
-        <p:txBody>
-          <a:bodyPr wrap="square" rtlCol="0" anchor="ctr"/>
-          <a:lstStyle/>
-          <a:p>
-            <a:pPr indent="0" marL="0">
-              <a:buNone/>
-            </a:pPr>
-            <a:r>
-              <a:rPr lang="en-US" sz="1800" b="1" dirty="0">
-                <a:solidFill>
-                  <a:srgbClr val="EB987C"/>
-                </a:solidFill>
-                <a:latin typeface="Calibri" pitchFamily="34" charset="0"/>
-                <a:ea typeface="Calibri" pitchFamily="34" charset="-122"/>
-                <a:cs typeface="Calibri" pitchFamily="34" charset="-120"/>
-              </a:rPr>
-              <a:t>Compatibility</a:t>
-            </a:r>
-            <a:endParaRPr lang="en-US" sz="1800" dirty="0"/>
-          </a:p>
-        </p:txBody>
-      </p:sp>
-      <p:sp>
-        <p:nvSpPr>
-          <p:cNvPr id="16" name="Text 14"/>
-          <p:cNvSpPr/>
-          <p:nvPr/>
-        </p:nvSpPr>
-        <p:spPr>
-          <a:xfrm>
-            <a:off x="7635240" y="2194560"/>
-            <a:ext cx="274320" cy="320040"/>
-          </a:xfrm>
-          <a:prstGeom prst="rect">
-            <a:avLst/>
-          </a:prstGeom>
-          <a:noFill/>
-          <a:ln/>
-        </p:spPr>
-        <p:txBody>
-          <a:bodyPr wrap="square" rtlCol="0" anchor="ctr"/>
-          <a:lstStyle/>
-          <a:p>
-            <a:pPr indent="0" marL="0">
-              <a:buNone/>
-            </a:pPr>
-            <a:r>
-              <a:rPr lang="en-US" sz="1400" b="1" dirty="0">
-                <a:solidFill>
-                  <a:srgbClr val="89C489"/>
-                </a:solidFill>
-                <a:latin typeface="Calibri" pitchFamily="34" charset="0"/>
-                <a:ea typeface="Calibri" pitchFamily="34" charset="-122"/>
-                <a:cs typeface="Calibri" pitchFamily="34" charset="-120"/>
-              </a:rPr>
-              <a:t>✓</a:t>
-            </a:r>
-            <a:endParaRPr lang="en-US" sz="1400" dirty="0"/>
-          </a:p>
-        </p:txBody>
-      </p:sp>
-      <p:sp>
-        <p:nvSpPr>
-          <p:cNvPr id="17" name="Text 15"/>
-          <p:cNvSpPr/>
-          <p:nvPr/>
-        </p:nvSpPr>
-        <p:spPr>
-          <a:xfrm>
-            <a:off x="7955280" y="2194560"/>
-            <a:ext cx="3733495" cy="320040"/>
-          </a:xfrm>
-          <a:prstGeom prst="rect">
-            <a:avLst/>
-          </a:prstGeom>
-          <a:noFill/>
-          <a:ln/>
-        </p:spPr>
-        <p:txBody>
-          <a:bodyPr wrap="square" rtlCol="0" anchor="ctr"/>
-          <a:lstStyle/>
-          <a:p>
-            <a:pPr indent="0" marL="0">
-              <a:buNone/>
-            </a:pPr>
-            <a:r>
-              <a:rPr lang="en-US" sz="1300" dirty="0">
+          <p:cNvPr id="23" name="Text 21"/>
+          <p:cNvSpPr/>
+          <p:nvPr/>
+        </p:nvSpPr>
+        <p:spPr>
+          <a:xfrm>
+            <a:off x="5222138" y="2834640"/>
+            <a:ext cx="2341778" cy="502920"/>
+          </a:xfrm>
+          <a:prstGeom prst="rect">
+            <a:avLst/>
+          </a:prstGeom>
+          <a:noFill/>
+          <a:ln/>
+        </p:spPr>
+        <p:txBody>
+          <a:bodyPr wrap="square" rtlCol="0" anchor="t"/>
+          <a:lstStyle/>
+          <a:p>
+            <a:pPr indent="0" marL="0">
+              <a:buNone/>
+            </a:pPr>
+            <a:r>
+              <a:rPr lang="en-US" sz="1100" dirty="0">
                 <a:solidFill>
                   <a:srgbClr val="D8D8D8"/>
-                </a:solidFill>
-                <a:latin typeface="Calibri" pitchFamily="34" charset="0"/>
-                <a:ea typeface="Calibri" pitchFamily="34" charset="-122"/>
-                <a:cs typeface="Calibri" pitchFamily="34" charset="-120"/>
-              </a:rPr>
-              <a:t>Windows 10 / 11</a:t>
-            </a:r>
-            <a:endParaRPr lang="en-US" sz="1300" dirty="0"/>
-          </a:p>
-        </p:txBody>
-      </p:sp>
-      <p:sp>
-        <p:nvSpPr>
-          <p:cNvPr id="18" name="Text 16"/>
-          <p:cNvSpPr/>
-          <p:nvPr/>
-        </p:nvSpPr>
-        <p:spPr>
-          <a:xfrm>
-            <a:off x="7635240" y="2651760"/>
-            <a:ext cx="274320" cy="320040"/>
-          </a:xfrm>
-          <a:prstGeom prst="rect">
-            <a:avLst/>
-          </a:prstGeom>
-          <a:noFill/>
-          <a:ln/>
-        </p:spPr>
-        <p:txBody>
-          <a:bodyPr wrap="square" rtlCol="0" anchor="ctr"/>
-          <a:lstStyle/>
-          <a:p>
-            <a:pPr indent="0" marL="0">
-              <a:buNone/>
-            </a:pPr>
-            <a:r>
-              <a:rPr lang="en-US" sz="1400" b="1" dirty="0">
-                <a:solidFill>
-                  <a:srgbClr val="89C489"/>
-                </a:solidFill>
-                <a:latin typeface="Calibri" pitchFamily="34" charset="0"/>
-                <a:ea typeface="Calibri" pitchFamily="34" charset="-122"/>
-                <a:cs typeface="Calibri" pitchFamily="34" charset="-120"/>
-              </a:rPr>
-              <a:t>✓</a:t>
-            </a:r>
-            <a:endParaRPr lang="en-US" sz="1400" dirty="0"/>
-          </a:p>
-        </p:txBody>
-      </p:sp>
-      <p:sp>
-        <p:nvSpPr>
-          <p:cNvPr id="19" name="Text 17"/>
-          <p:cNvSpPr/>
-          <p:nvPr/>
-        </p:nvSpPr>
-        <p:spPr>
-          <a:xfrm>
-            <a:off x="7955280" y="2651760"/>
-            <a:ext cx="3733495" cy="320040"/>
-          </a:xfrm>
-          <a:prstGeom prst="rect">
-            <a:avLst/>
-          </a:prstGeom>
-          <a:noFill/>
-          <a:ln/>
-        </p:spPr>
-        <p:txBody>
-          <a:bodyPr wrap="square" rtlCol="0" anchor="ctr"/>
-          <a:lstStyle/>
-          <a:p>
-            <a:pPr indent="0" marL="0">
-              <a:buNone/>
-            </a:pPr>
-            <a:r>
-              <a:rPr lang="en-US" sz="1300" dirty="0">
-                <a:solidFill>
-                  <a:srgbClr val="D8D8D8"/>
-                </a:solidFill>
-                <a:latin typeface="Calibri" pitchFamily="34" charset="0"/>
-                <a:ea typeface="Calibri" pitchFamily="34" charset="-122"/>
-                <a:cs typeface="Calibri" pitchFamily="34" charset="-120"/>
-              </a:rPr>
-              <a:t>Windows Server 2016+</a:t>
-            </a:r>
-            <a:endParaRPr lang="en-US" sz="1300" dirty="0"/>
-          </a:p>
-        </p:txBody>
-      </p:sp>
-      <p:sp>
-        <p:nvSpPr>
-          <p:cNvPr id="20" name="Text 18"/>
-          <p:cNvSpPr/>
-          <p:nvPr/>
-        </p:nvSpPr>
-        <p:spPr>
-          <a:xfrm>
-            <a:off x="7635240" y="3108960"/>
-            <a:ext cx="274320" cy="320040"/>
-          </a:xfrm>
-          <a:prstGeom prst="rect">
-            <a:avLst/>
-          </a:prstGeom>
-          <a:noFill/>
-          <a:ln/>
-        </p:spPr>
-        <p:txBody>
-          <a:bodyPr wrap="square" rtlCol="0" anchor="ctr"/>
-          <a:lstStyle/>
-          <a:p>
-            <a:pPr indent="0" marL="0">
-              <a:buNone/>
-            </a:pPr>
-            <a:r>
-              <a:rPr lang="en-US" sz="1400" b="1" dirty="0">
-                <a:solidFill>
-                  <a:srgbClr val="89C489"/>
-                </a:solidFill>
-                <a:latin typeface="Calibri" pitchFamily="34" charset="0"/>
-                <a:ea typeface="Calibri" pitchFamily="34" charset="-122"/>
-                <a:cs typeface="Calibri" pitchFamily="34" charset="-120"/>
-              </a:rPr>
-              <a:t>✓</a:t>
-            </a:r>
-            <a:endParaRPr lang="en-US" sz="1400" dirty="0"/>
-          </a:p>
-        </p:txBody>
-      </p:sp>
-      <p:sp>
-        <p:nvSpPr>
-          <p:cNvPr id="21" name="Text 19"/>
-          <p:cNvSpPr/>
-          <p:nvPr/>
-        </p:nvSpPr>
-        <p:spPr>
-          <a:xfrm>
-            <a:off x="7955280" y="3108960"/>
-            <a:ext cx="3733495" cy="320040"/>
-          </a:xfrm>
-          <a:prstGeom prst="rect">
-            <a:avLst/>
-          </a:prstGeom>
-          <a:noFill/>
-          <a:ln/>
-        </p:spPr>
-        <p:txBody>
-          <a:bodyPr wrap="square" rtlCol="0" anchor="ctr"/>
-          <a:lstStyle/>
-          <a:p>
-            <a:pPr indent="0" marL="0">
-              <a:buNone/>
-            </a:pPr>
-            <a:r>
-              <a:rPr lang="en-US" sz="1300" dirty="0">
-                <a:solidFill>
-                  <a:srgbClr val="D8D8D8"/>
-                </a:solidFill>
-                <a:latin typeface="Calibri" pitchFamily="34" charset="0"/>
-                <a:ea typeface="Calibri" pitchFamily="34" charset="-122"/>
-                <a:cs typeface="Calibri" pitchFamily="34" charset="-120"/>
-              </a:rPr>
-              <a:t>PowerShell 5.1</a:t>
-            </a:r>
-            <a:endParaRPr lang="en-US" sz="1300" dirty="0"/>
-          </a:p>
-        </p:txBody>
-      </p:sp>
-      <p:sp>
-        <p:nvSpPr>
-          <p:cNvPr id="22" name="Text 20"/>
-          <p:cNvSpPr/>
-          <p:nvPr/>
-        </p:nvSpPr>
-        <p:spPr>
-          <a:xfrm>
-            <a:off x="7635240" y="3566160"/>
-            <a:ext cx="274320" cy="320040"/>
-          </a:xfrm>
-          <a:prstGeom prst="rect">
-            <a:avLst/>
-          </a:prstGeom>
-          <a:noFill/>
-          <a:ln/>
-        </p:spPr>
-        <p:txBody>
-          <a:bodyPr wrap="square" rtlCol="0" anchor="ctr"/>
-          <a:lstStyle/>
-          <a:p>
-            <a:pPr indent="0" marL="0">
-              <a:buNone/>
-            </a:pPr>
-            <a:r>
-              <a:rPr lang="en-US" sz="1400" b="1" dirty="0">
-                <a:solidFill>
-                  <a:srgbClr val="89C489"/>
-                </a:solidFill>
-                <a:latin typeface="Calibri" pitchFamily="34" charset="0"/>
-                <a:ea typeface="Calibri" pitchFamily="34" charset="-122"/>
-                <a:cs typeface="Calibri" pitchFamily="34" charset="-120"/>
-              </a:rPr>
-              <a:t>✓</a:t>
-            </a:r>
-            <a:endParaRPr lang="en-US" sz="1400" dirty="0"/>
-          </a:p>
-        </p:txBody>
-      </p:sp>
-      <p:sp>
-        <p:nvSpPr>
-          <p:cNvPr id="23" name="Text 21"/>
-          <p:cNvSpPr/>
-          <p:nvPr/>
-        </p:nvSpPr>
-        <p:spPr>
-          <a:xfrm>
-            <a:off x="7955280" y="3566160"/>
-            <a:ext cx="3733495" cy="320040"/>
-          </a:xfrm>
-          <a:prstGeom prst="rect">
-            <a:avLst/>
-          </a:prstGeom>
-          <a:noFill/>
-          <a:ln/>
-        </p:spPr>
-        <p:txBody>
-          <a:bodyPr wrap="square" rtlCol="0" anchor="ctr"/>
-          <a:lstStyle/>
-          <a:p>
-            <a:pPr indent="0" marL="0">
-              <a:buNone/>
-            </a:pPr>
-            <a:r>
-              <a:rPr lang="en-US" sz="1300" dirty="0">
-                <a:solidFill>
-                  <a:srgbClr val="D8D8D8"/>
-                </a:solidFill>
-                <a:latin typeface="Calibri" pitchFamily="34" charset="0"/>
-                <a:ea typeface="Calibri" pitchFamily="34" charset="-122"/>
-                <a:cs typeface="Calibri" pitchFamily="34" charset="-120"/>
-              </a:rPr>
-              <a:t>PowerShell 7+</a:t>
-            </a:r>
-            <a:endParaRPr lang="en-US" sz="1300" dirty="0"/>
-          </a:p>
-        </p:txBody>
-      </p:sp>
-      <p:sp>
-        <p:nvSpPr>
-          <p:cNvPr id="24" name="Text 22"/>
-          <p:cNvSpPr/>
-          <p:nvPr/>
-        </p:nvSpPr>
-        <p:spPr>
-          <a:xfrm>
-            <a:off x="7635240" y="4023360"/>
-            <a:ext cx="274320" cy="320040"/>
-          </a:xfrm>
-          <a:prstGeom prst="rect">
-            <a:avLst/>
-          </a:prstGeom>
-          <a:noFill/>
-          <a:ln/>
-        </p:spPr>
-        <p:txBody>
-          <a:bodyPr wrap="square" rtlCol="0" anchor="ctr"/>
-          <a:lstStyle/>
-          <a:p>
-            <a:pPr indent="0" marL="0">
-              <a:buNone/>
-            </a:pPr>
-            <a:r>
-              <a:rPr lang="en-US" sz="1400" b="1" dirty="0">
-                <a:solidFill>
-                  <a:srgbClr val="89C489"/>
-                </a:solidFill>
-                <a:latin typeface="Calibri" pitchFamily="34" charset="0"/>
-                <a:ea typeface="Calibri" pitchFamily="34" charset="-122"/>
-                <a:cs typeface="Calibri" pitchFamily="34" charset="-120"/>
-              </a:rPr>
-              <a:t>✓</a:t>
-            </a:r>
-            <a:endParaRPr lang="en-US" sz="1400" dirty="0"/>
-          </a:p>
-        </p:txBody>
-      </p:sp>
-      <p:sp>
-        <p:nvSpPr>
-          <p:cNvPr id="25" name="Text 23"/>
-          <p:cNvSpPr/>
-          <p:nvPr/>
-        </p:nvSpPr>
-        <p:spPr>
-          <a:xfrm>
-            <a:off x="7955280" y="4023360"/>
-            <a:ext cx="3733495" cy="320040"/>
-          </a:xfrm>
-          <a:prstGeom prst="rect">
-            <a:avLst/>
-          </a:prstGeom>
-          <a:noFill/>
-          <a:ln/>
-        </p:spPr>
-        <p:txBody>
-          <a:bodyPr wrap="square" rtlCol="0" anchor="ctr"/>
-          <a:lstStyle/>
-          <a:p>
-            <a:pPr indent="0" marL="0">
-              <a:buNone/>
-            </a:pPr>
-            <a:r>
-              <a:rPr lang="en-US" sz="1300" dirty="0">
-                <a:solidFill>
-                  <a:srgbClr val="D8D8D8"/>
-                </a:solidFill>
-                <a:latin typeface="Calibri" pitchFamily="34" charset="0"/>
-                <a:ea typeface="Calibri" pitchFamily="34" charset="-122"/>
-                <a:cs typeface="Calibri" pitchFamily="34" charset="-120"/>
-              </a:rPr>
-              <a:t>Windows Terminal</a:t>
-            </a:r>
-            <a:endParaRPr lang="en-US" sz="1300" dirty="0"/>
-          </a:p>
-        </p:txBody>
-      </p:sp>
-      <p:sp>
-        <p:nvSpPr>
-          <p:cNvPr id="26" name="Text 24"/>
-          <p:cNvSpPr/>
-          <p:nvPr/>
-        </p:nvSpPr>
-        <p:spPr>
-          <a:xfrm>
-            <a:off x="7635240" y="4480560"/>
-            <a:ext cx="274320" cy="320040"/>
-          </a:xfrm>
-          <a:prstGeom prst="rect">
-            <a:avLst/>
-          </a:prstGeom>
-          <a:noFill/>
-          <a:ln/>
-        </p:spPr>
-        <p:txBody>
-          <a:bodyPr wrap="square" rtlCol="0" anchor="ctr"/>
-          <a:lstStyle/>
-          <a:p>
-            <a:pPr indent="0" marL="0">
-              <a:buNone/>
-            </a:pPr>
-            <a:r>
-              <a:rPr lang="en-US" sz="1400" b="1" dirty="0">
-                <a:solidFill>
-                  <a:srgbClr val="89C489"/>
-                </a:solidFill>
-                <a:latin typeface="Calibri" pitchFamily="34" charset="0"/>
-                <a:ea typeface="Calibri" pitchFamily="34" charset="-122"/>
-                <a:cs typeface="Calibri" pitchFamily="34" charset="-120"/>
-              </a:rPr>
-              <a:t>✓</a:t>
-            </a:r>
-            <a:endParaRPr lang="en-US" sz="1400" dirty="0"/>
-          </a:p>
-        </p:txBody>
-      </p:sp>
-      <p:sp>
-        <p:nvSpPr>
-          <p:cNvPr id="27" name="Text 25"/>
-          <p:cNvSpPr/>
-          <p:nvPr/>
-        </p:nvSpPr>
-        <p:spPr>
-          <a:xfrm>
-            <a:off x="7955280" y="4480560"/>
-            <a:ext cx="3733495" cy="320040"/>
-          </a:xfrm>
-          <a:prstGeom prst="rect">
-            <a:avLst/>
-          </a:prstGeom>
-          <a:noFill/>
-          <a:ln/>
-        </p:spPr>
-        <p:txBody>
-          <a:bodyPr wrap="square" rtlCol="0" anchor="ctr"/>
-          <a:lstStyle/>
-          <a:p>
-            <a:pPr indent="0" marL="0">
-              <a:buNone/>
-            </a:pPr>
-            <a:r>
-              <a:rPr lang="en-US" sz="1300" dirty="0">
-                <a:solidFill>
-                  <a:srgbClr val="D8D8D8"/>
-                </a:solidFill>
-                <a:latin typeface="Calibri" pitchFamily="34" charset="0"/>
-                <a:ea typeface="Calibri" pitchFamily="34" charset="-122"/>
-                <a:cs typeface="Calibri" pitchFamily="34" charset="-120"/>
-              </a:rPr>
-              <a:t>conhost.exe (legacy)</a:t>
-            </a:r>
-            <a:endParaRPr lang="en-US" sz="1300" dirty="0"/>
-          </a:p>
-        </p:txBody>
-      </p:sp>
-      <p:sp>
-        <p:nvSpPr>
-          <p:cNvPr id="28" name="Text 26"/>
-          <p:cNvSpPr/>
-          <p:nvPr/>
-        </p:nvSpPr>
-        <p:spPr>
-          <a:xfrm>
-            <a:off x="7635240" y="4937760"/>
-            <a:ext cx="274320" cy="320040"/>
-          </a:xfrm>
-          <a:prstGeom prst="rect">
-            <a:avLst/>
-          </a:prstGeom>
-          <a:noFill/>
-          <a:ln/>
-        </p:spPr>
-        <p:txBody>
-          <a:bodyPr wrap="square" rtlCol="0" anchor="ctr"/>
-          <a:lstStyle/>
-          <a:p>
-            <a:pPr indent="0" marL="0">
-              <a:buNone/>
-            </a:pPr>
-            <a:r>
-              <a:rPr lang="en-US" sz="1400" b="1" dirty="0">
-                <a:solidFill>
-                  <a:srgbClr val="89C489"/>
-                </a:solidFill>
-                <a:latin typeface="Calibri" pitchFamily="34" charset="0"/>
-                <a:ea typeface="Calibri" pitchFamily="34" charset="-122"/>
-                <a:cs typeface="Calibri" pitchFamily="34" charset="-120"/>
-              </a:rPr>
-              <a:t>✓</a:t>
-            </a:r>
-            <a:endParaRPr lang="en-US" sz="1400" dirty="0"/>
-          </a:p>
-        </p:txBody>
-      </p:sp>
-      <p:sp>
-        <p:nvSpPr>
-          <p:cNvPr id="29" name="Text 27"/>
-          <p:cNvSpPr/>
-          <p:nvPr/>
-        </p:nvSpPr>
-        <p:spPr>
-          <a:xfrm>
-            <a:off x="7955280" y="4937760"/>
-            <a:ext cx="3733495" cy="320040"/>
-          </a:xfrm>
-          <a:prstGeom prst="rect">
-            <a:avLst/>
-          </a:prstGeom>
-          <a:noFill/>
-          <a:ln/>
-        </p:spPr>
-        <p:txBody>
-          <a:bodyPr wrap="square" rtlCol="0" anchor="ctr"/>
-          <a:lstStyle/>
-          <a:p>
-            <a:pPr indent="0" marL="0">
-              <a:buNone/>
-            </a:pPr>
-            <a:r>
-              <a:rPr lang="en-US" sz="1300" dirty="0">
-                <a:solidFill>
-                  <a:srgbClr val="D8D8D8"/>
-                </a:solidFill>
-                <a:latin typeface="Calibri" pitchFamily="34" charset="0"/>
-                <a:ea typeface="Calibri" pitchFamily="34" charset="-122"/>
-                <a:cs typeface="Calibri" pitchFamily="34" charset="-120"/>
-              </a:rPr>
-              <a:t>VS Code terminal</a:t>
-            </a:r>
-            <a:endParaRPr lang="en-US" sz="1300" dirty="0"/>
-          </a:p>
-        </p:txBody>
-      </p:sp>
-      <p:sp>
-        <p:nvSpPr>
-          <p:cNvPr id="30" name="Text 28"/>
-          <p:cNvSpPr/>
-          <p:nvPr/>
-        </p:nvSpPr>
-        <p:spPr>
-          <a:xfrm>
-            <a:off x="7635240" y="5394960"/>
-            <a:ext cx="274320" cy="320040"/>
-          </a:xfrm>
-          <a:prstGeom prst="rect">
-            <a:avLst/>
-          </a:prstGeom>
-          <a:noFill/>
-          <a:ln/>
-        </p:spPr>
-        <p:txBody>
-          <a:bodyPr wrap="square" rtlCol="0" anchor="ctr"/>
-          <a:lstStyle/>
-          <a:p>
-            <a:pPr indent="0" marL="0">
-              <a:buNone/>
-            </a:pPr>
-            <a:r>
-              <a:rPr lang="en-US" sz="1400" b="1" dirty="0">
-                <a:solidFill>
-                  <a:srgbClr val="89C489"/>
-                </a:solidFill>
-                <a:latin typeface="Calibri" pitchFamily="34" charset="0"/>
-                <a:ea typeface="Calibri" pitchFamily="34" charset="-122"/>
-                <a:cs typeface="Calibri" pitchFamily="34" charset="-120"/>
-              </a:rPr>
-              <a:t>✓</a:t>
-            </a:r>
-            <a:endParaRPr lang="en-US" sz="1400" dirty="0"/>
-          </a:p>
-        </p:txBody>
-      </p:sp>
-      <p:sp>
-        <p:nvSpPr>
-          <p:cNvPr id="31" name="Text 29"/>
-          <p:cNvSpPr/>
-          <p:nvPr/>
-        </p:nvSpPr>
-        <p:spPr>
-          <a:xfrm>
-            <a:off x="7955280" y="5394960"/>
-            <a:ext cx="3733495" cy="320040"/>
-          </a:xfrm>
-          <a:prstGeom prst="rect">
-            <a:avLst/>
-          </a:prstGeom>
-          <a:noFill/>
-          <a:ln/>
-        </p:spPr>
-        <p:txBody>
-          <a:bodyPr wrap="square" rtlCol="0" anchor="ctr"/>
-          <a:lstStyle/>
-          <a:p>
-            <a:pPr indent="0" marL="0">
-              <a:buNone/>
-            </a:pPr>
-            <a:r>
-              <a:rPr lang="en-US" sz="1300" dirty="0">
-                <a:solidFill>
-                  <a:srgbClr val="D8D8D8"/>
-                </a:solidFill>
-                <a:latin typeface="Calibri" pitchFamily="34" charset="0"/>
-                <a:ea typeface="Calibri" pitchFamily="34" charset="-122"/>
-                <a:cs typeface="Calibri" pitchFamily="34" charset="-120"/>
-              </a:rPr>
-              <a:t>ConEmu</a:t>
-            </a:r>
-            <a:endParaRPr lang="en-US" sz="1300" dirty="0"/>
-          </a:p>
-        </p:txBody>
-      </p:sp>
-      <p:sp>
-        <p:nvSpPr>
-          <p:cNvPr id="32" name="Text 30"/>
-          <p:cNvSpPr/>
-          <p:nvPr/>
-        </p:nvSpPr>
-        <p:spPr>
-          <a:xfrm>
-            <a:off x="11002975" y="6492240"/>
-            <a:ext cx="914400" cy="228600"/>
-          </a:xfrm>
-          <a:prstGeom prst="rect">
-            <a:avLst/>
-          </a:prstGeom>
-          <a:noFill/>
-          <a:ln/>
-        </p:spPr>
-        <p:txBody>
-          <a:bodyPr wrap="square" rtlCol="0" anchor="ctr"/>
-          <a:lstStyle/>
-          <a:p>
-            <a:pPr algn="r" indent="0" marL="0">
-              <a:buNone/>
-            </a:pPr>
-            <a:r>
-              <a:rPr lang="en-US" sz="900" dirty="0">
-                <a:solidFill>
-                  <a:srgbClr val="5A5A62"/>
                 </a:solidFill>
                 <a:latin typeface="Cascadia Mono" pitchFamily="34" charset="0"/>
                 <a:ea typeface="Cascadia Mono" pitchFamily="34" charset="-122"/>
                 <a:cs typeface="Cascadia Mono" pitchFamily="34" charset="-120"/>
               </a:rPr>
-              <a:t>13 / 14</a:t>
+              <a:t>launch with -IocFile incident.csv</a:t>
+            </a:r>
+            <a:endParaRPr lang="en-US" sz="1100" dirty="0"/>
+          </a:p>
+        </p:txBody>
+      </p:sp>
+      <p:sp>
+        <p:nvSpPr>
+          <p:cNvPr id="24" name="Text 22"/>
+          <p:cNvSpPr/>
+          <p:nvPr/>
+        </p:nvSpPr>
+        <p:spPr>
+          <a:xfrm>
+            <a:off x="4627778" y="3383280"/>
+            <a:ext cx="594360" cy="320040"/>
+          </a:xfrm>
+          <a:prstGeom prst="rect">
+            <a:avLst/>
+          </a:prstGeom>
+          <a:noFill/>
+          <a:ln/>
+        </p:spPr>
+        <p:txBody>
+          <a:bodyPr wrap="square" rtlCol="0" anchor="t"/>
+          <a:lstStyle/>
+          <a:p>
+            <a:pPr indent="0" marL="0">
+              <a:buNone/>
+            </a:pPr>
+            <a:r>
+              <a:rPr lang="en-US" sz="1200" b="1" dirty="0">
+                <a:solidFill>
+                  <a:srgbClr val="D97757"/>
+                </a:solidFill>
+                <a:latin typeface="Cascadia Mono" pitchFamily="34" charset="0"/>
+                <a:ea typeface="Cascadia Mono" pitchFamily="34" charset="-122"/>
+                <a:cs typeface="Cascadia Mono" pitchFamily="34" charset="-120"/>
+              </a:rPr>
+              <a:t>02</a:t>
+            </a:r>
+            <a:endParaRPr lang="en-US" sz="1200" dirty="0"/>
+          </a:p>
+        </p:txBody>
+      </p:sp>
+      <p:sp>
+        <p:nvSpPr>
+          <p:cNvPr id="25" name="Text 23"/>
+          <p:cNvSpPr/>
+          <p:nvPr/>
+        </p:nvSpPr>
+        <p:spPr>
+          <a:xfrm>
+            <a:off x="5222138" y="3383280"/>
+            <a:ext cx="2341778" cy="502920"/>
+          </a:xfrm>
+          <a:prstGeom prst="rect">
+            <a:avLst/>
+          </a:prstGeom>
+          <a:noFill/>
+          <a:ln/>
+        </p:spPr>
+        <p:txBody>
+          <a:bodyPr wrap="square" rtlCol="0" anchor="t"/>
+          <a:lstStyle/>
+          <a:p>
+            <a:pPr indent="0" marL="0">
+              <a:buNone/>
+            </a:pPr>
+            <a:r>
+              <a:rPr lang="en-US" sz="1100" dirty="0">
+                <a:solidFill>
+                  <a:srgbClr val="D8D8D8"/>
+                </a:solidFill>
+                <a:latin typeface="Cascadia Mono" pitchFamily="34" charset="0"/>
+                <a:ea typeface="Cascadia Mono" pitchFamily="34" charset="-122"/>
+                <a:cs typeface="Cascadia Mono" pitchFamily="34" charset="-120"/>
+              </a:rPr>
+              <a:t>/files → match procs / TCP / DNS</a:t>
+            </a:r>
+            <a:endParaRPr lang="en-US" sz="1100" dirty="0"/>
+          </a:p>
+        </p:txBody>
+      </p:sp>
+      <p:sp>
+        <p:nvSpPr>
+          <p:cNvPr id="26" name="Text 24"/>
+          <p:cNvSpPr/>
+          <p:nvPr/>
+        </p:nvSpPr>
+        <p:spPr>
+          <a:xfrm>
+            <a:off x="4627778" y="3931920"/>
+            <a:ext cx="594360" cy="320040"/>
+          </a:xfrm>
+          <a:prstGeom prst="rect">
+            <a:avLst/>
+          </a:prstGeom>
+          <a:noFill/>
+          <a:ln/>
+        </p:spPr>
+        <p:txBody>
+          <a:bodyPr wrap="square" rtlCol="0" anchor="t"/>
+          <a:lstStyle/>
+          <a:p>
+            <a:pPr indent="0" marL="0">
+              <a:buNone/>
+            </a:pPr>
+            <a:r>
+              <a:rPr lang="en-US" sz="1200" b="1" dirty="0">
+                <a:solidFill>
+                  <a:srgbClr val="D97757"/>
+                </a:solidFill>
+                <a:latin typeface="Cascadia Mono" pitchFamily="34" charset="0"/>
+                <a:ea typeface="Cascadia Mono" pitchFamily="34" charset="-122"/>
+                <a:cs typeface="Cascadia Mono" pitchFamily="34" charset="-120"/>
+              </a:rPr>
+              <a:t>03</a:t>
+            </a:r>
+            <a:endParaRPr lang="en-US" sz="1200" dirty="0"/>
+          </a:p>
+        </p:txBody>
+      </p:sp>
+      <p:sp>
+        <p:nvSpPr>
+          <p:cNvPr id="27" name="Text 25"/>
+          <p:cNvSpPr/>
+          <p:nvPr/>
+        </p:nvSpPr>
+        <p:spPr>
+          <a:xfrm>
+            <a:off x="5222138" y="3931920"/>
+            <a:ext cx="2341778" cy="502920"/>
+          </a:xfrm>
+          <a:prstGeom prst="rect">
+            <a:avLst/>
+          </a:prstGeom>
+          <a:noFill/>
+          <a:ln/>
+        </p:spPr>
+        <p:txBody>
+          <a:bodyPr wrap="square" rtlCol="0" anchor="t"/>
+          <a:lstStyle/>
+          <a:p>
+            <a:pPr indent="0" marL="0">
+              <a:buNone/>
+            </a:pPr>
+            <a:r>
+              <a:rPr lang="en-US" sz="1100" dirty="0">
+                <a:solidFill>
+                  <a:srgbClr val="D8D8D8"/>
+                </a:solidFill>
+                <a:latin typeface="Cascadia Mono" pitchFamily="34" charset="0"/>
+                <a:ea typeface="Cascadia Mono" pitchFamily="34" charset="-122"/>
+                <a:cs typeface="Cascadia Mono" pitchFamily="34" charset="-120"/>
+              </a:rPr>
+              <a:t>/files → hash %TEMP% &amp; %APPDATA%</a:t>
+            </a:r>
+            <a:endParaRPr lang="en-US" sz="1100" dirty="0"/>
+          </a:p>
+        </p:txBody>
+      </p:sp>
+      <p:sp>
+        <p:nvSpPr>
+          <p:cNvPr id="28" name="Text 26"/>
+          <p:cNvSpPr/>
+          <p:nvPr/>
+        </p:nvSpPr>
+        <p:spPr>
+          <a:xfrm>
+            <a:off x="4627778" y="4480560"/>
+            <a:ext cx="594360" cy="320040"/>
+          </a:xfrm>
+          <a:prstGeom prst="rect">
+            <a:avLst/>
+          </a:prstGeom>
+          <a:noFill/>
+          <a:ln/>
+        </p:spPr>
+        <p:txBody>
+          <a:bodyPr wrap="square" rtlCol="0" anchor="t"/>
+          <a:lstStyle/>
+          <a:p>
+            <a:pPr indent="0" marL="0">
+              <a:buNone/>
+            </a:pPr>
+            <a:r>
+              <a:rPr lang="en-US" sz="1200" b="1" dirty="0">
+                <a:solidFill>
+                  <a:srgbClr val="D97757"/>
+                </a:solidFill>
+                <a:latin typeface="Cascadia Mono" pitchFamily="34" charset="0"/>
+                <a:ea typeface="Cascadia Mono" pitchFamily="34" charset="-122"/>
+                <a:cs typeface="Cascadia Mono" pitchFamily="34" charset="-120"/>
+              </a:rPr>
+              <a:t>04</a:t>
+            </a:r>
+            <a:endParaRPr lang="en-US" sz="1200" dirty="0"/>
+          </a:p>
+        </p:txBody>
+      </p:sp>
+      <p:sp>
+        <p:nvSpPr>
+          <p:cNvPr id="29" name="Text 27"/>
+          <p:cNvSpPr/>
+          <p:nvPr/>
+        </p:nvSpPr>
+        <p:spPr>
+          <a:xfrm>
+            <a:off x="5222138" y="4480560"/>
+            <a:ext cx="2341778" cy="502920"/>
+          </a:xfrm>
+          <a:prstGeom prst="rect">
+            <a:avLst/>
+          </a:prstGeom>
+          <a:noFill/>
+          <a:ln/>
+        </p:spPr>
+        <p:txBody>
+          <a:bodyPr wrap="square" rtlCol="0" anchor="t"/>
+          <a:lstStyle/>
+          <a:p>
+            <a:pPr indent="0" marL="0">
+              <a:buNone/>
+            </a:pPr>
+            <a:r>
+              <a:rPr lang="en-US" sz="1100" dirty="0">
+                <a:solidFill>
+                  <a:srgbClr val="D8D8D8"/>
+                </a:solidFill>
+                <a:latin typeface="Cascadia Mono" pitchFamily="34" charset="0"/>
+                <a:ea typeface="Cascadia Mono" pitchFamily="34" charset="-122"/>
+                <a:cs typeface="Cascadia Mono" pitchFamily="34" charset="-120"/>
+              </a:rPr>
+              <a:t>hash matches auto-flag CRITICAL</a:t>
+            </a:r>
+            <a:endParaRPr lang="en-US" sz="1100" dirty="0"/>
+          </a:p>
+        </p:txBody>
+      </p:sp>
+      <p:sp>
+        <p:nvSpPr>
+          <p:cNvPr id="30" name="Text 28"/>
+          <p:cNvSpPr/>
+          <p:nvPr/>
+        </p:nvSpPr>
+        <p:spPr>
+          <a:xfrm>
+            <a:off x="4627778" y="5029200"/>
+            <a:ext cx="594360" cy="320040"/>
+          </a:xfrm>
+          <a:prstGeom prst="rect">
+            <a:avLst/>
+          </a:prstGeom>
+          <a:noFill/>
+          <a:ln/>
+        </p:spPr>
+        <p:txBody>
+          <a:bodyPr wrap="square" rtlCol="0" anchor="t"/>
+          <a:lstStyle/>
+          <a:p>
+            <a:pPr indent="0" marL="0">
+              <a:buNone/>
+            </a:pPr>
+            <a:r>
+              <a:rPr lang="en-US" sz="1200" b="1" dirty="0">
+                <a:solidFill>
+                  <a:srgbClr val="D97757"/>
+                </a:solidFill>
+                <a:latin typeface="Cascadia Mono" pitchFamily="34" charset="0"/>
+                <a:ea typeface="Cascadia Mono" pitchFamily="34" charset="-122"/>
+                <a:cs typeface="Cascadia Mono" pitchFamily="34" charset="-120"/>
+              </a:rPr>
+              <a:t>05</a:t>
+            </a:r>
+            <a:endParaRPr lang="en-US" sz="1200" dirty="0"/>
+          </a:p>
+        </p:txBody>
+      </p:sp>
+      <p:sp>
+        <p:nvSpPr>
+          <p:cNvPr id="31" name="Text 29"/>
+          <p:cNvSpPr/>
+          <p:nvPr/>
+        </p:nvSpPr>
+        <p:spPr>
+          <a:xfrm>
+            <a:off x="5222138" y="5029200"/>
+            <a:ext cx="2341778" cy="502920"/>
+          </a:xfrm>
+          <a:prstGeom prst="rect">
+            <a:avLst/>
+          </a:prstGeom>
+          <a:noFill/>
+          <a:ln/>
+        </p:spPr>
+        <p:txBody>
+          <a:bodyPr wrap="square" rtlCol="0" anchor="t"/>
+          <a:lstStyle/>
+          <a:p>
+            <a:pPr indent="0" marL="0">
+              <a:buNone/>
+            </a:pPr>
+            <a:r>
+              <a:rPr lang="en-US" sz="1100" dirty="0">
+                <a:solidFill>
+                  <a:srgbClr val="D8D8D8"/>
+                </a:solidFill>
+                <a:latin typeface="Cascadia Mono" pitchFamily="34" charset="0"/>
+                <a:ea typeface="Cascadia Mono" pitchFamily="34" charset="-122"/>
+                <a:cs typeface="Cascadia Mono" pitchFamily="34" charset="-120"/>
+              </a:rPr>
+              <a:t>/findings · /report</a:t>
+            </a:r>
+            <a:endParaRPr lang="en-US" sz="1100" dirty="0"/>
+          </a:p>
+        </p:txBody>
+      </p:sp>
+      <p:sp>
+        <p:nvSpPr>
+          <p:cNvPr id="32" name="Shape 30"/>
+          <p:cNvSpPr/>
+          <p:nvPr/>
+        </p:nvSpPr>
+        <p:spPr>
+          <a:xfrm>
+            <a:off x="8203997" y="1645920"/>
+            <a:ext cx="3484778" cy="4206240"/>
+          </a:xfrm>
+          <a:prstGeom prst="roundRect">
+            <a:avLst>
+              <a:gd name="adj" fmla="val 2624"/>
+            </a:avLst>
+          </a:prstGeom>
+          <a:solidFill>
+            <a:srgbClr val="1D1D22"/>
+          </a:solidFill>
+          <a:ln w="12700">
+            <a:solidFill>
+              <a:srgbClr val="2E2E34"/>
+            </a:solidFill>
+            <a:prstDash val="solid"/>
+          </a:ln>
+        </p:spPr>
+      </p:sp>
+      <p:sp>
+        <p:nvSpPr>
+          <p:cNvPr id="33" name="Text 31"/>
+          <p:cNvSpPr/>
+          <p:nvPr/>
+        </p:nvSpPr>
+        <p:spPr>
+          <a:xfrm>
+            <a:off x="8478317" y="1874520"/>
+            <a:ext cx="2936138" cy="411480"/>
+          </a:xfrm>
+          <a:prstGeom prst="rect">
+            <a:avLst/>
+          </a:prstGeom>
+          <a:noFill/>
+          <a:ln/>
+        </p:spPr>
+        <p:txBody>
+          <a:bodyPr wrap="square" rtlCol="0" anchor="ctr"/>
+          <a:lstStyle/>
+          <a:p>
+            <a:pPr indent="0" marL="0">
+              <a:buNone/>
+            </a:pPr>
+            <a:r>
+              <a:rPr lang="en-US" sz="1800" b="1" dirty="0">
+                <a:solidFill>
+                  <a:srgbClr val="EB987C"/>
+                </a:solidFill>
+                <a:latin typeface="Calibri" pitchFamily="34" charset="0"/>
+                <a:ea typeface="Calibri" pitchFamily="34" charset="-122"/>
+                <a:cs typeface="Calibri" pitchFamily="34" charset="-120"/>
+              </a:rPr>
+              <a:t>Auth anomaly</a:t>
+            </a:r>
+            <a:endParaRPr lang="en-US" sz="1800" dirty="0"/>
+          </a:p>
+        </p:txBody>
+      </p:sp>
+      <p:sp>
+        <p:nvSpPr>
+          <p:cNvPr id="34" name="Text 32"/>
+          <p:cNvSpPr/>
+          <p:nvPr/>
+        </p:nvSpPr>
+        <p:spPr>
+          <a:xfrm>
+            <a:off x="8478317" y="2286000"/>
+            <a:ext cx="2936138" cy="320040"/>
+          </a:xfrm>
+          <a:prstGeom prst="rect">
+            <a:avLst/>
+          </a:prstGeom>
+          <a:noFill/>
+          <a:ln/>
+        </p:spPr>
+        <p:txBody>
+          <a:bodyPr wrap="square" rtlCol="0" anchor="ctr"/>
+          <a:lstStyle/>
+          <a:p>
+            <a:pPr indent="0" marL="0">
+              <a:buNone/>
+            </a:pPr>
+            <a:r>
+              <a:rPr lang="en-US" sz="1200" i="1" dirty="0">
+                <a:solidFill>
+                  <a:srgbClr val="8E8E94"/>
+                </a:solidFill>
+                <a:latin typeface="Calibri" pitchFamily="34" charset="0"/>
+                <a:ea typeface="Calibri" pitchFamily="34" charset="-122"/>
+                <a:cs typeface="Calibri" pitchFamily="34" charset="-120"/>
+              </a:rPr>
+              <a:t>login behaviour investigation</a:t>
+            </a:r>
+            <a:endParaRPr lang="en-US" sz="1200" dirty="0"/>
+          </a:p>
+        </p:txBody>
+      </p:sp>
+      <p:sp>
+        <p:nvSpPr>
+          <p:cNvPr id="35" name="Shape 33"/>
+          <p:cNvSpPr/>
+          <p:nvPr/>
+        </p:nvSpPr>
+        <p:spPr>
+          <a:xfrm>
+            <a:off x="8478317" y="2651760"/>
+            <a:ext cx="2936138" cy="0"/>
+          </a:xfrm>
+          <a:prstGeom prst="line">
+            <a:avLst/>
+          </a:prstGeom>
+          <a:noFill/>
+          <a:ln w="9525">
+            <a:solidFill>
+              <a:srgbClr val="2E2E34"/>
+            </a:solidFill>
+            <a:prstDash val="solid"/>
+          </a:ln>
+        </p:spPr>
+      </p:sp>
+      <p:sp>
+        <p:nvSpPr>
+          <p:cNvPr id="36" name="Text 34"/>
+          <p:cNvSpPr/>
+          <p:nvPr/>
+        </p:nvSpPr>
+        <p:spPr>
+          <a:xfrm>
+            <a:off x="8478317" y="2834640"/>
+            <a:ext cx="594360" cy="320040"/>
+          </a:xfrm>
+          <a:prstGeom prst="rect">
+            <a:avLst/>
+          </a:prstGeom>
+          <a:noFill/>
+          <a:ln/>
+        </p:spPr>
+        <p:txBody>
+          <a:bodyPr wrap="square" rtlCol="0" anchor="t"/>
+          <a:lstStyle/>
+          <a:p>
+            <a:pPr indent="0" marL="0">
+              <a:buNone/>
+            </a:pPr>
+            <a:r>
+              <a:rPr lang="en-US" sz="1200" b="1" dirty="0">
+                <a:solidFill>
+                  <a:srgbClr val="D97757"/>
+                </a:solidFill>
+                <a:latin typeface="Cascadia Mono" pitchFamily="34" charset="0"/>
+                <a:ea typeface="Cascadia Mono" pitchFamily="34" charset="-122"/>
+                <a:cs typeface="Cascadia Mono" pitchFamily="34" charset="-120"/>
+              </a:rPr>
+              <a:t>01</a:t>
+            </a:r>
+            <a:endParaRPr lang="en-US" sz="1200" dirty="0"/>
+          </a:p>
+        </p:txBody>
+      </p:sp>
+      <p:sp>
+        <p:nvSpPr>
+          <p:cNvPr id="37" name="Text 35"/>
+          <p:cNvSpPr/>
+          <p:nvPr/>
+        </p:nvSpPr>
+        <p:spPr>
+          <a:xfrm>
+            <a:off x="9072677" y="2834640"/>
+            <a:ext cx="2341778" cy="502920"/>
+          </a:xfrm>
+          <a:prstGeom prst="rect">
+            <a:avLst/>
+          </a:prstGeom>
+          <a:noFill/>
+          <a:ln/>
+        </p:spPr>
+        <p:txBody>
+          <a:bodyPr wrap="square" rtlCol="0" anchor="t"/>
+          <a:lstStyle/>
+          <a:p>
+            <a:pPr indent="0" marL="0">
+              <a:buNone/>
+            </a:pPr>
+            <a:r>
+              <a:rPr lang="en-US" sz="1100" dirty="0">
+                <a:solidFill>
+                  <a:srgbClr val="D8D8D8"/>
+                </a:solidFill>
+                <a:latin typeface="Cascadia Mono" pitchFamily="34" charset="0"/>
+                <a:ea typeface="Cascadia Mono" pitchFamily="34" charset="-122"/>
+                <a:cs typeface="Cascadia Mono" pitchFamily="34" charset="-120"/>
+              </a:rPr>
+              <a:t>/auth → 4625 failed logons</a:t>
+            </a:r>
+            <a:endParaRPr lang="en-US" sz="1100" dirty="0"/>
+          </a:p>
+        </p:txBody>
+      </p:sp>
+      <p:sp>
+        <p:nvSpPr>
+          <p:cNvPr id="38" name="Text 36"/>
+          <p:cNvSpPr/>
+          <p:nvPr/>
+        </p:nvSpPr>
+        <p:spPr>
+          <a:xfrm>
+            <a:off x="8478317" y="3383280"/>
+            <a:ext cx="594360" cy="320040"/>
+          </a:xfrm>
+          <a:prstGeom prst="rect">
+            <a:avLst/>
+          </a:prstGeom>
+          <a:noFill/>
+          <a:ln/>
+        </p:spPr>
+        <p:txBody>
+          <a:bodyPr wrap="square" rtlCol="0" anchor="t"/>
+          <a:lstStyle/>
+          <a:p>
+            <a:pPr indent="0" marL="0">
+              <a:buNone/>
+            </a:pPr>
+            <a:r>
+              <a:rPr lang="en-US" sz="1200" b="1" dirty="0">
+                <a:solidFill>
+                  <a:srgbClr val="D97757"/>
+                </a:solidFill>
+                <a:latin typeface="Cascadia Mono" pitchFamily="34" charset="0"/>
+                <a:ea typeface="Cascadia Mono" pitchFamily="34" charset="-122"/>
+                <a:cs typeface="Cascadia Mono" pitchFamily="34" charset="-120"/>
+              </a:rPr>
+              <a:t>02</a:t>
+            </a:r>
+            <a:endParaRPr lang="en-US" sz="1200" dirty="0"/>
+          </a:p>
+        </p:txBody>
+      </p:sp>
+      <p:sp>
+        <p:nvSpPr>
+          <p:cNvPr id="39" name="Text 37"/>
+          <p:cNvSpPr/>
+          <p:nvPr/>
+        </p:nvSpPr>
+        <p:spPr>
+          <a:xfrm>
+            <a:off x="9072677" y="3383280"/>
+            <a:ext cx="2341778" cy="502920"/>
+          </a:xfrm>
+          <a:prstGeom prst="rect">
+            <a:avLst/>
+          </a:prstGeom>
+          <a:noFill/>
+          <a:ln/>
+        </p:spPr>
+        <p:txBody>
+          <a:bodyPr wrap="square" rtlCol="0" anchor="t"/>
+          <a:lstStyle/>
+          <a:p>
+            <a:pPr indent="0" marL="0">
+              <a:buNone/>
+            </a:pPr>
+            <a:r>
+              <a:rPr lang="en-US" sz="1100" dirty="0">
+                <a:solidFill>
+                  <a:srgbClr val="D8D8D8"/>
+                </a:solidFill>
+                <a:latin typeface="Cascadia Mono" pitchFamily="34" charset="0"/>
+                <a:ea typeface="Cascadia Mono" pitchFamily="34" charset="-122"/>
+                <a:cs typeface="Cascadia Mono" pitchFamily="34" charset="-120"/>
+              </a:rPr>
+              <a:t>/auth → 4624 by LogonType</a:t>
+            </a:r>
+            <a:endParaRPr lang="en-US" sz="1100" dirty="0"/>
+          </a:p>
+        </p:txBody>
+      </p:sp>
+      <p:sp>
+        <p:nvSpPr>
+          <p:cNvPr id="40" name="Text 38"/>
+          <p:cNvSpPr/>
+          <p:nvPr/>
+        </p:nvSpPr>
+        <p:spPr>
+          <a:xfrm>
+            <a:off x="8478317" y="3931920"/>
+            <a:ext cx="594360" cy="320040"/>
+          </a:xfrm>
+          <a:prstGeom prst="rect">
+            <a:avLst/>
+          </a:prstGeom>
+          <a:noFill/>
+          <a:ln/>
+        </p:spPr>
+        <p:txBody>
+          <a:bodyPr wrap="square" rtlCol="0" anchor="t"/>
+          <a:lstStyle/>
+          <a:p>
+            <a:pPr indent="0" marL="0">
+              <a:buNone/>
+            </a:pPr>
+            <a:r>
+              <a:rPr lang="en-US" sz="1200" b="1" dirty="0">
+                <a:solidFill>
+                  <a:srgbClr val="D97757"/>
+                </a:solidFill>
+                <a:latin typeface="Cascadia Mono" pitchFamily="34" charset="0"/>
+                <a:ea typeface="Cascadia Mono" pitchFamily="34" charset="-122"/>
+                <a:cs typeface="Cascadia Mono" pitchFamily="34" charset="-120"/>
+              </a:rPr>
+              <a:t>03</a:t>
+            </a:r>
+            <a:endParaRPr lang="en-US" sz="1200" dirty="0"/>
+          </a:p>
+        </p:txBody>
+      </p:sp>
+      <p:sp>
+        <p:nvSpPr>
+          <p:cNvPr id="41" name="Text 39"/>
+          <p:cNvSpPr/>
+          <p:nvPr/>
+        </p:nvSpPr>
+        <p:spPr>
+          <a:xfrm>
+            <a:off x="9072677" y="3931920"/>
+            <a:ext cx="2341778" cy="502920"/>
+          </a:xfrm>
+          <a:prstGeom prst="rect">
+            <a:avLst/>
+          </a:prstGeom>
+          <a:noFill/>
+          <a:ln/>
+        </p:spPr>
+        <p:txBody>
+          <a:bodyPr wrap="square" rtlCol="0" anchor="t"/>
+          <a:lstStyle/>
+          <a:p>
+            <a:pPr indent="0" marL="0">
+              <a:buNone/>
+            </a:pPr>
+            <a:r>
+              <a:rPr lang="en-US" sz="1100" dirty="0">
+                <a:solidFill>
+                  <a:srgbClr val="D8D8D8"/>
+                </a:solidFill>
+                <a:latin typeface="Cascadia Mono" pitchFamily="34" charset="0"/>
+                <a:ea typeface="Cascadia Mono" pitchFamily="34" charset="-122"/>
+                <a:cs typeface="Cascadia Mono" pitchFamily="34" charset="-120"/>
+              </a:rPr>
+              <a:t>/auth → 4672 privileged · 4648 explicit</a:t>
+            </a:r>
+            <a:endParaRPr lang="en-US" sz="1100" dirty="0"/>
+          </a:p>
+        </p:txBody>
+      </p:sp>
+      <p:sp>
+        <p:nvSpPr>
+          <p:cNvPr id="42" name="Text 40"/>
+          <p:cNvSpPr/>
+          <p:nvPr/>
+        </p:nvSpPr>
+        <p:spPr>
+          <a:xfrm>
+            <a:off x="8478317" y="4480560"/>
+            <a:ext cx="594360" cy="320040"/>
+          </a:xfrm>
+          <a:prstGeom prst="rect">
+            <a:avLst/>
+          </a:prstGeom>
+          <a:noFill/>
+          <a:ln/>
+        </p:spPr>
+        <p:txBody>
+          <a:bodyPr wrap="square" rtlCol="0" anchor="t"/>
+          <a:lstStyle/>
+          <a:p>
+            <a:pPr indent="0" marL="0">
+              <a:buNone/>
+            </a:pPr>
+            <a:r>
+              <a:rPr lang="en-US" sz="1200" b="1" dirty="0">
+                <a:solidFill>
+                  <a:srgbClr val="D97757"/>
+                </a:solidFill>
+                <a:latin typeface="Cascadia Mono" pitchFamily="34" charset="0"/>
+                <a:ea typeface="Cascadia Mono" pitchFamily="34" charset="-122"/>
+                <a:cs typeface="Cascadia Mono" pitchFamily="34" charset="-120"/>
+              </a:rPr>
+              <a:t>04</a:t>
+            </a:r>
+            <a:endParaRPr lang="en-US" sz="1200" dirty="0"/>
+          </a:p>
+        </p:txBody>
+      </p:sp>
+      <p:sp>
+        <p:nvSpPr>
+          <p:cNvPr id="43" name="Text 41"/>
+          <p:cNvSpPr/>
+          <p:nvPr/>
+        </p:nvSpPr>
+        <p:spPr>
+          <a:xfrm>
+            <a:off x="9072677" y="4480560"/>
+            <a:ext cx="2341778" cy="502920"/>
+          </a:xfrm>
+          <a:prstGeom prst="rect">
+            <a:avLst/>
+          </a:prstGeom>
+          <a:noFill/>
+          <a:ln/>
+        </p:spPr>
+        <p:txBody>
+          <a:bodyPr wrap="square" rtlCol="0" anchor="t"/>
+          <a:lstStyle/>
+          <a:p>
+            <a:pPr indent="0" marL="0">
+              <a:buNone/>
+            </a:pPr>
+            <a:r>
+              <a:rPr lang="en-US" sz="1100" dirty="0">
+                <a:solidFill>
+                  <a:srgbClr val="D8D8D8"/>
+                </a:solidFill>
+                <a:latin typeface="Cascadia Mono" pitchFamily="34" charset="0"/>
+                <a:ea typeface="Cascadia Mono" pitchFamily="34" charset="-122"/>
+                <a:cs typeface="Cascadia Mono" pitchFamily="34" charset="-120"/>
+              </a:rPr>
+              <a:t>/auth → account changes (4720…4738)</a:t>
+            </a:r>
+            <a:endParaRPr lang="en-US" sz="1100" dirty="0"/>
+          </a:p>
+        </p:txBody>
+      </p:sp>
+      <p:sp>
+        <p:nvSpPr>
+          <p:cNvPr id="44" name="Text 42"/>
+          <p:cNvSpPr/>
+          <p:nvPr/>
+        </p:nvSpPr>
+        <p:spPr>
+          <a:xfrm>
+            <a:off x="8478317" y="5029200"/>
+            <a:ext cx="594360" cy="320040"/>
+          </a:xfrm>
+          <a:prstGeom prst="rect">
+            <a:avLst/>
+          </a:prstGeom>
+          <a:noFill/>
+          <a:ln/>
+        </p:spPr>
+        <p:txBody>
+          <a:bodyPr wrap="square" rtlCol="0" anchor="t"/>
+          <a:lstStyle/>
+          <a:p>
+            <a:pPr indent="0" marL="0">
+              <a:buNone/>
+            </a:pPr>
+            <a:r>
+              <a:rPr lang="en-US" sz="1200" b="1" dirty="0">
+                <a:solidFill>
+                  <a:srgbClr val="D97757"/>
+                </a:solidFill>
+                <a:latin typeface="Cascadia Mono" pitchFamily="34" charset="0"/>
+                <a:ea typeface="Cascadia Mono" pitchFamily="34" charset="-122"/>
+                <a:cs typeface="Cascadia Mono" pitchFamily="34" charset="-120"/>
+              </a:rPr>
+              <a:t>05</a:t>
+            </a:r>
+            <a:endParaRPr lang="en-US" sz="1200" dirty="0"/>
+          </a:p>
+        </p:txBody>
+      </p:sp>
+      <p:sp>
+        <p:nvSpPr>
+          <p:cNvPr id="45" name="Text 43"/>
+          <p:cNvSpPr/>
+          <p:nvPr/>
+        </p:nvSpPr>
+        <p:spPr>
+          <a:xfrm>
+            <a:off x="9072677" y="5029200"/>
+            <a:ext cx="2341778" cy="502920"/>
+          </a:xfrm>
+          <a:prstGeom prst="rect">
+            <a:avLst/>
+          </a:prstGeom>
+          <a:noFill/>
+          <a:ln/>
+        </p:spPr>
+        <p:txBody>
+          <a:bodyPr wrap="square" rtlCol="0" anchor="t"/>
+          <a:lstStyle/>
+          <a:p>
+            <a:pPr indent="0" marL="0">
+              <a:buNone/>
+            </a:pPr>
+            <a:r>
+              <a:rPr lang="en-US" sz="1100" dirty="0">
+                <a:solidFill>
+                  <a:srgbClr val="D8D8D8"/>
+                </a:solidFill>
+                <a:latin typeface="Cascadia Mono" pitchFamily="34" charset="0"/>
+                <a:ea typeface="Cascadia Mono" pitchFamily="34" charset="-122"/>
+                <a:cs typeface="Cascadia Mono" pitchFamily="34" charset="-120"/>
+              </a:rPr>
+              <a:t>/auth → RDP session history</a:t>
+            </a:r>
+            <a:endParaRPr lang="en-US" sz="1100" dirty="0"/>
+          </a:p>
+        </p:txBody>
+      </p:sp>
+      <p:sp>
+        <p:nvSpPr>
+          <p:cNvPr id="46" name="Text 44"/>
+          <p:cNvSpPr/>
+          <p:nvPr/>
+        </p:nvSpPr>
+        <p:spPr>
+          <a:xfrm>
+            <a:off x="11002975" y="6492240"/>
+            <a:ext cx="914400" cy="228600"/>
+          </a:xfrm>
+          <a:prstGeom prst="rect">
+            <a:avLst/>
+          </a:prstGeom>
+          <a:noFill/>
+          <a:ln/>
+        </p:spPr>
+        <p:txBody>
+          <a:bodyPr wrap="square" rtlCol="0" anchor="ctr"/>
+          <a:lstStyle/>
+          <a:p>
+            <a:pPr algn="r" indent="0" marL="0">
+              <a:buNone/>
+            </a:pPr>
+            <a:r>
+              <a:rPr lang="en-US" sz="900" dirty="0">
+                <a:solidFill>
+                  <a:srgbClr val="5A5A62"/>
+                </a:solidFill>
+                <a:latin typeface="Cascadia Mono" pitchFamily="34" charset="0"/>
+                <a:ea typeface="Cascadia Mono" pitchFamily="34" charset="-122"/>
+                <a:cs typeface="Cascadia Mono" pitchFamily="34" charset="-120"/>
+              </a:rPr>
+              <a:t>13 / 15</a:t>
             </a:r>
             <a:endParaRPr lang="en-US" sz="900" dirty="0"/>
           </a:p>
@@ -6953,7 +6620,7 @@
       </p:sp>
       <p:sp>
         <p:nvSpPr>
-          <p:cNvPr id="33" name="Text 31"/>
+          <p:cNvPr id="47" name="Text 45"/>
           <p:cNvSpPr/>
           <p:nvPr/>
         </p:nvSpPr>
@@ -7030,6 +6697,1291 @@
         </p:nvSpPr>
         <p:spPr>
           <a:xfrm>
+            <a:off x="502920" y="502920"/>
+            <a:ext cx="5486400" cy="274320"/>
+          </a:xfrm>
+          <a:prstGeom prst="rect">
+            <a:avLst/>
+          </a:prstGeom>
+          <a:noFill/>
+          <a:ln/>
+        </p:spPr>
+        <p:txBody>
+          <a:bodyPr wrap="square" rtlCol="0" anchor="t"/>
+          <a:lstStyle/>
+          <a:p>
+            <a:pPr indent="0" marL="0">
+              <a:buNone/>
+            </a:pPr>
+            <a:r>
+              <a:rPr lang="en-US" sz="1100" b="1" spc="600" kern="0" dirty="0">
+                <a:solidFill>
+                  <a:srgbClr val="EB987C"/>
+                </a:solidFill>
+                <a:latin typeface="Calibri" pitchFamily="34" charset="0"/>
+                <a:ea typeface="Calibri" pitchFamily="34" charset="-122"/>
+                <a:cs typeface="Calibri" pitchFamily="34" charset="-120"/>
+              </a:rPr>
+              <a:t>INSTALLATION</a:t>
+            </a:r>
+            <a:endParaRPr lang="en-US" sz="1100" dirty="0"/>
+          </a:p>
+        </p:txBody>
+      </p:sp>
+      <p:sp>
+        <p:nvSpPr>
+          <p:cNvPr id="3" name="Text 1"/>
+          <p:cNvSpPr/>
+          <p:nvPr/>
+        </p:nvSpPr>
+        <p:spPr>
+          <a:xfrm>
+            <a:off x="502920" y="795528"/>
+            <a:ext cx="11185855" cy="822960"/>
+          </a:xfrm>
+          <a:prstGeom prst="rect">
+            <a:avLst/>
+          </a:prstGeom>
+          <a:noFill/>
+          <a:ln/>
+        </p:spPr>
+        <p:txBody>
+          <a:bodyPr wrap="square" rtlCol="0" anchor="t"/>
+          <a:lstStyle/>
+          <a:p>
+            <a:pPr indent="0" marL="0">
+              <a:buNone/>
+            </a:pPr>
+            <a:r>
+              <a:rPr lang="en-US" sz="3200" b="1" dirty="0">
+                <a:solidFill>
+                  <a:srgbClr val="EBEBEB"/>
+                </a:solidFill>
+                <a:latin typeface="Calibri" pitchFamily="34" charset="0"/>
+                <a:ea typeface="Calibri" pitchFamily="34" charset="-122"/>
+                <a:cs typeface="Calibri" pitchFamily="34" charset="-120"/>
+              </a:rPr>
+              <a:t>Drop the file. Run it.</a:t>
+            </a:r>
+            <a:endParaRPr lang="en-US" sz="3200" dirty="0"/>
+          </a:p>
+        </p:txBody>
+      </p:sp>
+      <p:sp>
+        <p:nvSpPr>
+          <p:cNvPr id="4" name="Shape 2"/>
+          <p:cNvSpPr/>
+          <p:nvPr/>
+        </p:nvSpPr>
+        <p:spPr>
+          <a:xfrm>
+            <a:off x="502920" y="1691640"/>
+            <a:ext cx="6858000" cy="4297680"/>
+          </a:xfrm>
+          <a:prstGeom prst="roundRect">
+            <a:avLst>
+              <a:gd name="adj" fmla="val 2128"/>
+            </a:avLst>
+          </a:prstGeom>
+          <a:solidFill>
+            <a:srgbClr val="14141A"/>
+          </a:solidFill>
+          <a:ln w="12700">
+            <a:solidFill>
+              <a:srgbClr val="2E2E34"/>
+            </a:solidFill>
+            <a:prstDash val="solid"/>
+          </a:ln>
+        </p:spPr>
+      </p:sp>
+      <p:sp>
+        <p:nvSpPr>
+          <p:cNvPr id="5" name="Text 3"/>
+          <p:cNvSpPr/>
+          <p:nvPr/>
+        </p:nvSpPr>
+        <p:spPr>
+          <a:xfrm>
+            <a:off x="777240" y="1828800"/>
+            <a:ext cx="6309360" cy="274320"/>
+          </a:xfrm>
+          <a:prstGeom prst="rect">
+            <a:avLst/>
+          </a:prstGeom>
+          <a:noFill/>
+          <a:ln/>
+        </p:spPr>
+        <p:txBody>
+          <a:bodyPr wrap="square" rtlCol="0" anchor="ctr"/>
+          <a:lstStyle/>
+          <a:p>
+            <a:pPr indent="0" marL="0">
+              <a:buNone/>
+            </a:pPr>
+            <a:r>
+              <a:rPr lang="en-US" sz="1000" dirty="0">
+                <a:solidFill>
+                  <a:srgbClr val="5A5A62"/>
+                </a:solidFill>
+                <a:latin typeface="Cascadia Mono" pitchFamily="34" charset="0"/>
+                <a:ea typeface="Cascadia Mono" pitchFamily="34" charset="-122"/>
+                <a:cs typeface="Cascadia Mono" pitchFamily="34" charset="-120"/>
+              </a:rPr>
+              <a:t># from your usual prompt</a:t>
+            </a:r>
+            <a:endParaRPr lang="en-US" sz="1000" dirty="0"/>
+          </a:p>
+        </p:txBody>
+      </p:sp>
+      <p:sp>
+        <p:nvSpPr>
+          <p:cNvPr id="6" name="Text 4"/>
+          <p:cNvSpPr/>
+          <p:nvPr/>
+        </p:nvSpPr>
+        <p:spPr>
+          <a:xfrm>
+            <a:off x="777240" y="2103120"/>
+            <a:ext cx="6309360" cy="502920"/>
+          </a:xfrm>
+          <a:prstGeom prst="rect">
+            <a:avLst/>
+          </a:prstGeom>
+          <a:noFill/>
+          <a:ln/>
+        </p:spPr>
+        <p:txBody>
+          <a:bodyPr wrap="square" rtlCol="0" anchor="ctr"/>
+          <a:lstStyle/>
+          <a:p>
+            <a:pPr indent="0" marL="0">
+              <a:buNone/>
+            </a:pPr>
+            <a:r>
+              <a:rPr lang="en-US" sz="1200" dirty="0">
+                <a:solidFill>
+                  <a:srgbClr val="EB987C"/>
+                </a:solidFill>
+                <a:latin typeface="Cascadia Mono" pitchFamily="34" charset="0"/>
+                <a:ea typeface="Cascadia Mono" pitchFamily="34" charset="-122"/>
+                <a:cs typeface="Cascadia Mono" pitchFamily="34" charset="-120"/>
+              </a:rPr>
+              <a:t>cd C:\Tools\ThreatHunter</a:t>
+            </a:r>
+            <a:endParaRPr lang="en-US" sz="1200" dirty="0"/>
+          </a:p>
+          <a:p>
+            <a:pPr indent="0" marL="0">
+              <a:buNone/>
+            </a:pPr>
+            <a:r>
+              <a:rPr lang="en-US" sz="1200" dirty="0">
+                <a:solidFill>
+                  <a:srgbClr val="EB987C"/>
+                </a:solidFill>
+                <a:latin typeface="Cascadia Mono" pitchFamily="34" charset="0"/>
+                <a:ea typeface="Cascadia Mono" pitchFamily="34" charset="-122"/>
+                <a:cs typeface="Cascadia Mono" pitchFamily="34" charset="-120"/>
+              </a:rPr>
+              <a:t>.\ThreatHunter.ps1</a:t>
+            </a:r>
+            <a:endParaRPr lang="en-US" sz="1200" dirty="0"/>
+          </a:p>
+        </p:txBody>
+      </p:sp>
+      <p:sp>
+        <p:nvSpPr>
+          <p:cNvPr id="7" name="Text 5"/>
+          <p:cNvSpPr/>
+          <p:nvPr/>
+        </p:nvSpPr>
+        <p:spPr>
+          <a:xfrm>
+            <a:off x="777240" y="2743200"/>
+            <a:ext cx="6309360" cy="274320"/>
+          </a:xfrm>
+          <a:prstGeom prst="rect">
+            <a:avLst/>
+          </a:prstGeom>
+          <a:noFill/>
+          <a:ln/>
+        </p:spPr>
+        <p:txBody>
+          <a:bodyPr wrap="square" rtlCol="0" anchor="ctr"/>
+          <a:lstStyle/>
+          <a:p>
+            <a:pPr indent="0" marL="0">
+              <a:buNone/>
+            </a:pPr>
+            <a:r>
+              <a:rPr lang="en-US" sz="1000" dirty="0">
+                <a:solidFill>
+                  <a:srgbClr val="5A5A62"/>
+                </a:solidFill>
+                <a:latin typeface="Cascadia Mono" pitchFamily="34" charset="0"/>
+                <a:ea typeface="Cascadia Mono" pitchFamily="34" charset="-122"/>
+                <a:cs typeface="Cascadia Mono" pitchFamily="34" charset="-120"/>
+              </a:rPr>
+              <a:t># bypass execution policy (session only)</a:t>
+            </a:r>
+            <a:endParaRPr lang="en-US" sz="1000" dirty="0"/>
+          </a:p>
+        </p:txBody>
+      </p:sp>
+      <p:sp>
+        <p:nvSpPr>
+          <p:cNvPr id="8" name="Text 6"/>
+          <p:cNvSpPr/>
+          <p:nvPr/>
+        </p:nvSpPr>
+        <p:spPr>
+          <a:xfrm>
+            <a:off x="777240" y="3017520"/>
+            <a:ext cx="6309360" cy="274320"/>
+          </a:xfrm>
+          <a:prstGeom prst="rect">
+            <a:avLst/>
+          </a:prstGeom>
+          <a:noFill/>
+          <a:ln/>
+        </p:spPr>
+        <p:txBody>
+          <a:bodyPr wrap="square" rtlCol="0" anchor="ctr"/>
+          <a:lstStyle/>
+          <a:p>
+            <a:pPr indent="0" marL="0">
+              <a:buNone/>
+            </a:pPr>
+            <a:r>
+              <a:rPr lang="en-US" sz="1200" dirty="0">
+                <a:solidFill>
+                  <a:srgbClr val="EB987C"/>
+                </a:solidFill>
+                <a:latin typeface="Cascadia Mono" pitchFamily="34" charset="0"/>
+                <a:ea typeface="Cascadia Mono" pitchFamily="34" charset="-122"/>
+                <a:cs typeface="Cascadia Mono" pitchFamily="34" charset="-120"/>
+              </a:rPr>
+              <a:t>powershell.exe -ExecutionPolicy Bypass -File .\ThreatHunter.ps1</a:t>
+            </a:r>
+            <a:endParaRPr lang="en-US" sz="1200" dirty="0"/>
+          </a:p>
+        </p:txBody>
+      </p:sp>
+      <p:sp>
+        <p:nvSpPr>
+          <p:cNvPr id="9" name="Text 7"/>
+          <p:cNvSpPr/>
+          <p:nvPr/>
+        </p:nvSpPr>
+        <p:spPr>
+          <a:xfrm>
+            <a:off x="777240" y="3429000"/>
+            <a:ext cx="6309360" cy="274320"/>
+          </a:xfrm>
+          <a:prstGeom prst="rect">
+            <a:avLst/>
+          </a:prstGeom>
+          <a:noFill/>
+          <a:ln/>
+        </p:spPr>
+        <p:txBody>
+          <a:bodyPr wrap="square" rtlCol="0" anchor="ctr"/>
+          <a:lstStyle/>
+          <a:p>
+            <a:pPr indent="0" marL="0">
+              <a:buNone/>
+            </a:pPr>
+            <a:r>
+              <a:rPr lang="en-US" sz="1000" dirty="0">
+                <a:solidFill>
+                  <a:srgbClr val="5A5A62"/>
+                </a:solidFill>
+                <a:latin typeface="Cascadia Mono" pitchFamily="34" charset="0"/>
+                <a:ea typeface="Cascadia Mono" pitchFamily="34" charset="-122"/>
+                <a:cs typeface="Cascadia Mono" pitchFamily="34" charset="-120"/>
+              </a:rPr>
+              <a:t># recommended on a target endpoint</a:t>
+            </a:r>
+            <a:endParaRPr lang="en-US" sz="1000" dirty="0"/>
+          </a:p>
+        </p:txBody>
+      </p:sp>
+      <p:sp>
+        <p:nvSpPr>
+          <p:cNvPr id="10" name="Text 8"/>
+          <p:cNvSpPr/>
+          <p:nvPr/>
+        </p:nvSpPr>
+        <p:spPr>
+          <a:xfrm>
+            <a:off x="777240" y="3703320"/>
+            <a:ext cx="6309360" cy="274320"/>
+          </a:xfrm>
+          <a:prstGeom prst="rect">
+            <a:avLst/>
+          </a:prstGeom>
+          <a:noFill/>
+          <a:ln/>
+        </p:spPr>
+        <p:txBody>
+          <a:bodyPr wrap="square" rtlCol="0" anchor="ctr"/>
+          <a:lstStyle/>
+          <a:p>
+            <a:pPr indent="0" marL="0">
+              <a:buNone/>
+            </a:pPr>
+            <a:r>
+              <a:rPr lang="en-US" sz="1200" dirty="0">
+                <a:solidFill>
+                  <a:srgbClr val="EB987C"/>
+                </a:solidFill>
+                <a:latin typeface="Cascadia Mono" pitchFamily="34" charset="0"/>
+                <a:ea typeface="Cascadia Mono" pitchFamily="34" charset="-122"/>
+                <a:cs typeface="Cascadia Mono" pitchFamily="34" charset="-120"/>
+              </a:rPr>
+              <a:t>pwsh -NoProfile -File .\ThreatHunter.ps1</a:t>
+            </a:r>
+            <a:endParaRPr lang="en-US" sz="1200" dirty="0"/>
+          </a:p>
+        </p:txBody>
+      </p:sp>
+      <p:sp>
+        <p:nvSpPr>
+          <p:cNvPr id="11" name="Text 9"/>
+          <p:cNvSpPr/>
+          <p:nvPr/>
+        </p:nvSpPr>
+        <p:spPr>
+          <a:xfrm>
+            <a:off x="777240" y="4114800"/>
+            <a:ext cx="6309360" cy="274320"/>
+          </a:xfrm>
+          <a:prstGeom prst="rect">
+            <a:avLst/>
+          </a:prstGeom>
+          <a:noFill/>
+          <a:ln/>
+        </p:spPr>
+        <p:txBody>
+          <a:bodyPr wrap="square" rtlCol="0" anchor="ctr"/>
+          <a:lstStyle/>
+          <a:p>
+            <a:pPr indent="0" marL="0">
+              <a:buNone/>
+            </a:pPr>
+            <a:r>
+              <a:rPr lang="en-US" sz="1000" dirty="0">
+                <a:solidFill>
+                  <a:srgbClr val="5A5A62"/>
+                </a:solidFill>
+                <a:latin typeface="Cascadia Mono" pitchFamily="34" charset="0"/>
+                <a:ea typeface="Cascadia Mono" pitchFamily="34" charset="-122"/>
+                <a:cs typeface="Cascadia Mono" pitchFamily="34" charset="-120"/>
+              </a:rPr>
+              <a:t># load IOCs at startup</a:t>
+            </a:r>
+            <a:endParaRPr lang="en-US" sz="1000" dirty="0"/>
+          </a:p>
+        </p:txBody>
+      </p:sp>
+      <p:sp>
+        <p:nvSpPr>
+          <p:cNvPr id="12" name="Text 10"/>
+          <p:cNvSpPr/>
+          <p:nvPr/>
+        </p:nvSpPr>
+        <p:spPr>
+          <a:xfrm>
+            <a:off x="777240" y="4389120"/>
+            <a:ext cx="6309360" cy="274320"/>
+          </a:xfrm>
+          <a:prstGeom prst="rect">
+            <a:avLst/>
+          </a:prstGeom>
+          <a:noFill/>
+          <a:ln/>
+        </p:spPr>
+        <p:txBody>
+          <a:bodyPr wrap="square" rtlCol="0" anchor="ctr"/>
+          <a:lstStyle/>
+          <a:p>
+            <a:pPr indent="0" marL="0">
+              <a:buNone/>
+            </a:pPr>
+            <a:r>
+              <a:rPr lang="en-US" sz="1200" dirty="0">
+                <a:solidFill>
+                  <a:srgbClr val="EB987C"/>
+                </a:solidFill>
+                <a:latin typeface="Cascadia Mono" pitchFamily="34" charset="0"/>
+                <a:ea typeface="Cascadia Mono" pitchFamily="34" charset="-122"/>
+                <a:cs typeface="Cascadia Mono" pitchFamily="34" charset="-120"/>
+              </a:rPr>
+              <a:t>.\ThreatHunter.ps1 -IocFile .\iocs.csv</a:t>
+            </a:r>
+            <a:endParaRPr lang="en-US" sz="1200" dirty="0"/>
+          </a:p>
+        </p:txBody>
+      </p:sp>
+      <p:sp>
+        <p:nvSpPr>
+          <p:cNvPr id="13" name="Text 11"/>
+          <p:cNvSpPr/>
+          <p:nvPr/>
+        </p:nvSpPr>
+        <p:spPr>
+          <a:xfrm>
+            <a:off x="777240" y="4800600"/>
+            <a:ext cx="6309360" cy="274320"/>
+          </a:xfrm>
+          <a:prstGeom prst="rect">
+            <a:avLst/>
+          </a:prstGeom>
+          <a:noFill/>
+          <a:ln/>
+        </p:spPr>
+        <p:txBody>
+          <a:bodyPr wrap="square" rtlCol="0" anchor="ctr"/>
+          <a:lstStyle/>
+          <a:p>
+            <a:pPr indent="0" marL="0">
+              <a:buNone/>
+            </a:pPr>
+            <a:r>
+              <a:rPr lang="en-US" sz="1000" dirty="0">
+                <a:solidFill>
+                  <a:srgbClr val="5A5A62"/>
+                </a:solidFill>
+                <a:latin typeface="Cascadia Mono" pitchFamily="34" charset="0"/>
+                <a:ea typeface="Cascadia Mono" pitchFamily="34" charset="-122"/>
+                <a:cs typeface="Cascadia Mono" pitchFamily="34" charset="-120"/>
+              </a:rPr>
+              <a:t># custom output, monochrome</a:t>
+            </a:r>
+            <a:endParaRPr lang="en-US" sz="1000" dirty="0"/>
+          </a:p>
+        </p:txBody>
+      </p:sp>
+      <p:sp>
+        <p:nvSpPr>
+          <p:cNvPr id="14" name="Text 12"/>
+          <p:cNvSpPr/>
+          <p:nvPr/>
+        </p:nvSpPr>
+        <p:spPr>
+          <a:xfrm>
+            <a:off x="777240" y="5074920"/>
+            <a:ext cx="6309360" cy="274320"/>
+          </a:xfrm>
+          <a:prstGeom prst="rect">
+            <a:avLst/>
+          </a:prstGeom>
+          <a:noFill/>
+          <a:ln/>
+        </p:spPr>
+        <p:txBody>
+          <a:bodyPr wrap="square" rtlCol="0" anchor="ctr"/>
+          <a:lstStyle/>
+          <a:p>
+            <a:pPr indent="0" marL="0">
+              <a:buNone/>
+            </a:pPr>
+            <a:r>
+              <a:rPr lang="en-US" sz="1200" dirty="0">
+                <a:solidFill>
+                  <a:srgbClr val="EB987C"/>
+                </a:solidFill>
+                <a:latin typeface="Cascadia Mono" pitchFamily="34" charset="0"/>
+                <a:ea typeface="Cascadia Mono" pitchFamily="34" charset="-122"/>
+                <a:cs typeface="Cascadia Mono" pitchFamily="34" charset="-120"/>
+              </a:rPr>
+              <a:t>.\ThreatHunter.ps1 -OutputRoot D:\IR\Cases\Q2 -NoColor</a:t>
+            </a:r>
+            <a:endParaRPr lang="en-US" sz="1200" dirty="0"/>
+          </a:p>
+        </p:txBody>
+      </p:sp>
+      <p:sp>
+        <p:nvSpPr>
+          <p:cNvPr id="15" name="Text 13"/>
+          <p:cNvSpPr/>
+          <p:nvPr/>
+        </p:nvSpPr>
+        <p:spPr>
+          <a:xfrm>
+            <a:off x="7635240" y="1691640"/>
+            <a:ext cx="4053535" cy="365760"/>
+          </a:xfrm>
+          <a:prstGeom prst="rect">
+            <a:avLst/>
+          </a:prstGeom>
+          <a:noFill/>
+          <a:ln/>
+        </p:spPr>
+        <p:txBody>
+          <a:bodyPr wrap="square" rtlCol="0" anchor="ctr"/>
+          <a:lstStyle/>
+          <a:p>
+            <a:pPr indent="0" marL="0">
+              <a:buNone/>
+            </a:pPr>
+            <a:r>
+              <a:rPr lang="en-US" sz="1800" b="1" dirty="0">
+                <a:solidFill>
+                  <a:srgbClr val="EB987C"/>
+                </a:solidFill>
+                <a:latin typeface="Calibri" pitchFamily="34" charset="0"/>
+                <a:ea typeface="Calibri" pitchFamily="34" charset="-122"/>
+                <a:cs typeface="Calibri" pitchFamily="34" charset="-120"/>
+              </a:rPr>
+              <a:t>Compatibility</a:t>
+            </a:r>
+            <a:endParaRPr lang="en-US" sz="1800" dirty="0"/>
+          </a:p>
+        </p:txBody>
+      </p:sp>
+      <p:sp>
+        <p:nvSpPr>
+          <p:cNvPr id="16" name="Text 14"/>
+          <p:cNvSpPr/>
+          <p:nvPr/>
+        </p:nvSpPr>
+        <p:spPr>
+          <a:xfrm>
+            <a:off x="7635240" y="2194560"/>
+            <a:ext cx="274320" cy="320040"/>
+          </a:xfrm>
+          <a:prstGeom prst="rect">
+            <a:avLst/>
+          </a:prstGeom>
+          <a:noFill/>
+          <a:ln/>
+        </p:spPr>
+        <p:txBody>
+          <a:bodyPr wrap="square" rtlCol="0" anchor="ctr"/>
+          <a:lstStyle/>
+          <a:p>
+            <a:pPr indent="0" marL="0">
+              <a:buNone/>
+            </a:pPr>
+            <a:r>
+              <a:rPr lang="en-US" sz="1400" b="1" dirty="0">
+                <a:solidFill>
+                  <a:srgbClr val="89C489"/>
+                </a:solidFill>
+                <a:latin typeface="Calibri" pitchFamily="34" charset="0"/>
+                <a:ea typeface="Calibri" pitchFamily="34" charset="-122"/>
+                <a:cs typeface="Calibri" pitchFamily="34" charset="-120"/>
+              </a:rPr>
+              <a:t>✓</a:t>
+            </a:r>
+            <a:endParaRPr lang="en-US" sz="1400" dirty="0"/>
+          </a:p>
+        </p:txBody>
+      </p:sp>
+      <p:sp>
+        <p:nvSpPr>
+          <p:cNvPr id="17" name="Text 15"/>
+          <p:cNvSpPr/>
+          <p:nvPr/>
+        </p:nvSpPr>
+        <p:spPr>
+          <a:xfrm>
+            <a:off x="7955280" y="2194560"/>
+            <a:ext cx="3733495" cy="320040"/>
+          </a:xfrm>
+          <a:prstGeom prst="rect">
+            <a:avLst/>
+          </a:prstGeom>
+          <a:noFill/>
+          <a:ln/>
+        </p:spPr>
+        <p:txBody>
+          <a:bodyPr wrap="square" rtlCol="0" anchor="ctr"/>
+          <a:lstStyle/>
+          <a:p>
+            <a:pPr indent="0" marL="0">
+              <a:buNone/>
+            </a:pPr>
+            <a:r>
+              <a:rPr lang="en-US" sz="1300" dirty="0">
+                <a:solidFill>
+                  <a:srgbClr val="D8D8D8"/>
+                </a:solidFill>
+                <a:latin typeface="Calibri" pitchFamily="34" charset="0"/>
+                <a:ea typeface="Calibri" pitchFamily="34" charset="-122"/>
+                <a:cs typeface="Calibri" pitchFamily="34" charset="-120"/>
+              </a:rPr>
+              <a:t>Windows 10 / 11</a:t>
+            </a:r>
+            <a:endParaRPr lang="en-US" sz="1300" dirty="0"/>
+          </a:p>
+        </p:txBody>
+      </p:sp>
+      <p:sp>
+        <p:nvSpPr>
+          <p:cNvPr id="18" name="Text 16"/>
+          <p:cNvSpPr/>
+          <p:nvPr/>
+        </p:nvSpPr>
+        <p:spPr>
+          <a:xfrm>
+            <a:off x="7635240" y="2651760"/>
+            <a:ext cx="274320" cy="320040"/>
+          </a:xfrm>
+          <a:prstGeom prst="rect">
+            <a:avLst/>
+          </a:prstGeom>
+          <a:noFill/>
+          <a:ln/>
+        </p:spPr>
+        <p:txBody>
+          <a:bodyPr wrap="square" rtlCol="0" anchor="ctr"/>
+          <a:lstStyle/>
+          <a:p>
+            <a:pPr indent="0" marL="0">
+              <a:buNone/>
+            </a:pPr>
+            <a:r>
+              <a:rPr lang="en-US" sz="1400" b="1" dirty="0">
+                <a:solidFill>
+                  <a:srgbClr val="89C489"/>
+                </a:solidFill>
+                <a:latin typeface="Calibri" pitchFamily="34" charset="0"/>
+                <a:ea typeface="Calibri" pitchFamily="34" charset="-122"/>
+                <a:cs typeface="Calibri" pitchFamily="34" charset="-120"/>
+              </a:rPr>
+              <a:t>✓</a:t>
+            </a:r>
+            <a:endParaRPr lang="en-US" sz="1400" dirty="0"/>
+          </a:p>
+        </p:txBody>
+      </p:sp>
+      <p:sp>
+        <p:nvSpPr>
+          <p:cNvPr id="19" name="Text 17"/>
+          <p:cNvSpPr/>
+          <p:nvPr/>
+        </p:nvSpPr>
+        <p:spPr>
+          <a:xfrm>
+            <a:off x="7955280" y="2651760"/>
+            <a:ext cx="3733495" cy="320040"/>
+          </a:xfrm>
+          <a:prstGeom prst="rect">
+            <a:avLst/>
+          </a:prstGeom>
+          <a:noFill/>
+          <a:ln/>
+        </p:spPr>
+        <p:txBody>
+          <a:bodyPr wrap="square" rtlCol="0" anchor="ctr"/>
+          <a:lstStyle/>
+          <a:p>
+            <a:pPr indent="0" marL="0">
+              <a:buNone/>
+            </a:pPr>
+            <a:r>
+              <a:rPr lang="en-US" sz="1300" dirty="0">
+                <a:solidFill>
+                  <a:srgbClr val="D8D8D8"/>
+                </a:solidFill>
+                <a:latin typeface="Calibri" pitchFamily="34" charset="0"/>
+                <a:ea typeface="Calibri" pitchFamily="34" charset="-122"/>
+                <a:cs typeface="Calibri" pitchFamily="34" charset="-120"/>
+              </a:rPr>
+              <a:t>Windows Server 2016+</a:t>
+            </a:r>
+            <a:endParaRPr lang="en-US" sz="1300" dirty="0"/>
+          </a:p>
+        </p:txBody>
+      </p:sp>
+      <p:sp>
+        <p:nvSpPr>
+          <p:cNvPr id="20" name="Text 18"/>
+          <p:cNvSpPr/>
+          <p:nvPr/>
+        </p:nvSpPr>
+        <p:spPr>
+          <a:xfrm>
+            <a:off x="7635240" y="3108960"/>
+            <a:ext cx="274320" cy="320040"/>
+          </a:xfrm>
+          <a:prstGeom prst="rect">
+            <a:avLst/>
+          </a:prstGeom>
+          <a:noFill/>
+          <a:ln/>
+        </p:spPr>
+        <p:txBody>
+          <a:bodyPr wrap="square" rtlCol="0" anchor="ctr"/>
+          <a:lstStyle/>
+          <a:p>
+            <a:pPr indent="0" marL="0">
+              <a:buNone/>
+            </a:pPr>
+            <a:r>
+              <a:rPr lang="en-US" sz="1400" b="1" dirty="0">
+                <a:solidFill>
+                  <a:srgbClr val="89C489"/>
+                </a:solidFill>
+                <a:latin typeface="Calibri" pitchFamily="34" charset="0"/>
+                <a:ea typeface="Calibri" pitchFamily="34" charset="-122"/>
+                <a:cs typeface="Calibri" pitchFamily="34" charset="-120"/>
+              </a:rPr>
+              <a:t>✓</a:t>
+            </a:r>
+            <a:endParaRPr lang="en-US" sz="1400" dirty="0"/>
+          </a:p>
+        </p:txBody>
+      </p:sp>
+      <p:sp>
+        <p:nvSpPr>
+          <p:cNvPr id="21" name="Text 19"/>
+          <p:cNvSpPr/>
+          <p:nvPr/>
+        </p:nvSpPr>
+        <p:spPr>
+          <a:xfrm>
+            <a:off x="7955280" y="3108960"/>
+            <a:ext cx="3733495" cy="320040"/>
+          </a:xfrm>
+          <a:prstGeom prst="rect">
+            <a:avLst/>
+          </a:prstGeom>
+          <a:noFill/>
+          <a:ln/>
+        </p:spPr>
+        <p:txBody>
+          <a:bodyPr wrap="square" rtlCol="0" anchor="ctr"/>
+          <a:lstStyle/>
+          <a:p>
+            <a:pPr indent="0" marL="0">
+              <a:buNone/>
+            </a:pPr>
+            <a:r>
+              <a:rPr lang="en-US" sz="1300" dirty="0">
+                <a:solidFill>
+                  <a:srgbClr val="D8D8D8"/>
+                </a:solidFill>
+                <a:latin typeface="Calibri" pitchFamily="34" charset="0"/>
+                <a:ea typeface="Calibri" pitchFamily="34" charset="-122"/>
+                <a:cs typeface="Calibri" pitchFamily="34" charset="-120"/>
+              </a:rPr>
+              <a:t>PowerShell 5.1</a:t>
+            </a:r>
+            <a:endParaRPr lang="en-US" sz="1300" dirty="0"/>
+          </a:p>
+        </p:txBody>
+      </p:sp>
+      <p:sp>
+        <p:nvSpPr>
+          <p:cNvPr id="22" name="Text 20"/>
+          <p:cNvSpPr/>
+          <p:nvPr/>
+        </p:nvSpPr>
+        <p:spPr>
+          <a:xfrm>
+            <a:off x="7635240" y="3566160"/>
+            <a:ext cx="274320" cy="320040"/>
+          </a:xfrm>
+          <a:prstGeom prst="rect">
+            <a:avLst/>
+          </a:prstGeom>
+          <a:noFill/>
+          <a:ln/>
+        </p:spPr>
+        <p:txBody>
+          <a:bodyPr wrap="square" rtlCol="0" anchor="ctr"/>
+          <a:lstStyle/>
+          <a:p>
+            <a:pPr indent="0" marL="0">
+              <a:buNone/>
+            </a:pPr>
+            <a:r>
+              <a:rPr lang="en-US" sz="1400" b="1" dirty="0">
+                <a:solidFill>
+                  <a:srgbClr val="89C489"/>
+                </a:solidFill>
+                <a:latin typeface="Calibri" pitchFamily="34" charset="0"/>
+                <a:ea typeface="Calibri" pitchFamily="34" charset="-122"/>
+                <a:cs typeface="Calibri" pitchFamily="34" charset="-120"/>
+              </a:rPr>
+              <a:t>✓</a:t>
+            </a:r>
+            <a:endParaRPr lang="en-US" sz="1400" dirty="0"/>
+          </a:p>
+        </p:txBody>
+      </p:sp>
+      <p:sp>
+        <p:nvSpPr>
+          <p:cNvPr id="23" name="Text 21"/>
+          <p:cNvSpPr/>
+          <p:nvPr/>
+        </p:nvSpPr>
+        <p:spPr>
+          <a:xfrm>
+            <a:off x="7955280" y="3566160"/>
+            <a:ext cx="3733495" cy="320040"/>
+          </a:xfrm>
+          <a:prstGeom prst="rect">
+            <a:avLst/>
+          </a:prstGeom>
+          <a:noFill/>
+          <a:ln/>
+        </p:spPr>
+        <p:txBody>
+          <a:bodyPr wrap="square" rtlCol="0" anchor="ctr"/>
+          <a:lstStyle/>
+          <a:p>
+            <a:pPr indent="0" marL="0">
+              <a:buNone/>
+            </a:pPr>
+            <a:r>
+              <a:rPr lang="en-US" sz="1300" dirty="0">
+                <a:solidFill>
+                  <a:srgbClr val="D8D8D8"/>
+                </a:solidFill>
+                <a:latin typeface="Calibri" pitchFamily="34" charset="0"/>
+                <a:ea typeface="Calibri" pitchFamily="34" charset="-122"/>
+                <a:cs typeface="Calibri" pitchFamily="34" charset="-120"/>
+              </a:rPr>
+              <a:t>PowerShell 7+</a:t>
+            </a:r>
+            <a:endParaRPr lang="en-US" sz="1300" dirty="0"/>
+          </a:p>
+        </p:txBody>
+      </p:sp>
+      <p:sp>
+        <p:nvSpPr>
+          <p:cNvPr id="24" name="Text 22"/>
+          <p:cNvSpPr/>
+          <p:nvPr/>
+        </p:nvSpPr>
+        <p:spPr>
+          <a:xfrm>
+            <a:off x="7635240" y="4023360"/>
+            <a:ext cx="274320" cy="320040"/>
+          </a:xfrm>
+          <a:prstGeom prst="rect">
+            <a:avLst/>
+          </a:prstGeom>
+          <a:noFill/>
+          <a:ln/>
+        </p:spPr>
+        <p:txBody>
+          <a:bodyPr wrap="square" rtlCol="0" anchor="ctr"/>
+          <a:lstStyle/>
+          <a:p>
+            <a:pPr indent="0" marL="0">
+              <a:buNone/>
+            </a:pPr>
+            <a:r>
+              <a:rPr lang="en-US" sz="1400" b="1" dirty="0">
+                <a:solidFill>
+                  <a:srgbClr val="89C489"/>
+                </a:solidFill>
+                <a:latin typeface="Calibri" pitchFamily="34" charset="0"/>
+                <a:ea typeface="Calibri" pitchFamily="34" charset="-122"/>
+                <a:cs typeface="Calibri" pitchFamily="34" charset="-120"/>
+              </a:rPr>
+              <a:t>✓</a:t>
+            </a:r>
+            <a:endParaRPr lang="en-US" sz="1400" dirty="0"/>
+          </a:p>
+        </p:txBody>
+      </p:sp>
+      <p:sp>
+        <p:nvSpPr>
+          <p:cNvPr id="25" name="Text 23"/>
+          <p:cNvSpPr/>
+          <p:nvPr/>
+        </p:nvSpPr>
+        <p:spPr>
+          <a:xfrm>
+            <a:off x="7955280" y="4023360"/>
+            <a:ext cx="3733495" cy="320040"/>
+          </a:xfrm>
+          <a:prstGeom prst="rect">
+            <a:avLst/>
+          </a:prstGeom>
+          <a:noFill/>
+          <a:ln/>
+        </p:spPr>
+        <p:txBody>
+          <a:bodyPr wrap="square" rtlCol="0" anchor="ctr"/>
+          <a:lstStyle/>
+          <a:p>
+            <a:pPr indent="0" marL="0">
+              <a:buNone/>
+            </a:pPr>
+            <a:r>
+              <a:rPr lang="en-US" sz="1300" dirty="0">
+                <a:solidFill>
+                  <a:srgbClr val="D8D8D8"/>
+                </a:solidFill>
+                <a:latin typeface="Calibri" pitchFamily="34" charset="0"/>
+                <a:ea typeface="Calibri" pitchFamily="34" charset="-122"/>
+                <a:cs typeface="Calibri" pitchFamily="34" charset="-120"/>
+              </a:rPr>
+              <a:t>Windows Terminal</a:t>
+            </a:r>
+            <a:endParaRPr lang="en-US" sz="1300" dirty="0"/>
+          </a:p>
+        </p:txBody>
+      </p:sp>
+      <p:sp>
+        <p:nvSpPr>
+          <p:cNvPr id="26" name="Text 24"/>
+          <p:cNvSpPr/>
+          <p:nvPr/>
+        </p:nvSpPr>
+        <p:spPr>
+          <a:xfrm>
+            <a:off x="7635240" y="4480560"/>
+            <a:ext cx="274320" cy="320040"/>
+          </a:xfrm>
+          <a:prstGeom prst="rect">
+            <a:avLst/>
+          </a:prstGeom>
+          <a:noFill/>
+          <a:ln/>
+        </p:spPr>
+        <p:txBody>
+          <a:bodyPr wrap="square" rtlCol="0" anchor="ctr"/>
+          <a:lstStyle/>
+          <a:p>
+            <a:pPr indent="0" marL="0">
+              <a:buNone/>
+            </a:pPr>
+            <a:r>
+              <a:rPr lang="en-US" sz="1400" b="1" dirty="0">
+                <a:solidFill>
+                  <a:srgbClr val="89C489"/>
+                </a:solidFill>
+                <a:latin typeface="Calibri" pitchFamily="34" charset="0"/>
+                <a:ea typeface="Calibri" pitchFamily="34" charset="-122"/>
+                <a:cs typeface="Calibri" pitchFamily="34" charset="-120"/>
+              </a:rPr>
+              <a:t>✓</a:t>
+            </a:r>
+            <a:endParaRPr lang="en-US" sz="1400" dirty="0"/>
+          </a:p>
+        </p:txBody>
+      </p:sp>
+      <p:sp>
+        <p:nvSpPr>
+          <p:cNvPr id="27" name="Text 25"/>
+          <p:cNvSpPr/>
+          <p:nvPr/>
+        </p:nvSpPr>
+        <p:spPr>
+          <a:xfrm>
+            <a:off x="7955280" y="4480560"/>
+            <a:ext cx="3733495" cy="320040"/>
+          </a:xfrm>
+          <a:prstGeom prst="rect">
+            <a:avLst/>
+          </a:prstGeom>
+          <a:noFill/>
+          <a:ln/>
+        </p:spPr>
+        <p:txBody>
+          <a:bodyPr wrap="square" rtlCol="0" anchor="ctr"/>
+          <a:lstStyle/>
+          <a:p>
+            <a:pPr indent="0" marL="0">
+              <a:buNone/>
+            </a:pPr>
+            <a:r>
+              <a:rPr lang="en-US" sz="1300" dirty="0">
+                <a:solidFill>
+                  <a:srgbClr val="D8D8D8"/>
+                </a:solidFill>
+                <a:latin typeface="Calibri" pitchFamily="34" charset="0"/>
+                <a:ea typeface="Calibri" pitchFamily="34" charset="-122"/>
+                <a:cs typeface="Calibri" pitchFamily="34" charset="-120"/>
+              </a:rPr>
+              <a:t>conhost.exe (legacy)</a:t>
+            </a:r>
+            <a:endParaRPr lang="en-US" sz="1300" dirty="0"/>
+          </a:p>
+        </p:txBody>
+      </p:sp>
+      <p:sp>
+        <p:nvSpPr>
+          <p:cNvPr id="28" name="Text 26"/>
+          <p:cNvSpPr/>
+          <p:nvPr/>
+        </p:nvSpPr>
+        <p:spPr>
+          <a:xfrm>
+            <a:off x="7635240" y="4937760"/>
+            <a:ext cx="274320" cy="320040"/>
+          </a:xfrm>
+          <a:prstGeom prst="rect">
+            <a:avLst/>
+          </a:prstGeom>
+          <a:noFill/>
+          <a:ln/>
+        </p:spPr>
+        <p:txBody>
+          <a:bodyPr wrap="square" rtlCol="0" anchor="ctr"/>
+          <a:lstStyle/>
+          <a:p>
+            <a:pPr indent="0" marL="0">
+              <a:buNone/>
+            </a:pPr>
+            <a:r>
+              <a:rPr lang="en-US" sz="1400" b="1" dirty="0">
+                <a:solidFill>
+                  <a:srgbClr val="89C489"/>
+                </a:solidFill>
+                <a:latin typeface="Calibri" pitchFamily="34" charset="0"/>
+                <a:ea typeface="Calibri" pitchFamily="34" charset="-122"/>
+                <a:cs typeface="Calibri" pitchFamily="34" charset="-120"/>
+              </a:rPr>
+              <a:t>✓</a:t>
+            </a:r>
+            <a:endParaRPr lang="en-US" sz="1400" dirty="0"/>
+          </a:p>
+        </p:txBody>
+      </p:sp>
+      <p:sp>
+        <p:nvSpPr>
+          <p:cNvPr id="29" name="Text 27"/>
+          <p:cNvSpPr/>
+          <p:nvPr/>
+        </p:nvSpPr>
+        <p:spPr>
+          <a:xfrm>
+            <a:off x="7955280" y="4937760"/>
+            <a:ext cx="3733495" cy="320040"/>
+          </a:xfrm>
+          <a:prstGeom prst="rect">
+            <a:avLst/>
+          </a:prstGeom>
+          <a:noFill/>
+          <a:ln/>
+        </p:spPr>
+        <p:txBody>
+          <a:bodyPr wrap="square" rtlCol="0" anchor="ctr"/>
+          <a:lstStyle/>
+          <a:p>
+            <a:pPr indent="0" marL="0">
+              <a:buNone/>
+            </a:pPr>
+            <a:r>
+              <a:rPr lang="en-US" sz="1300" dirty="0">
+                <a:solidFill>
+                  <a:srgbClr val="D8D8D8"/>
+                </a:solidFill>
+                <a:latin typeface="Calibri" pitchFamily="34" charset="0"/>
+                <a:ea typeface="Calibri" pitchFamily="34" charset="-122"/>
+                <a:cs typeface="Calibri" pitchFamily="34" charset="-120"/>
+              </a:rPr>
+              <a:t>VS Code terminal</a:t>
+            </a:r>
+            <a:endParaRPr lang="en-US" sz="1300" dirty="0"/>
+          </a:p>
+        </p:txBody>
+      </p:sp>
+      <p:sp>
+        <p:nvSpPr>
+          <p:cNvPr id="30" name="Text 28"/>
+          <p:cNvSpPr/>
+          <p:nvPr/>
+        </p:nvSpPr>
+        <p:spPr>
+          <a:xfrm>
+            <a:off x="7635240" y="5394960"/>
+            <a:ext cx="274320" cy="320040"/>
+          </a:xfrm>
+          <a:prstGeom prst="rect">
+            <a:avLst/>
+          </a:prstGeom>
+          <a:noFill/>
+          <a:ln/>
+        </p:spPr>
+        <p:txBody>
+          <a:bodyPr wrap="square" rtlCol="0" anchor="ctr"/>
+          <a:lstStyle/>
+          <a:p>
+            <a:pPr indent="0" marL="0">
+              <a:buNone/>
+            </a:pPr>
+            <a:r>
+              <a:rPr lang="en-US" sz="1400" b="1" dirty="0">
+                <a:solidFill>
+                  <a:srgbClr val="89C489"/>
+                </a:solidFill>
+                <a:latin typeface="Calibri" pitchFamily="34" charset="0"/>
+                <a:ea typeface="Calibri" pitchFamily="34" charset="-122"/>
+                <a:cs typeface="Calibri" pitchFamily="34" charset="-120"/>
+              </a:rPr>
+              <a:t>✓</a:t>
+            </a:r>
+            <a:endParaRPr lang="en-US" sz="1400" dirty="0"/>
+          </a:p>
+        </p:txBody>
+      </p:sp>
+      <p:sp>
+        <p:nvSpPr>
+          <p:cNvPr id="31" name="Text 29"/>
+          <p:cNvSpPr/>
+          <p:nvPr/>
+        </p:nvSpPr>
+        <p:spPr>
+          <a:xfrm>
+            <a:off x="7955280" y="5394960"/>
+            <a:ext cx="3733495" cy="320040"/>
+          </a:xfrm>
+          <a:prstGeom prst="rect">
+            <a:avLst/>
+          </a:prstGeom>
+          <a:noFill/>
+          <a:ln/>
+        </p:spPr>
+        <p:txBody>
+          <a:bodyPr wrap="square" rtlCol="0" anchor="ctr"/>
+          <a:lstStyle/>
+          <a:p>
+            <a:pPr indent="0" marL="0">
+              <a:buNone/>
+            </a:pPr>
+            <a:r>
+              <a:rPr lang="en-US" sz="1300" dirty="0">
+                <a:solidFill>
+                  <a:srgbClr val="D8D8D8"/>
+                </a:solidFill>
+                <a:latin typeface="Calibri" pitchFamily="34" charset="0"/>
+                <a:ea typeface="Calibri" pitchFamily="34" charset="-122"/>
+                <a:cs typeface="Calibri" pitchFamily="34" charset="-120"/>
+              </a:rPr>
+              <a:t>ConEmu</a:t>
+            </a:r>
+            <a:endParaRPr lang="en-US" sz="1300" dirty="0"/>
+          </a:p>
+        </p:txBody>
+      </p:sp>
+      <p:sp>
+        <p:nvSpPr>
+          <p:cNvPr id="32" name="Text 30"/>
+          <p:cNvSpPr/>
+          <p:nvPr/>
+        </p:nvSpPr>
+        <p:spPr>
+          <a:xfrm>
+            <a:off x="11002975" y="6492240"/>
+            <a:ext cx="914400" cy="228600"/>
+          </a:xfrm>
+          <a:prstGeom prst="rect">
+            <a:avLst/>
+          </a:prstGeom>
+          <a:noFill/>
+          <a:ln/>
+        </p:spPr>
+        <p:txBody>
+          <a:bodyPr wrap="square" rtlCol="0" anchor="ctr"/>
+          <a:lstStyle/>
+          <a:p>
+            <a:pPr algn="r" indent="0" marL="0">
+              <a:buNone/>
+            </a:pPr>
+            <a:r>
+              <a:rPr lang="en-US" sz="900" dirty="0">
+                <a:solidFill>
+                  <a:srgbClr val="5A5A62"/>
+                </a:solidFill>
+                <a:latin typeface="Cascadia Mono" pitchFamily="34" charset="0"/>
+                <a:ea typeface="Cascadia Mono" pitchFamily="34" charset="-122"/>
+                <a:cs typeface="Cascadia Mono" pitchFamily="34" charset="-120"/>
+              </a:rPr>
+              <a:t>14 / 15</a:t>
+            </a:r>
+            <a:endParaRPr lang="en-US" sz="900" dirty="0"/>
+          </a:p>
+        </p:txBody>
+      </p:sp>
+      <p:sp>
+        <p:nvSpPr>
+          <p:cNvPr id="33" name="Text 31"/>
+          <p:cNvSpPr/>
+          <p:nvPr/>
+        </p:nvSpPr>
+        <p:spPr>
+          <a:xfrm>
+            <a:off x="502920" y="6492240"/>
+            <a:ext cx="3657600" cy="228600"/>
+          </a:xfrm>
+          <a:prstGeom prst="rect">
+            <a:avLst/>
+          </a:prstGeom>
+          <a:noFill/>
+          <a:ln/>
+        </p:spPr>
+        <p:txBody>
+          <a:bodyPr wrap="square" rtlCol="0" anchor="ctr"/>
+          <a:lstStyle/>
+          <a:p>
+            <a:pPr indent="0" marL="0">
+              <a:buNone/>
+            </a:pPr>
+            <a:r>
+              <a:rPr lang="en-US" sz="1000" dirty="0">
+                <a:solidFill>
+                  <a:srgbClr val="5A5A62"/>
+                </a:solidFill>
+                <a:latin typeface="Calibri" pitchFamily="34" charset="0"/>
+                <a:ea typeface="Calibri" pitchFamily="34" charset="-122"/>
+                <a:cs typeface="Calibri" pitchFamily="34" charset="-120"/>
+              </a:rPr>
+              <a:t>◆ ThreatHunter</a:t>
+            </a:r>
+            <a:endParaRPr lang="en-US" sz="1000" dirty="0"/>
+          </a:p>
+        </p:txBody>
+      </p:sp>
+    </p:spTree>
+  </p:cSld>
+  <p:clrMapOvr>
+    <a:masterClrMapping/>
+  </p:clrMapOvr>
+</p:sld>
+</file>
+
+<file path=ppt/slides/slide15.xml><?xml version="1.0" encoding="utf-8"?>
+<p:sld xmlns:a="http://schemas.openxmlformats.org/drawingml/2006/main" xmlns:r="http://schemas.openxmlformats.org/officeDocument/2006/relationships" xmlns:p="http://schemas.openxmlformats.org/presentationml/2006/main">
+  <p:cSld name="Slide 15">
+    <p:bg>
+      <p:bgPr>
+        <a:solidFill>
+          <a:srgbClr val="16161A"/>
+        </a:solidFill>
+      </p:bgPr>
+    </p:bg>
+    <p:spTree>
+      <p:nvGrpSpPr>
+        <p:cNvPr id="1" name=""/>
+        <p:cNvGrpSpPr/>
+        <p:nvPr/>
+      </p:nvGrpSpPr>
+      <p:grpSpPr>
+        <a:xfrm>
+          <a:off x="0" y="0"/>
+          <a:ext cx="0" cy="0"/>
+          <a:chOff x="0" y="0"/>
+          <a:chExt cx="0" cy="0"/>
+        </a:xfrm>
+      </p:grpSpPr>
+      <p:sp>
+        <p:nvSpPr>
+          <p:cNvPr id="2" name="Text 0"/>
+          <p:cNvSpPr/>
+          <p:nvPr/>
+        </p:nvSpPr>
+        <p:spPr>
+          <a:xfrm>
             <a:off x="502920" y="914400"/>
             <a:ext cx="640080" cy="822960"/>
           </a:xfrm>
@@ -7616,7 +8568,7 @@
                 <a:ea typeface="Cascadia Mono" pitchFamily="34" charset="-122"/>
                 <a:cs typeface="Cascadia Mono" pitchFamily="34" charset="-120"/>
               </a:rPr>
-              <a:t>14 / 14</a:t>
+              <a:t>15 / 15</a:t>
             </a:r>
             <a:endParaRPr lang="en-US" sz="900" dirty="0"/>
           </a:p>
@@ -8308,7 +9260,7 @@
                 <a:ea typeface="Cascadia Mono" pitchFamily="34" charset="-122"/>
                 <a:cs typeface="Cascadia Mono" pitchFamily="34" charset="-120"/>
               </a:rPr>
-              <a:t>02 / 14</a:t>
+              <a:t>02 / 15</a:t>
             </a:r>
             <a:endParaRPr lang="en-US" sz="900" dirty="0"/>
           </a:p>
@@ -8941,7 +9893,7 @@
                 <a:ea typeface="Cascadia Mono" pitchFamily="34" charset="-122"/>
                 <a:cs typeface="Cascadia Mono" pitchFamily="34" charset="-120"/>
               </a:rPr>
-              <a:t>03 / 14</a:t>
+              <a:t>03 / 15</a:t>
             </a:r>
             <a:endParaRPr lang="en-US" sz="900" dirty="0"/>
           </a:p>
@@ -10857,7 +11809,7 @@
                 <a:ea typeface="Cascadia Mono" pitchFamily="34" charset="-122"/>
                 <a:cs typeface="Cascadia Mono" pitchFamily="34" charset="-120"/>
               </a:rPr>
-              <a:t>04 / 14</a:t>
+              <a:t>04 / 15</a:t>
             </a:r>
             <a:endParaRPr lang="en-US" sz="900" dirty="0"/>
           </a:p>
@@ -11459,7 +12411,7 @@
                 <a:ea typeface="Cascadia Mono" pitchFamily="34" charset="-122"/>
                 <a:cs typeface="Cascadia Mono" pitchFamily="34" charset="-120"/>
               </a:rPr>
-              <a:t>05 / 14</a:t>
+              <a:t>05 / 15</a:t>
             </a:r>
             <a:endParaRPr lang="en-US" sz="900" dirty="0"/>
           </a:p>
@@ -12295,7 +13247,7 @@
                 <a:ea typeface="Cascadia Mono" pitchFamily="34" charset="-122"/>
                 <a:cs typeface="Cascadia Mono" pitchFamily="34" charset="-120"/>
               </a:rPr>
-              <a:t>06 / 14</a:t>
+              <a:t>06 / 15</a:t>
             </a:r>
             <a:endParaRPr lang="en-US" sz="900" dirty="0"/>
           </a:p>
@@ -13131,7 +14083,7 @@
                 <a:ea typeface="Cascadia Mono" pitchFamily="34" charset="-122"/>
                 <a:cs typeface="Cascadia Mono" pitchFamily="34" charset="-120"/>
               </a:rPr>
-              <a:t>07 / 14</a:t>
+              <a:t>07 / 15</a:t>
             </a:r>
             <a:endParaRPr lang="en-US" sz="900" dirty="0"/>
           </a:p>
@@ -13767,7 +14719,7 @@
                 <a:ea typeface="Cascadia Mono" pitchFamily="34" charset="-122"/>
                 <a:cs typeface="Cascadia Mono" pitchFamily="34" charset="-120"/>
               </a:rPr>
-              <a:t>08 / 14</a:t>
+              <a:t>08 / 15</a:t>
             </a:r>
             <a:endParaRPr lang="en-US" sz="900" dirty="0"/>
           </a:p>
@@ -14435,7 +15387,7 @@
                 <a:ea typeface="Cascadia Mono" pitchFamily="34" charset="-122"/>
                 <a:cs typeface="Cascadia Mono" pitchFamily="34" charset="-120"/>
               </a:rPr>
-              <a:t>09 / 14</a:t>
+              <a:t>09 / 15</a:t>
             </a:r>
             <a:endParaRPr lang="en-US" sz="900" dirty="0"/>
           </a:p>
